--- a/deliverables/TwinVerse_Inspect_AI_Pitch.pptx
+++ b/deliverables/TwinVerse_Inspect_AI_Pitch.pptx
@@ -17,9 +17,10 @@
     <p:sldId id="265" r:id="rId11"/>
     <p:sldId id="266" r:id="rId12"/>
     <p:sldId id="267" r:id="rId13"/>
+    <p:sldId id="268" r:id="rId14"/>
   </p:sldIdLst>
   <p:notesMasterIdLst>
-    <p:notesMasterId r:id="rId14"/>
+    <p:notesMasterId r:id="rId15"/>
   </p:notesMasterIdLst>
   <p:sldSz cx="12192000" cy="6858000"/>
   <p:notesSz cx="6858000" cy="12192000"/>
@@ -464,6 +465,340 @@
 </c:chartSpace>
 </file>
 
+<file path=ppt/charts/chart2.xml><?xml version="1.0" encoding="utf-8"?>
+<c:chartSpace xmlns:c="http://schemas.openxmlformats.org/drawingml/2006/chart" xmlns:a="http://schemas.openxmlformats.org/drawingml/2006/main" xmlns:r="http://schemas.openxmlformats.org/officeDocument/2006/relationships">
+  <c:date1904 val="0"/>
+  <c:roundedCorners val="1"/>
+  <c:chart>
+    <c:autoTitleDeleted val="1"/>
+    <c:plotArea>
+      <c:layout/>
+      <c:barChart>
+        <c:barDir val="col"/>
+        <c:grouping val="clustered"/>
+        <c:varyColors val="0"/>
+        <c:ser>
+          <c:idx val="0"/>
+          <c:order val="0"/>
+          <c:tx>
+            <c:strRef>
+              <c:f>Sheet1!$B$1</c:f>
+              <c:strCache>
+                <c:ptCount val="1"/>
+                <c:pt idx="0">
+                  <c:v>Our own test split</c:v>
+                </c:pt>
+              </c:strCache>
+            </c:strRef>
+          </c:tx>
+          <c:spPr>
+            <a:solidFill>
+              <a:srgbClr val="64748B"/>
+            </a:solidFill>
+            <a:effectLst/>
+          </c:spPr>
+          <c:invertIfNegative val="0"/>
+          <c:dLbls>
+            <c:numFmt formatCode="0.000" sourceLinked="0"/>
+            <c:txPr>
+              <a:bodyPr/>
+              <a:lstStyle/>
+              <a:p>
+                <a:pPr>
+                  <a:defRPr b="0" i="0" strike="noStrike" sz="1000" u="none">
+                    <a:solidFill>
+                      <a:srgbClr val="E8EEF8"/>
+                    </a:solidFill>
+                    <a:latin typeface="Arial"/>
+                  </a:defRPr>
+                </a:pPr>
+              </a:p>
+            </c:txPr>
+            <c:showLegendKey val="0"/>
+            <c:showVal val="1"/>
+            <c:showCatName val="0"/>
+            <c:showSerName val="0"/>
+            <c:showPercent val="0"/>
+            <c:showBubbleSize val="0"/>
+            <c:showLeaderLines val="0"/>
+          </c:dLbls>
+          <c:cat>
+            <c:multiLvlStrRef>
+              <c:f>Sheet1!$A$2:$A$3</c:f>
+              <c:multiLvlStrCache>
+                <c:ptCount val="2"/>
+                <c:lvl>
+                  <c:pt idx="0">
+                    <c:v>Cracks found</c:v>
+                  </c:pt>
+                  <c:pt idx="1">
+                    <c:v>Separation</c:v>
+                  </c:pt>
+                </c:lvl>
+              </c:multiLvlStrCache>
+            </c:multiLvlStrRef>
+          </c:cat>
+          <c:val>
+            <c:numRef>
+              <c:f>Sheet1!$B$2:$B$3</c:f>
+              <c:numCache>
+                <c:formatCode>General</c:formatCode>
+                <c:ptCount val="2"/>
+                <c:pt idx="0">
+                  <c:v>0.81</c:v>
+                </c:pt>
+                <c:pt idx="1">
+                  <c:v>0.611</c:v>
+                </c:pt>
+              </c:numCache>
+            </c:numRef>
+          </c:val>
+        </c:ser>
+        <c:ser>
+          <c:idx val="1"/>
+          <c:order val="1"/>
+          <c:tx>
+            <c:strRef>
+              <c:f>Sheet1!$C$1</c:f>
+              <c:strCache>
+                <c:ptCount val="1"/>
+                <c:pt idx="0">
+                  <c:v>Unseen dataset</c:v>
+                </c:pt>
+              </c:strCache>
+            </c:strRef>
+          </c:tx>
+          <c:spPr>
+            <a:solidFill>
+              <a:srgbClr val="22D3EE"/>
+            </a:solidFill>
+            <a:effectLst/>
+          </c:spPr>
+          <c:invertIfNegative val="0"/>
+          <c:dLbls>
+            <c:numFmt formatCode="0.000" sourceLinked="0"/>
+            <c:txPr>
+              <a:bodyPr/>
+              <a:lstStyle/>
+              <a:p>
+                <a:pPr>
+                  <a:defRPr b="0" i="0" strike="noStrike" sz="1000" u="none">
+                    <a:solidFill>
+                      <a:srgbClr val="E8EEF8"/>
+                    </a:solidFill>
+                    <a:latin typeface="Arial"/>
+                  </a:defRPr>
+                </a:pPr>
+              </a:p>
+            </c:txPr>
+            <c:showLegendKey val="0"/>
+            <c:showVal val="1"/>
+            <c:showCatName val="0"/>
+            <c:showSerName val="0"/>
+            <c:showPercent val="0"/>
+            <c:showBubbleSize val="0"/>
+            <c:showLeaderLines val="0"/>
+          </c:dLbls>
+          <c:cat>
+            <c:multiLvlStrRef>
+              <c:f>Sheet1!$A$2:$A$3</c:f>
+              <c:multiLvlStrCache>
+                <c:ptCount val="2"/>
+                <c:lvl>
+                  <c:pt idx="0">
+                    <c:v>Cracks found</c:v>
+                  </c:pt>
+                  <c:pt idx="1">
+                    <c:v>Separation</c:v>
+                  </c:pt>
+                </c:lvl>
+              </c:multiLvlStrCache>
+            </c:multiLvlStrRef>
+          </c:cat>
+          <c:val>
+            <c:numRef>
+              <c:f>Sheet1!$C$2:$C$3</c:f>
+              <c:numCache>
+                <c:formatCode>General</c:formatCode>
+                <c:ptCount val="2"/>
+                <c:pt idx="0">
+                  <c:v>0.634</c:v>
+                </c:pt>
+                <c:pt idx="1">
+                  <c:v>0.432</c:v>
+                </c:pt>
+              </c:numCache>
+            </c:numRef>
+          </c:val>
+        </c:ser>
+        <c:dLbls>
+          <c:numFmt formatCode="0.000" sourceLinked="0"/>
+          <c:txPr>
+            <a:bodyPr/>
+            <a:lstStyle/>
+            <a:p>
+              <a:pPr>
+                <a:defRPr b="0" i="0" strike="noStrike" sz="1000" u="none">
+                  <a:solidFill>
+                    <a:srgbClr val="E8EEF8"/>
+                  </a:solidFill>
+                  <a:latin typeface="Arial"/>
+                </a:defRPr>
+              </a:pPr>
+            </a:p>
+          </c:txPr>
+          <c:showLegendKey val="0"/>
+          <c:showVal val="1"/>
+          <c:showCatName val="0"/>
+          <c:showSerName val="0"/>
+          <c:showPercent val="0"/>
+          <c:showBubbleSize val="0"/>
+          <c:showLeaderLines val="0"/>
+        </c:dLbls>
+        <c:gapWidth val="60"/>
+        <c:overlap val="0"/>
+        <c:axId val="2094734554"/>
+        <c:axId val="2094734552"/>
+        <c:axId val="2094734556"/>
+      </c:barChart>
+      <c:catAx>
+        <c:axId val="2094734554"/>
+        <c:scaling>
+          <c:orientation val="minMax"/>
+        </c:scaling>
+        <c:delete val="0"/>
+        <c:axPos val="b"/>
+        <c:numFmt formatCode="General" sourceLinked="1"/>
+        <c:majorTickMark val="out"/>
+        <c:minorTickMark val="none"/>
+        <c:tickLblPos val="low"/>
+        <c:spPr>
+          <a:ln w="12700" cap="flat">
+            <a:solidFill>
+              <a:srgbClr val="888888"/>
+            </a:solidFill>
+            <a:prstDash val="solid"/>
+            <a:round/>
+          </a:ln>
+        </c:spPr>
+        <c:txPr>
+          <a:bodyPr/>
+          <a:lstStyle/>
+          <a:p>
+            <a:pPr>
+              <a:defRPr sz="1100" b="0" i="0" u="none" strike="noStrike">
+                <a:solidFill>
+                  <a:srgbClr val="9FB0CC"/>
+                </a:solidFill>
+                <a:latin typeface="Arial"/>
+              </a:defRPr>
+            </a:pPr>
+            <a:endParaRPr lang="en-US"/>
+          </a:p>
+        </c:txPr>
+        <c:crossAx val="2094734552"/>
+        <c:crosses val="autoZero"/>
+        <c:auto val="1"/>
+        <c:lblAlgn val="ctr"/>
+        <c:noMultiLvlLbl val="1"/>
+      </c:catAx>
+      <c:valAx>
+        <c:axId val="2094734552"/>
+        <c:scaling>
+          <c:orientation val="minMax"/>
+          <c:max val="1"/>
+        </c:scaling>
+        <c:delete val="0"/>
+        <c:axPos val="l"/>
+        <c:majorGridlines>
+          <c:spPr>
+            <a:ln w="12700" cap="flat">
+              <a:solidFill>
+                <a:srgbClr val="1E2B44"/>
+              </a:solidFill>
+              <a:prstDash val="solid"/>
+              <a:round/>
+            </a:ln>
+          </c:spPr>
+        </c:majorGridlines>
+        <c:numFmt formatCode="General" sourceLinked="0"/>
+        <c:majorTickMark val="out"/>
+        <c:minorTickMark val="none"/>
+        <c:tickLblPos val="nextTo"/>
+        <c:spPr>
+          <a:ln w="12700" cap="flat">
+            <a:solidFill>
+              <a:srgbClr val="888888"/>
+            </a:solidFill>
+            <a:prstDash val="solid"/>
+            <a:round/>
+          </a:ln>
+        </c:spPr>
+        <c:txPr>
+          <a:bodyPr/>
+          <a:lstStyle/>
+          <a:p>
+            <a:pPr>
+              <a:defRPr sz="900" b="0" i="0" u="none" strike="noStrike">
+                <a:solidFill>
+                  <a:srgbClr val="64748B"/>
+                </a:solidFill>
+                <a:latin typeface="Arial"/>
+              </a:defRPr>
+            </a:pPr>
+            <a:endParaRPr lang="en-US"/>
+          </a:p>
+        </c:txPr>
+        <c:crossAx val="2094734554"/>
+        <c:crosses val="autoZero"/>
+        <c:crossBetween val="between"/>
+      </c:valAx>
+      <c:spPr>
+        <a:solidFill>
+          <a:srgbClr val="070B14"/>
+        </a:solidFill>
+        <a:ln>
+          <a:noFill/>
+        </a:ln>
+        <a:effectLst/>
+      </c:spPr>
+    </c:plotArea>
+    <c:legend>
+      <c:legendPos val="t"/>
+      <c:overlay val="0"/>
+      <c:txPr>
+        <a:bodyPr/>
+        <a:lstStyle/>
+        <a:p>
+          <a:pPr>
+            <a:defRPr sz="1000">
+              <a:solidFill>
+                <a:srgbClr val="9FB0CC"/>
+              </a:solidFill>
+            </a:defRPr>
+          </a:pPr>
+          <a:endParaRPr lang="en-US"/>
+        </a:p>
+      </c:txPr>
+    </c:legend>
+    <c:plotVisOnly val="1"/>
+    <c:dispBlanksAs val="span"/>
+  </c:chart>
+  <c:spPr>
+    <a:solidFill>
+      <a:srgbClr val="070B14"/>
+    </a:solidFill>
+    <a:ln>
+      <a:noFill/>
+    </a:ln>
+    <a:effectLst/>
+  </c:spPr>
+  <c:externalData r:id="rId1">
+    <c:autoUpdate val="0"/>
+  </c:externalData>
+</c:chartSpace>
+</file>
+
 <file path=ppt/notesMasters/notesMaster1.xml><?xml version="1.0" encoding="utf-8"?>
 <p:notesMaster xmlns:a="http://schemas.openxmlformats.org/drawingml/2006/main" xmlns:r="http://schemas.openxmlformats.org/officeDocument/2006/relationships" xmlns:p="http://schemas.openxmlformats.org/presentationml/2006/main">
   <p:cSld>
@@ -947,7 +1282,7 @@
           <a:p>
             <a:r>
               <a:rPr lang="en-US" dirty="0"/>
-              <a:t>Replace the circles with headshots and fill in each member's focus area before presenting.</a:t>
+              <a:t>Cloud note: the S3 layer means MinIO swaps for Alibaba OSS or AWS S3 with a config change only.</a:t>
             </a:r>
             <a:endParaRPr lang="en-US" dirty="0"/>
           </a:p>
@@ -1035,7 +1370,7 @@
           <a:p>
             <a:r>
               <a:rPr lang="en-US" dirty="0"/>
-              <a:t>The 'later' column is deliberately labelled later, not coming soon.</a:t>
+              <a:t>Replace the circles with headshots and fill in each member's focus area before presenting.</a:t>
             </a:r>
             <a:endParaRPr lang="en-US" dirty="0"/>
           </a:p>
@@ -1123,7 +1458,7 @@
           <a:p>
             <a:r>
               <a:rPr lang="en-US" dirty="0"/>
-              <a:t>Land on the sentence, pause, then invite questions. Do not add a summary slide after this.</a:t>
+              <a:t>The 'later' column is deliberately labelled later, not coming soon.</a:t>
             </a:r>
             <a:endParaRPr lang="en-US" dirty="0"/>
           </a:p>
@@ -1147,6 +1482,94 @@
             <a:fld id="{F7021451-1387-4CA6-816F-3879F97B5CBC}" type="slidenum">
               <a:rPr lang="en-US"/>
               <a:t>12</a:t>
+            </a:fld>
+            <a:endParaRPr lang="en-US"/>
+          </a:p>
+        </p:txBody>
+      </p:sp>
+    </p:spTree>
+    <p:extLst>
+      <p:ext uri="{BB962C8B-B14F-4D97-AF65-F5344CB8AC3E}">
+        <p14:creationId xmlns:p14="http://schemas.microsoft.com/office/powerpoint/2010/main" val="1024086991"/>
+      </p:ext>
+    </p:extLst>
+  </p:cSld>
+  <p:clrMapOvr>
+    <a:masterClrMapping/>
+  </p:clrMapOvr>
+</p:notes>
+</file>
+
+<file path=ppt/notesSlides/notesSlide13.xml><?xml version="1.0" encoding="utf-8"?>
+<p:notes xmlns:a="http://schemas.openxmlformats.org/drawingml/2006/main" xmlns:r="http://schemas.openxmlformats.org/officeDocument/2006/relationships" xmlns:p="http://schemas.openxmlformats.org/presentationml/2006/main">
+  <p:cSld>
+    <p:spTree>
+      <p:nvGrpSpPr>
+        <p:cNvPr id="1" name=""/>
+        <p:cNvGrpSpPr/>
+        <p:nvPr/>
+      </p:nvGrpSpPr>
+      <p:grpSpPr>
+        <a:xfrm>
+          <a:off x="0" y="0"/>
+          <a:ext cx="0" cy="0"/>
+          <a:chOff x="0" y="0"/>
+          <a:chExt cx="0" cy="0"/>
+        </a:xfrm>
+      </p:grpSpPr>
+      <p:sp>
+        <p:nvSpPr>
+          <p:cNvPr id="2" name="Slide Image Placeholder 1"/>
+          <p:cNvSpPr>
+            <a:spLocks noGrp="1" noRot="1" noChangeAspect="1"/>
+          </p:cNvSpPr>
+          <p:nvPr>
+            <p:ph type="sldImg"/>
+          </p:nvPr>
+        </p:nvSpPr>
+        <p:spPr/>
+      </p:sp>
+      <p:sp>
+        <p:nvSpPr>
+          <p:cNvPr id="3" name="Notes Placeholder 2"/>
+          <p:cNvSpPr>
+            <a:spLocks noGrp="1"/>
+          </p:cNvSpPr>
+          <p:nvPr>
+            <p:ph type="body" idx="1"/>
+          </p:nvPr>
+        </p:nvSpPr>
+        <p:spPr/>
+        <p:txBody>
+          <a:bodyPr/>
+          <a:lstStyle/>
+          <a:p>
+            <a:r>
+              <a:rPr lang="en-US" dirty="0"/>
+              <a:t>Land on the sentence, pause, then invite questions. Do not add a summary slide after this.</a:t>
+            </a:r>
+            <a:endParaRPr lang="en-US" dirty="0"/>
+          </a:p>
+        </p:txBody>
+      </p:sp>
+      <p:sp>
+        <p:nvSpPr>
+          <p:cNvPr id="4" name="Slide Number Placeholder 3"/>
+          <p:cNvSpPr>
+            <a:spLocks noGrp="1"/>
+          </p:cNvSpPr>
+          <p:nvPr>
+            <p:ph type="sldNum" sz="quarter" idx="10"/>
+          </p:nvPr>
+        </p:nvSpPr>
+        <p:spPr/>
+        <p:txBody>
+          <a:bodyPr/>
+          <a:lstStyle/>
+          <a:p>
+            <a:fld id="{F7021451-1387-4CA6-816F-3879F97B5CBC}" type="slidenum">
+              <a:rPr lang="en-US"/>
+              <a:t>13</a:t>
             </a:fld>
             <a:endParaRPr lang="en-US"/>
           </a:p>
@@ -1563,7 +1986,7 @@
           <a:p>
             <a:r>
               <a:rPr lang="en-US" dirty="0"/>
-              <a:t>If a judge asks one technical question, it will probably be about evaluation. This slide is the answer.</a:t>
+              <a:t>If a judge asks one technical question, it will probably be about evaluation. This slide is the answer. Then turn the page — the next slide is the one they will remember.</a:t>
             </a:r>
             <a:endParaRPr lang="en-US" dirty="0"/>
           </a:p>
@@ -1651,7 +2074,7 @@
           <a:p>
             <a:r>
               <a:rPr lang="en-US" dirty="0"/>
-              <a:t>Orbit the viewer live if the demo is working. Then immediately state what it is not.</a:t>
+              <a:t>Deliver this confidently. Most teams quote the number from their own test split and have never run this experiment. Volunteering the weaker figure, with the dataset named, is what separates a measured system from a demo. If asked why it drops: the training set is one collection of concrete from one campus. More varied data is the fix, not a threshold.</a:t>
             </a:r>
             <a:endParaRPr lang="en-US" dirty="0"/>
           </a:p>
@@ -1739,7 +2162,7 @@
           <a:p>
             <a:r>
               <a:rPr lang="en-US" dirty="0"/>
-              <a:t>Do not skip this slide to save time. It is the one that separates us. Deliver it confidently, not apologetically.</a:t>
+              <a:t>Orbit the viewer live if the demo is working. Then immediately state what it is not.</a:t>
             </a:r>
             <a:endParaRPr lang="en-US" dirty="0"/>
           </a:p>
@@ -1827,7 +2250,7 @@
           <a:p>
             <a:r>
               <a:rPr lang="en-US" dirty="0"/>
-              <a:t>Cloud note: the S3 layer means MinIO swaps for Alibaba OSS or AWS S3 with a config change only.</a:t>
+              <a:t>Do not skip this slide to save time. It is the one that separates us. Deliver it confidently, not apologetically.</a:t>
             </a:r>
             <a:endParaRPr lang="en-US" dirty="0"/>
           </a:p>
@@ -2842,7 +3265,7 @@
                 <a:ea typeface="Calibri" pitchFamily="34" charset="-122"/>
                 <a:cs typeface="Calibri" pitchFamily="34" charset="-120"/>
               </a:rPr>
-              <a:t>THE TEAM</a:t>
+              <a:t>UNDER THE HOOD</a:t>
             </a:r>
             <a:endParaRPr lang="en-US" sz="1100" dirty="0"/>
           </a:p>
@@ -2881,7 +3304,7 @@
                 <a:ea typeface="Calibri" pitchFamily="34" charset="-122"/>
                 <a:cs typeface="Calibri" pitchFamily="34" charset="-120"/>
               </a:rPr>
-              <a:t>Three people, one build.</a:t>
+              <a:t>Boring technology, deliberately.</a:t>
             </a:r>
             <a:endParaRPr lang="en-US" sz="3800" dirty="0"/>
           </a:p>
@@ -2895,12 +3318,12 @@
         </p:nvSpPr>
         <p:spPr>
           <a:xfrm>
-            <a:off x="685800" y="2286000"/>
-            <a:ext cx="3337560" cy="3246120"/>
+            <a:off x="685800" y="2240280"/>
+            <a:ext cx="6492240" cy="585216"/>
           </a:xfrm>
           <a:prstGeom prst="roundRect">
             <a:avLst>
-              <a:gd name="adj" fmla="val 3380"/>
+              <a:gd name="adj" fmla="val 18750"/>
             </a:avLst>
           </a:prstGeom>
           <a:solidFill>
@@ -2931,23 +3354,16 @@
         </p:nvSpPr>
         <p:spPr>
           <a:xfrm>
-            <a:off x="1764792" y="2578608"/>
-            <a:ext cx="1188720" cy="1188720"/>
+            <a:off x="960120" y="2468880"/>
+            <a:ext cx="128016" cy="128016"/>
           </a:xfrm>
           <a:prstGeom prst="ellipse">
             <a:avLst/>
           </a:prstGeom>
           <a:solidFill>
-            <a:srgbClr val="22D3EE">
-              <a:alpha val="18000"/>
-            </a:srgbClr>
+            <a:srgbClr val="22D3EE"/>
           </a:solidFill>
-          <a:ln w="19050">
-            <a:solidFill>
-              <a:srgbClr val="22D3EE"/>
-            </a:solidFill>
-            <a:prstDash val="solid"/>
-          </a:ln>
+          <a:ln/>
         </p:spPr>
       </p:sp>
       <p:sp>
@@ -2958,34 +3374,34 @@
         </p:nvSpPr>
         <p:spPr>
           <a:xfrm>
-            <a:off x="1764792" y="3054096"/>
-            <a:ext cx="1188720" cy="256032"/>
-          </a:xfrm>
-          <a:prstGeom prst="rect">
-            <a:avLst/>
-          </a:prstGeom>
-          <a:noFill/>
-          <a:ln/>
-        </p:spPr>
-        <p:txBody>
-          <a:bodyPr wrap="square" lIns="0" tIns="0" rIns="0" bIns="0" rtlCol="0" anchor="ctr"/>
-          <a:lstStyle/>
-          <a:p>
-            <a:pPr algn="ctr" indent="0" marL="0">
-              <a:buNone/>
-            </a:pPr>
-            <a:r>
-              <a:rPr lang="en-US" sz="950" spc="140" kern="0" dirty="0">
-                <a:solidFill>
-                  <a:srgbClr val="22D3EE"/>
-                </a:solidFill>
-                <a:latin typeface="Calibri" pitchFamily="34" charset="0"/>
-                <a:ea typeface="Calibri" pitchFamily="34" charset="-122"/>
-                <a:cs typeface="Calibri" pitchFamily="34" charset="-120"/>
-              </a:rPr>
-              <a:t>PHOTO</a:t>
-            </a:r>
-            <a:endParaRPr lang="en-US" sz="950" dirty="0"/>
+            <a:off x="1234440" y="2377440"/>
+            <a:ext cx="1463040" cy="310896"/>
+          </a:xfrm>
+          <a:prstGeom prst="rect">
+            <a:avLst/>
+          </a:prstGeom>
+          <a:noFill/>
+          <a:ln/>
+        </p:spPr>
+        <p:txBody>
+          <a:bodyPr wrap="square" lIns="0" tIns="0" rIns="0" bIns="0" rtlCol="0" anchor="ctr"/>
+          <a:lstStyle/>
+          <a:p>
+            <a:pPr indent="0" marL="0">
+              <a:buNone/>
+            </a:pPr>
+            <a:r>
+              <a:rPr lang="en-US" sz="1350" b="1" dirty="0">
+                <a:solidFill>
+                  <a:srgbClr val="E8EEF8"/>
+                </a:solidFill>
+                <a:latin typeface="Calibri" pitchFamily="34" charset="0"/>
+                <a:ea typeface="Calibri" pitchFamily="34" charset="-122"/>
+                <a:cs typeface="Calibri" pitchFamily="34" charset="-120"/>
+              </a:rPr>
+              <a:t>Frontend</a:t>
+            </a:r>
+            <a:endParaRPr lang="en-US" sz="1350" dirty="0"/>
           </a:p>
         </p:txBody>
       </p:sp>
@@ -2997,98 +3413,20 @@
         </p:nvSpPr>
         <p:spPr>
           <a:xfrm>
-            <a:off x="914400" y="3950208"/>
-            <a:ext cx="2880360" cy="329184"/>
-          </a:xfrm>
-          <a:prstGeom prst="rect">
-            <a:avLst/>
-          </a:prstGeom>
-          <a:noFill/>
-          <a:ln/>
-        </p:spPr>
-        <p:txBody>
-          <a:bodyPr wrap="square" lIns="0" tIns="0" rIns="0" bIns="0" rtlCol="0" anchor="ctr"/>
-          <a:lstStyle/>
-          <a:p>
-            <a:pPr algn="ctr" indent="0" marL="0">
-              <a:buNone/>
-            </a:pPr>
-            <a:r>
-              <a:rPr lang="en-US" sz="1600" b="1" dirty="0">
-                <a:solidFill>
-                  <a:srgbClr val="E8EEF8"/>
-                </a:solidFill>
-                <a:latin typeface="Calibri" pitchFamily="34" charset="0"/>
-                <a:ea typeface="Calibri" pitchFamily="34" charset="-122"/>
-                <a:cs typeface="Calibri" pitchFamily="34" charset="-120"/>
-              </a:rPr>
-              <a:t>Ayaan Aatif</a:t>
-            </a:r>
-            <a:endParaRPr lang="en-US" sz="1600" dirty="0"/>
-          </a:p>
-        </p:txBody>
-      </p:sp>
-      <p:sp>
-        <p:nvSpPr>
-          <p:cNvPr id="10" name="Text 8"/>
-          <p:cNvSpPr txBox="1"/>
-          <p:nvPr/>
-        </p:nvSpPr>
-        <p:spPr>
-          <a:xfrm>
-            <a:off x="914400" y="4297680"/>
-            <a:ext cx="2880360" cy="274320"/>
-          </a:xfrm>
-          <a:prstGeom prst="rect">
-            <a:avLst/>
-          </a:prstGeom>
-          <a:noFill/>
-          <a:ln/>
-        </p:spPr>
-        <p:txBody>
-          <a:bodyPr wrap="square" lIns="0" tIns="0" rIns="0" bIns="0" rtlCol="0" anchor="ctr"/>
-          <a:lstStyle/>
-          <a:p>
-            <a:pPr algn="ctr" indent="0" marL="0">
-              <a:buNone/>
-            </a:pPr>
-            <a:r>
-              <a:rPr lang="en-US" sz="1200" dirty="0">
-                <a:solidFill>
-                  <a:srgbClr val="22D3EE"/>
-                </a:solidFill>
-                <a:latin typeface="Calibri" pitchFamily="34" charset="0"/>
-                <a:ea typeface="Calibri" pitchFamily="34" charset="-122"/>
-                <a:cs typeface="Calibri" pitchFamily="34" charset="-120"/>
-              </a:rPr>
-              <a:t>Team Lead</a:t>
-            </a:r>
-            <a:endParaRPr lang="en-US" sz="1200" dirty="0"/>
-          </a:p>
-        </p:txBody>
-      </p:sp>
-      <p:sp>
-        <p:nvSpPr>
-          <p:cNvPr id="11" name="Text 9"/>
-          <p:cNvSpPr txBox="1"/>
-          <p:nvPr/>
-        </p:nvSpPr>
-        <p:spPr>
-          <a:xfrm>
-            <a:off x="914400" y="4626864"/>
-            <a:ext cx="2880360" cy="640080"/>
-          </a:xfrm>
-          <a:prstGeom prst="rect">
-            <a:avLst/>
-          </a:prstGeom>
-          <a:noFill/>
-          <a:ln/>
-        </p:spPr>
-        <p:txBody>
-          <a:bodyPr wrap="square" lIns="0" tIns="0" rIns="0" bIns="0" rtlCol="0" anchor="ctr"/>
-          <a:lstStyle/>
-          <a:p>
-            <a:pPr algn="ctr" indent="0" marL="0">
+            <a:off x="2697480" y="2386584"/>
+            <a:ext cx="4297680" cy="310896"/>
+          </a:xfrm>
+          <a:prstGeom prst="rect">
+            <a:avLst/>
+          </a:prstGeom>
+          <a:noFill/>
+          <a:ln/>
+        </p:spPr>
+        <p:txBody>
+          <a:bodyPr wrap="square" lIns="0" tIns="0" rIns="0" bIns="0" rtlCol="0" anchor="ctr"/>
+          <a:lstStyle/>
+          <a:p>
+            <a:pPr indent="0" marL="0">
               <a:buNone/>
             </a:pPr>
             <a:r>
@@ -3100,7 +3438,7 @@
                 <a:ea typeface="Calibri" pitchFamily="34" charset="-122"/>
                 <a:cs typeface="Calibri" pitchFamily="34" charset="-120"/>
               </a:rPr>
-              <a:t>Architecture, ML pipeline, demo delivery</a:t>
+              <a:t>Next.js 16 · React 19 · Three.js · Tailwind</a:t>
             </a:r>
             <a:endParaRPr lang="en-US" sz="1150" dirty="0"/>
           </a:p>
@@ -3108,18 +3446,18 @@
       </p:sp>
       <p:sp>
         <p:nvSpPr>
-          <p:cNvPr id="12" name="Shape 10"/>
+          <p:cNvPr id="10" name="Shape 8"/>
           <p:cNvSpPr/>
           <p:nvPr/>
         </p:nvSpPr>
         <p:spPr>
           <a:xfrm>
-            <a:off x="4343400" y="2286000"/>
-            <a:ext cx="3337560" cy="3246120"/>
+            <a:off x="685800" y="2953512"/>
+            <a:ext cx="6492240" cy="585216"/>
           </a:xfrm>
           <a:prstGeom prst="roundRect">
             <a:avLst>
-              <a:gd name="adj" fmla="val 3380"/>
+              <a:gd name="adj" fmla="val 18750"/>
             </a:avLst>
           </a:prstGeom>
           <a:solidFill>
@@ -3144,96 +3482,50 @@
       </p:sp>
       <p:sp>
         <p:nvSpPr>
-          <p:cNvPr id="13" name="Shape 11"/>
+          <p:cNvPr id="11" name="Shape 9"/>
           <p:cNvSpPr/>
           <p:nvPr/>
         </p:nvSpPr>
         <p:spPr>
           <a:xfrm>
-            <a:off x="5422392" y="2578608"/>
-            <a:ext cx="1188720" cy="1188720"/>
+            <a:off x="960120" y="3182112"/>
+            <a:ext cx="128016" cy="128016"/>
           </a:xfrm>
           <a:prstGeom prst="ellipse">
             <a:avLst/>
           </a:prstGeom>
           <a:solidFill>
-            <a:srgbClr val="6366F1">
-              <a:alpha val="18000"/>
-            </a:srgbClr>
+            <a:srgbClr val="6366F1"/>
           </a:solidFill>
-          <a:ln w="19050">
-            <a:solidFill>
-              <a:srgbClr val="6366F1"/>
-            </a:solidFill>
-            <a:prstDash val="solid"/>
-          </a:ln>
-        </p:spPr>
-      </p:sp>
-      <p:sp>
-        <p:nvSpPr>
-          <p:cNvPr id="14" name="Text 12"/>
-          <p:cNvSpPr txBox="1"/>
-          <p:nvPr/>
-        </p:nvSpPr>
-        <p:spPr>
-          <a:xfrm>
-            <a:off x="5422392" y="3054096"/>
-            <a:ext cx="1188720" cy="256032"/>
-          </a:xfrm>
-          <a:prstGeom prst="rect">
-            <a:avLst/>
-          </a:prstGeom>
-          <a:noFill/>
-          <a:ln/>
-        </p:spPr>
-        <p:txBody>
-          <a:bodyPr wrap="square" lIns="0" tIns="0" rIns="0" bIns="0" rtlCol="0" anchor="ctr"/>
-          <a:lstStyle/>
-          <a:p>
-            <a:pPr algn="ctr" indent="0" marL="0">
-              <a:buNone/>
-            </a:pPr>
-            <a:r>
-              <a:rPr lang="en-US" sz="950" spc="140" kern="0" dirty="0">
-                <a:solidFill>
-                  <a:srgbClr val="6366F1"/>
-                </a:solidFill>
-                <a:latin typeface="Calibri" pitchFamily="34" charset="0"/>
-                <a:ea typeface="Calibri" pitchFamily="34" charset="-122"/>
-                <a:cs typeface="Calibri" pitchFamily="34" charset="-120"/>
-              </a:rPr>
-              <a:t>PHOTO</a:t>
-            </a:r>
-            <a:endParaRPr lang="en-US" sz="950" dirty="0"/>
-          </a:p>
-        </p:txBody>
-      </p:sp>
-      <p:sp>
-        <p:nvSpPr>
-          <p:cNvPr id="15" name="Text 13"/>
-          <p:cNvSpPr txBox="1"/>
-          <p:nvPr/>
-        </p:nvSpPr>
-        <p:spPr>
-          <a:xfrm>
-            <a:off x="4572000" y="3950208"/>
-            <a:ext cx="2880360" cy="329184"/>
-          </a:xfrm>
-          <a:prstGeom prst="rect">
-            <a:avLst/>
-          </a:prstGeom>
-          <a:noFill/>
-          <a:ln/>
-        </p:spPr>
-        <p:txBody>
-          <a:bodyPr wrap="square" lIns="0" tIns="0" rIns="0" bIns="0" rtlCol="0" anchor="ctr"/>
-          <a:lstStyle/>
-          <a:p>
-            <a:pPr algn="ctr" indent="0" marL="0">
-              <a:buNone/>
-            </a:pPr>
-            <a:r>
-              <a:rPr lang="en-US" sz="1600" b="1" dirty="0">
+          <a:ln/>
+        </p:spPr>
+      </p:sp>
+      <p:sp>
+        <p:nvSpPr>
+          <p:cNvPr id="12" name="Text 10"/>
+          <p:cNvSpPr txBox="1"/>
+          <p:nvPr/>
+        </p:nvSpPr>
+        <p:spPr>
+          <a:xfrm>
+            <a:off x="1234440" y="3090672"/>
+            <a:ext cx="1463040" cy="310896"/>
+          </a:xfrm>
+          <a:prstGeom prst="rect">
+            <a:avLst/>
+          </a:prstGeom>
+          <a:noFill/>
+          <a:ln/>
+        </p:spPr>
+        <p:txBody>
+          <a:bodyPr wrap="square" lIns="0" tIns="0" rIns="0" bIns="0" rtlCol="0" anchor="ctr"/>
+          <a:lstStyle/>
+          <a:p>
+            <a:pPr indent="0" marL="0">
+              <a:buNone/>
+            </a:pPr>
+            <a:r>
+              <a:rPr lang="en-US" sz="1350" b="1" dirty="0">
                 <a:solidFill>
                   <a:srgbClr val="E8EEF8"/>
                 </a:solidFill>
@@ -3241,73 +3533,34 @@
                 <a:ea typeface="Calibri" pitchFamily="34" charset="-122"/>
                 <a:cs typeface="Calibri" pitchFamily="34" charset="-120"/>
               </a:rPr>
-              <a:t>Muhammad Muneed</a:t>
-            </a:r>
-            <a:endParaRPr lang="en-US" sz="1600" dirty="0"/>
-          </a:p>
-        </p:txBody>
-      </p:sp>
-      <p:sp>
-        <p:nvSpPr>
-          <p:cNvPr id="16" name="Text 14"/>
-          <p:cNvSpPr txBox="1"/>
-          <p:nvPr/>
-        </p:nvSpPr>
-        <p:spPr>
-          <a:xfrm>
-            <a:off x="4572000" y="4297680"/>
-            <a:ext cx="2880360" cy="274320"/>
-          </a:xfrm>
-          <a:prstGeom prst="rect">
-            <a:avLst/>
-          </a:prstGeom>
-          <a:noFill/>
-          <a:ln/>
-        </p:spPr>
-        <p:txBody>
-          <a:bodyPr wrap="square" lIns="0" tIns="0" rIns="0" bIns="0" rtlCol="0" anchor="ctr"/>
-          <a:lstStyle/>
-          <a:p>
-            <a:pPr algn="ctr" indent="0" marL="0">
-              <a:buNone/>
-            </a:pPr>
-            <a:r>
-              <a:rPr lang="en-US" sz="1200" dirty="0">
-                <a:solidFill>
-                  <a:srgbClr val="6366F1"/>
-                </a:solidFill>
-                <a:latin typeface="Calibri" pitchFamily="34" charset="0"/>
-                <a:ea typeface="Calibri" pitchFamily="34" charset="-122"/>
-                <a:cs typeface="Calibri" pitchFamily="34" charset="-120"/>
-              </a:rPr>
-              <a:t>Team Member</a:t>
-            </a:r>
-            <a:endParaRPr lang="en-US" sz="1200" dirty="0"/>
-          </a:p>
-        </p:txBody>
-      </p:sp>
-      <p:sp>
-        <p:nvSpPr>
-          <p:cNvPr id="17" name="Text 15"/>
-          <p:cNvSpPr txBox="1"/>
-          <p:nvPr/>
-        </p:nvSpPr>
-        <p:spPr>
-          <a:xfrm>
-            <a:off x="4572000" y="4626864"/>
-            <a:ext cx="2880360" cy="640080"/>
-          </a:xfrm>
-          <a:prstGeom prst="rect">
-            <a:avLst/>
-          </a:prstGeom>
-          <a:noFill/>
-          <a:ln/>
-        </p:spPr>
-        <p:txBody>
-          <a:bodyPr wrap="square" lIns="0" tIns="0" rIns="0" bIns="0" rtlCol="0" anchor="ctr"/>
-          <a:lstStyle/>
-          <a:p>
-            <a:pPr algn="ctr" indent="0" marL="0">
+              <a:t>API</a:t>
+            </a:r>
+            <a:endParaRPr lang="en-US" sz="1350" dirty="0"/>
+          </a:p>
+        </p:txBody>
+      </p:sp>
+      <p:sp>
+        <p:nvSpPr>
+          <p:cNvPr id="13" name="Text 11"/>
+          <p:cNvSpPr txBox="1"/>
+          <p:nvPr/>
+        </p:nvSpPr>
+        <p:spPr>
+          <a:xfrm>
+            <a:off x="2697480" y="3099816"/>
+            <a:ext cx="4297680" cy="310896"/>
+          </a:xfrm>
+          <a:prstGeom prst="rect">
+            <a:avLst/>
+          </a:prstGeom>
+          <a:noFill/>
+          <a:ln/>
+        </p:spPr>
+        <p:txBody>
+          <a:bodyPr wrap="square" lIns="0" tIns="0" rIns="0" bIns="0" rtlCol="0" anchor="ctr"/>
+          <a:lstStyle/>
+          <a:p>
+            <a:pPr indent="0" marL="0">
               <a:buNone/>
             </a:pPr>
             <a:r>
@@ -3319,7 +3572,7 @@
                 <a:ea typeface="Calibri" pitchFamily="34" charset="-122"/>
                 <a:cs typeface="Calibri" pitchFamily="34" charset="-120"/>
               </a:rPr>
-              <a:t>[ Add focus area ]</a:t>
+              <a:t>FastAPI · Python 3.12 · SQLAlchemy · Alembic</a:t>
             </a:r>
             <a:endParaRPr lang="en-US" sz="1150" dirty="0"/>
           </a:p>
@@ -3327,18 +3580,18 @@
       </p:sp>
       <p:sp>
         <p:nvSpPr>
-          <p:cNvPr id="18" name="Shape 16"/>
+          <p:cNvPr id="14" name="Shape 12"/>
           <p:cNvSpPr/>
           <p:nvPr/>
         </p:nvSpPr>
         <p:spPr>
           <a:xfrm>
-            <a:off x="8001000" y="2286000"/>
-            <a:ext cx="3337560" cy="3246120"/>
+            <a:off x="685800" y="3666744"/>
+            <a:ext cx="6492240" cy="585216"/>
           </a:xfrm>
           <a:prstGeom prst="roundRect">
             <a:avLst>
-              <a:gd name="adj" fmla="val 3380"/>
+              <a:gd name="adj" fmla="val 18750"/>
             </a:avLst>
           </a:prstGeom>
           <a:solidFill>
@@ -3363,29 +3616,156 @@
       </p:sp>
       <p:sp>
         <p:nvSpPr>
-          <p:cNvPr id="19" name="Shape 17"/>
+          <p:cNvPr id="15" name="Shape 13"/>
           <p:cNvSpPr/>
           <p:nvPr/>
         </p:nvSpPr>
         <p:spPr>
           <a:xfrm>
-            <a:off x="9079992" y="2578608"/>
-            <a:ext cx="1188720" cy="1188720"/>
+            <a:off x="960120" y="3895344"/>
+            <a:ext cx="128016" cy="128016"/>
           </a:xfrm>
           <a:prstGeom prst="ellipse">
             <a:avLst/>
           </a:prstGeom>
           <a:solidFill>
-            <a:srgbClr val="A78BFA">
-              <a:alpha val="18000"/>
+            <a:srgbClr val="A78BFA"/>
+          </a:solidFill>
+          <a:ln/>
+        </p:spPr>
+      </p:sp>
+      <p:sp>
+        <p:nvSpPr>
+          <p:cNvPr id="16" name="Text 14"/>
+          <p:cNvSpPr txBox="1"/>
+          <p:nvPr/>
+        </p:nvSpPr>
+        <p:spPr>
+          <a:xfrm>
+            <a:off x="1234440" y="3803904"/>
+            <a:ext cx="1463040" cy="310896"/>
+          </a:xfrm>
+          <a:prstGeom prst="rect">
+            <a:avLst/>
+          </a:prstGeom>
+          <a:noFill/>
+          <a:ln/>
+        </p:spPr>
+        <p:txBody>
+          <a:bodyPr wrap="square" lIns="0" tIns="0" rIns="0" bIns="0" rtlCol="0" anchor="ctr"/>
+          <a:lstStyle/>
+          <a:p>
+            <a:pPr indent="0" marL="0">
+              <a:buNone/>
+            </a:pPr>
+            <a:r>
+              <a:rPr lang="en-US" sz="1350" b="1" dirty="0">
+                <a:solidFill>
+                  <a:srgbClr val="E8EEF8"/>
+                </a:solidFill>
+                <a:latin typeface="Calibri" pitchFamily="34" charset="0"/>
+                <a:ea typeface="Calibri" pitchFamily="34" charset="-122"/>
+                <a:cs typeface="Calibri" pitchFamily="34" charset="-120"/>
+              </a:rPr>
+              <a:t>Model</a:t>
+            </a:r>
+            <a:endParaRPr lang="en-US" sz="1350" dirty="0"/>
+          </a:p>
+        </p:txBody>
+      </p:sp>
+      <p:sp>
+        <p:nvSpPr>
+          <p:cNvPr id="17" name="Text 15"/>
+          <p:cNvSpPr txBox="1"/>
+          <p:nvPr/>
+        </p:nvSpPr>
+        <p:spPr>
+          <a:xfrm>
+            <a:off x="2697480" y="3813048"/>
+            <a:ext cx="4297680" cy="310896"/>
+          </a:xfrm>
+          <a:prstGeom prst="rect">
+            <a:avLst/>
+          </a:prstGeom>
+          <a:noFill/>
+          <a:ln/>
+        </p:spPr>
+        <p:txBody>
+          <a:bodyPr wrap="square" lIns="0" tIns="0" rIns="0" bIns="0" rtlCol="0" anchor="ctr"/>
+          <a:lstStyle/>
+          <a:p>
+            <a:pPr indent="0" marL="0">
+              <a:buNone/>
+            </a:pPr>
+            <a:r>
+              <a:rPr lang="en-US" sz="1150" dirty="0">
+                <a:solidFill>
+                  <a:srgbClr val="9FB0CC"/>
+                </a:solidFill>
+                <a:latin typeface="Calibri" pitchFamily="34" charset="0"/>
+                <a:ea typeface="Calibri" pitchFamily="34" charset="-122"/>
+                <a:cs typeface="Calibri" pitchFamily="34" charset="-120"/>
+              </a:rPr>
+              <a:t>YOLOv11n fine-tuned · PyTorch 2.13 · CUDA 13</a:t>
+            </a:r>
+            <a:endParaRPr lang="en-US" sz="1150" dirty="0"/>
+          </a:p>
+        </p:txBody>
+      </p:sp>
+      <p:sp>
+        <p:nvSpPr>
+          <p:cNvPr id="18" name="Shape 16"/>
+          <p:cNvSpPr/>
+          <p:nvPr/>
+        </p:nvSpPr>
+        <p:spPr>
+          <a:xfrm>
+            <a:off x="685800" y="4379976"/>
+            <a:ext cx="6492240" cy="585216"/>
+          </a:xfrm>
+          <a:prstGeom prst="roundRect">
+            <a:avLst>
+              <a:gd name="adj" fmla="val 18750"/>
+            </a:avLst>
+          </a:prstGeom>
+          <a:solidFill>
+            <a:srgbClr val="111A2E">
+              <a:alpha val="82000"/>
             </a:srgbClr>
           </a:solidFill>
-          <a:ln w="19050">
+          <a:ln w="12700">
             <a:solidFill>
-              <a:srgbClr val="A78BFA"/>
+              <a:srgbClr val="1E2B44"/>
             </a:solidFill>
             <a:prstDash val="solid"/>
           </a:ln>
+          <a:effectLst>
+            <a:outerShdw sx="100000" sy="100000" kx="0" ky="0" algn="bl" rotWithShape="0" blurRad="177800" dist="38100" dir="5400000">
+              <a:srgbClr val="000000">
+                <a:alpha val="35000"/>
+              </a:srgbClr>
+            </a:outerShdw>
+          </a:effectLst>
+        </p:spPr>
+      </p:sp>
+      <p:sp>
+        <p:nvSpPr>
+          <p:cNvPr id="19" name="Shape 17"/>
+          <p:cNvSpPr/>
+          <p:nvPr/>
+        </p:nvSpPr>
+        <p:spPr>
+          <a:xfrm>
+            <a:off x="960120" y="4608576"/>
+            <a:ext cx="128016" cy="128016"/>
+          </a:xfrm>
+          <a:prstGeom prst="ellipse">
+            <a:avLst/>
+          </a:prstGeom>
+          <a:solidFill>
+            <a:srgbClr val="10B981"/>
+          </a:solidFill>
+          <a:ln/>
         </p:spPr>
       </p:sp>
       <p:sp>
@@ -3396,34 +3776,34 @@
         </p:nvSpPr>
         <p:spPr>
           <a:xfrm>
-            <a:off x="9079992" y="3054096"/>
-            <a:ext cx="1188720" cy="256032"/>
-          </a:xfrm>
-          <a:prstGeom prst="rect">
-            <a:avLst/>
-          </a:prstGeom>
-          <a:noFill/>
-          <a:ln/>
-        </p:spPr>
-        <p:txBody>
-          <a:bodyPr wrap="square" lIns="0" tIns="0" rIns="0" bIns="0" rtlCol="0" anchor="ctr"/>
-          <a:lstStyle/>
-          <a:p>
-            <a:pPr algn="ctr" indent="0" marL="0">
-              <a:buNone/>
-            </a:pPr>
-            <a:r>
-              <a:rPr lang="en-US" sz="950" spc="140" kern="0" dirty="0">
-                <a:solidFill>
-                  <a:srgbClr val="A78BFA"/>
-                </a:solidFill>
-                <a:latin typeface="Calibri" pitchFamily="34" charset="0"/>
-                <a:ea typeface="Calibri" pitchFamily="34" charset="-122"/>
-                <a:cs typeface="Calibri" pitchFamily="34" charset="-120"/>
-              </a:rPr>
-              <a:t>PHOTO</a:t>
-            </a:r>
-            <a:endParaRPr lang="en-US" sz="950" dirty="0"/>
+            <a:off x="1234440" y="4517136"/>
+            <a:ext cx="1463040" cy="310896"/>
+          </a:xfrm>
+          <a:prstGeom prst="rect">
+            <a:avLst/>
+          </a:prstGeom>
+          <a:noFill/>
+          <a:ln/>
+        </p:spPr>
+        <p:txBody>
+          <a:bodyPr wrap="square" lIns="0" tIns="0" rIns="0" bIns="0" rtlCol="0" anchor="ctr"/>
+          <a:lstStyle/>
+          <a:p>
+            <a:pPr indent="0" marL="0">
+              <a:buNone/>
+            </a:pPr>
+            <a:r>
+              <a:rPr lang="en-US" sz="1350" b="1" dirty="0">
+                <a:solidFill>
+                  <a:srgbClr val="E8EEF8"/>
+                </a:solidFill>
+                <a:latin typeface="Calibri" pitchFamily="34" charset="0"/>
+                <a:ea typeface="Calibri" pitchFamily="34" charset="-122"/>
+                <a:cs typeface="Calibri" pitchFamily="34" charset="-120"/>
+              </a:rPr>
+              <a:t>Data</a:t>
+            </a:r>
+            <a:endParaRPr lang="en-US" sz="1350" dirty="0"/>
           </a:p>
         </p:txBody>
       </p:sp>
@@ -3435,24 +3815,119 @@
         </p:nvSpPr>
         <p:spPr>
           <a:xfrm>
-            <a:off x="8229600" y="3950208"/>
-            <a:ext cx="2880360" cy="329184"/>
-          </a:xfrm>
-          <a:prstGeom prst="rect">
-            <a:avLst/>
-          </a:prstGeom>
-          <a:noFill/>
-          <a:ln/>
-        </p:spPr>
-        <p:txBody>
-          <a:bodyPr wrap="square" lIns="0" tIns="0" rIns="0" bIns="0" rtlCol="0" anchor="ctr"/>
-          <a:lstStyle/>
-          <a:p>
-            <a:pPr algn="ctr" indent="0" marL="0">
-              <a:buNone/>
-            </a:pPr>
-            <a:r>
-              <a:rPr lang="en-US" sz="1600" b="1" dirty="0">
+            <a:off x="2697480" y="4526280"/>
+            <a:ext cx="4297680" cy="310896"/>
+          </a:xfrm>
+          <a:prstGeom prst="rect">
+            <a:avLst/>
+          </a:prstGeom>
+          <a:noFill/>
+          <a:ln/>
+        </p:spPr>
+        <p:txBody>
+          <a:bodyPr wrap="square" lIns="0" tIns="0" rIns="0" bIns="0" rtlCol="0" anchor="ctr"/>
+          <a:lstStyle/>
+          <a:p>
+            <a:pPr indent="0" marL="0">
+              <a:buNone/>
+            </a:pPr>
+            <a:r>
+              <a:rPr lang="en-US" sz="1150" dirty="0">
+                <a:solidFill>
+                  <a:srgbClr val="9FB0CC"/>
+                </a:solidFill>
+                <a:latin typeface="Calibri" pitchFamily="34" charset="0"/>
+                <a:ea typeface="Calibri" pitchFamily="34" charset="-122"/>
+                <a:cs typeface="Calibri" pitchFamily="34" charset="-120"/>
+              </a:rPr>
+              <a:t>PostgreSQL 16 · MinIO (S3-compatible)</a:t>
+            </a:r>
+            <a:endParaRPr lang="en-US" sz="1150" dirty="0"/>
+          </a:p>
+        </p:txBody>
+      </p:sp>
+      <p:sp>
+        <p:nvSpPr>
+          <p:cNvPr id="22" name="Shape 20"/>
+          <p:cNvSpPr/>
+          <p:nvPr/>
+        </p:nvSpPr>
+        <p:spPr>
+          <a:xfrm>
+            <a:off x="685800" y="5093208"/>
+            <a:ext cx="6492240" cy="585216"/>
+          </a:xfrm>
+          <a:prstGeom prst="roundRect">
+            <a:avLst>
+              <a:gd name="adj" fmla="val 18750"/>
+            </a:avLst>
+          </a:prstGeom>
+          <a:solidFill>
+            <a:srgbClr val="111A2E">
+              <a:alpha val="82000"/>
+            </a:srgbClr>
+          </a:solidFill>
+          <a:ln w="12700">
+            <a:solidFill>
+              <a:srgbClr val="1E2B44"/>
+            </a:solidFill>
+            <a:prstDash val="solid"/>
+          </a:ln>
+          <a:effectLst>
+            <a:outerShdw sx="100000" sy="100000" kx="0" ky="0" algn="bl" rotWithShape="0" blurRad="177800" dist="38100" dir="5400000">
+              <a:srgbClr val="000000">
+                <a:alpha val="35000"/>
+              </a:srgbClr>
+            </a:outerShdw>
+          </a:effectLst>
+        </p:spPr>
+      </p:sp>
+      <p:sp>
+        <p:nvSpPr>
+          <p:cNvPr id="23" name="Shape 21"/>
+          <p:cNvSpPr/>
+          <p:nvPr/>
+        </p:nvSpPr>
+        <p:spPr>
+          <a:xfrm>
+            <a:off x="960120" y="5321808"/>
+            <a:ext cx="128016" cy="128016"/>
+          </a:xfrm>
+          <a:prstGeom prst="ellipse">
+            <a:avLst/>
+          </a:prstGeom>
+          <a:solidFill>
+            <a:srgbClr val="F59E0B"/>
+          </a:solidFill>
+          <a:ln/>
+        </p:spPr>
+      </p:sp>
+      <p:sp>
+        <p:nvSpPr>
+          <p:cNvPr id="24" name="Text 22"/>
+          <p:cNvSpPr txBox="1"/>
+          <p:nvPr/>
+        </p:nvSpPr>
+        <p:spPr>
+          <a:xfrm>
+            <a:off x="1234440" y="5230368"/>
+            <a:ext cx="1463040" cy="310896"/>
+          </a:xfrm>
+          <a:prstGeom prst="rect">
+            <a:avLst/>
+          </a:prstGeom>
+          <a:noFill/>
+          <a:ln/>
+        </p:spPr>
+        <p:txBody>
+          <a:bodyPr wrap="square" lIns="0" tIns="0" rIns="0" bIns="0" rtlCol="0" anchor="ctr"/>
+          <a:lstStyle/>
+          <a:p>
+            <a:pPr indent="0" marL="0">
+              <a:buNone/>
+            </a:pPr>
+            <a:r>
+              <a:rPr lang="en-US" sz="1350" b="1" dirty="0">
                 <a:solidFill>
                   <a:srgbClr val="E8EEF8"/>
                 </a:solidFill>
@@ -3460,77 +3935,184 @@
                 <a:ea typeface="Calibri" pitchFamily="34" charset="-122"/>
                 <a:cs typeface="Calibri" pitchFamily="34" charset="-120"/>
               </a:rPr>
-              <a:t>Inshrah Mehmood</a:t>
-            </a:r>
-            <a:endParaRPr lang="en-US" sz="1600" dirty="0"/>
-          </a:p>
-        </p:txBody>
-      </p:sp>
-      <p:sp>
-        <p:nvSpPr>
-          <p:cNvPr id="22" name="Text 20"/>
-          <p:cNvSpPr txBox="1"/>
-          <p:nvPr/>
-        </p:nvSpPr>
-        <p:spPr>
-          <a:xfrm>
-            <a:off x="8229600" y="4297680"/>
-            <a:ext cx="2880360" cy="274320"/>
-          </a:xfrm>
-          <a:prstGeom prst="rect">
-            <a:avLst/>
-          </a:prstGeom>
-          <a:noFill/>
-          <a:ln/>
-        </p:spPr>
-        <p:txBody>
-          <a:bodyPr wrap="square" lIns="0" tIns="0" rIns="0" bIns="0" rtlCol="0" anchor="ctr"/>
-          <a:lstStyle/>
-          <a:p>
-            <a:pPr algn="ctr" indent="0" marL="0">
+              <a:t>Ship</a:t>
+            </a:r>
+            <a:endParaRPr lang="en-US" sz="1350" dirty="0"/>
+          </a:p>
+        </p:txBody>
+      </p:sp>
+      <p:sp>
+        <p:nvSpPr>
+          <p:cNvPr id="25" name="Text 23"/>
+          <p:cNvSpPr txBox="1"/>
+          <p:nvPr/>
+        </p:nvSpPr>
+        <p:spPr>
+          <a:xfrm>
+            <a:off x="2697480" y="5239512"/>
+            <a:ext cx="4297680" cy="310896"/>
+          </a:xfrm>
+          <a:prstGeom prst="rect">
+            <a:avLst/>
+          </a:prstGeom>
+          <a:noFill/>
+          <a:ln/>
+        </p:spPr>
+        <p:txBody>
+          <a:bodyPr wrap="square" lIns="0" tIns="0" rIns="0" bIns="0" rtlCol="0" anchor="ctr"/>
+          <a:lstStyle/>
+          <a:p>
+            <a:pPr indent="0" marL="0">
+              <a:buNone/>
+            </a:pPr>
+            <a:r>
+              <a:rPr lang="en-US" sz="1150" dirty="0">
+                <a:solidFill>
+                  <a:srgbClr val="9FB0CC"/>
+                </a:solidFill>
+                <a:latin typeface="Calibri" pitchFamily="34" charset="0"/>
+                <a:ea typeface="Calibri" pitchFamily="34" charset="-122"/>
+                <a:cs typeface="Calibri" pitchFamily="34" charset="-120"/>
+              </a:rPr>
+              <a:t>Docker Compose · GitHub Actions CI · JWT + RBAC</a:t>
+            </a:r>
+            <a:endParaRPr lang="en-US" sz="1150" dirty="0"/>
+          </a:p>
+        </p:txBody>
+      </p:sp>
+      <p:sp>
+        <p:nvSpPr>
+          <p:cNvPr id="26" name="Shape 24"/>
+          <p:cNvSpPr/>
+          <p:nvPr/>
+        </p:nvSpPr>
+        <p:spPr>
+          <a:xfrm>
+            <a:off x="7589520" y="2240280"/>
+            <a:ext cx="3886200" cy="3630168"/>
+          </a:xfrm>
+          <a:prstGeom prst="roundRect">
+            <a:avLst>
+              <a:gd name="adj" fmla="val 3023"/>
+            </a:avLst>
+          </a:prstGeom>
+          <a:solidFill>
+            <a:srgbClr val="111A2E">
+              <a:alpha val="82000"/>
+            </a:srgbClr>
+          </a:solidFill>
+          <a:ln w="12700">
+            <a:solidFill>
+              <a:srgbClr val="1E2B44"/>
+            </a:solidFill>
+            <a:prstDash val="solid"/>
+          </a:ln>
+          <a:effectLst>
+            <a:outerShdw sx="100000" sy="100000" kx="0" ky="0" algn="bl" rotWithShape="0" blurRad="177800" dist="38100" dir="5400000">
+              <a:srgbClr val="000000">
+                <a:alpha val="35000"/>
+              </a:srgbClr>
+            </a:outerShdw>
+          </a:effectLst>
+        </p:spPr>
+      </p:sp>
+      <p:sp>
+        <p:nvSpPr>
+          <p:cNvPr id="27" name="Text 25"/>
+          <p:cNvSpPr txBox="1"/>
+          <p:nvPr/>
+        </p:nvSpPr>
+        <p:spPr>
+          <a:xfrm>
+            <a:off x="7909560" y="2450592"/>
+            <a:ext cx="3291840" cy="292608"/>
+          </a:xfrm>
+          <a:prstGeom prst="rect">
+            <a:avLst/>
+          </a:prstGeom>
+          <a:noFill/>
+          <a:ln/>
+        </p:spPr>
+        <p:txBody>
+          <a:bodyPr wrap="square" lIns="0" tIns="0" rIns="0" bIns="0" rtlCol="0" anchor="ctr"/>
+          <a:lstStyle/>
+          <a:p>
+            <a:pPr indent="0" marL="0">
+              <a:buNone/>
+            </a:pPr>
+            <a:r>
+              <a:rPr lang="en-US" sz="1450" b="1" dirty="0">
+                <a:solidFill>
+                  <a:srgbClr val="E8EEF8"/>
+                </a:solidFill>
+                <a:latin typeface="Calibri" pitchFamily="34" charset="0"/>
+                <a:ea typeface="Calibri" pitchFamily="34" charset="-122"/>
+                <a:cs typeface="Calibri" pitchFamily="34" charset="-120"/>
+              </a:rPr>
+              <a:t>Decisions on record</a:t>
+            </a:r>
+            <a:endParaRPr lang="en-US" sz="1450" dirty="0"/>
+          </a:p>
+        </p:txBody>
+      </p:sp>
+      <p:sp>
+        <p:nvSpPr>
+          <p:cNvPr id="28" name="Text 26"/>
+          <p:cNvSpPr txBox="1"/>
+          <p:nvPr/>
+        </p:nvSpPr>
+        <p:spPr>
+          <a:xfrm>
+            <a:off x="7909560" y="2834640"/>
+            <a:ext cx="3291840" cy="2834640"/>
+          </a:xfrm>
+          <a:prstGeom prst="rect">
+            <a:avLst/>
+          </a:prstGeom>
+          <a:noFill/>
+          <a:ln/>
+        </p:spPr>
+        <p:txBody>
+          <a:bodyPr wrap="square" lIns="0" tIns="0" rIns="0" bIns="0" rtlCol="0" anchor="ctr"/>
+          <a:lstStyle/>
+          <a:p>
+            <a:pPr indent="0" marL="0">
+              <a:lnSpc>
+                <a:spcPct val="112000"/>
+              </a:lnSpc>
               <a:buNone/>
             </a:pPr>
             <a:r>
               <a:rPr lang="en-US" sz="1200" dirty="0">
                 <a:solidFill>
-                  <a:srgbClr val="A78BFA"/>
-                </a:solidFill>
-                <a:latin typeface="Calibri" pitchFamily="34" charset="0"/>
-                <a:ea typeface="Calibri" pitchFamily="34" charset="-122"/>
-                <a:cs typeface="Calibri" pitchFamily="34" charset="-120"/>
-              </a:rPr>
-              <a:t>Team Member</a:t>
+                  <a:srgbClr val="9FB0CC"/>
+                </a:solidFill>
+                <a:latin typeface="Calibri" pitchFamily="34" charset="0"/>
+                <a:ea typeface="Calibri" pitchFamily="34" charset="-122"/>
+                <a:cs typeface="Calibri" pitchFamily="34" charset="-120"/>
+              </a:rPr>
+              <a:t>18 architectural decisions are written down with their reasoning — including the ones we got wrong and had to reverse.</a:t>
             </a:r>
             <a:endParaRPr lang="en-US" sz="1200" dirty="0"/>
           </a:p>
-        </p:txBody>
-      </p:sp>
-      <p:sp>
-        <p:nvSpPr>
-          <p:cNvPr id="23" name="Text 21"/>
-          <p:cNvSpPr txBox="1"/>
-          <p:nvPr/>
-        </p:nvSpPr>
-        <p:spPr>
-          <a:xfrm>
-            <a:off x="8229600" y="4626864"/>
-            <a:ext cx="2880360" cy="640080"/>
-          </a:xfrm>
-          <a:prstGeom prst="rect">
-            <a:avLst/>
-          </a:prstGeom>
-          <a:noFill/>
-          <a:ln/>
-        </p:spPr>
-        <p:txBody>
-          <a:bodyPr wrap="square" lIns="0" tIns="0" rIns="0" bIns="0" rtlCol="0" anchor="ctr"/>
-          <a:lstStyle/>
-          <a:p>
-            <a:pPr algn="ctr" indent="0" marL="0">
-              <a:buNone/>
-            </a:pPr>
-            <a:r>
-              <a:rPr lang="en-US" sz="1150" dirty="0">
+          <a:p>
+            <a:pPr indent="0" marL="0">
+              <a:lnSpc>
+                <a:spcPct val="112000"/>
+              </a:lnSpc>
+              <a:buNone/>
+            </a:pPr>
+            <a:endParaRPr lang="en-US" sz="1200" dirty="0"/>
+          </a:p>
+          <a:p>
+            <a:pPr indent="0" marL="0">
+              <a:lnSpc>
+                <a:spcPct val="112000"/>
+              </a:lnSpc>
+              <a:buNone/>
+            </a:pPr>
+            <a:r>
+              <a:rPr lang="en-US" sz="1200" dirty="0">
                 <a:solidFill>
                   <a:srgbClr val="9FB0CC"/>
                 </a:solidFill>
@@ -3538,48 +4120,38 @@
                 <a:ea typeface="Calibri" pitchFamily="34" charset="-122"/>
                 <a:cs typeface="Calibri" pitchFamily="34" charset="-120"/>
               </a:rPr>
-              <a:t>[ Add focus area ]</a:t>
-            </a:r>
-            <a:endParaRPr lang="en-US" sz="1150" dirty="0"/>
-          </a:p>
-        </p:txBody>
-      </p:sp>
-      <p:sp>
-        <p:nvSpPr>
-          <p:cNvPr id="24" name="Text 22"/>
-          <p:cNvSpPr txBox="1"/>
-          <p:nvPr/>
-        </p:nvSpPr>
-        <p:spPr>
-          <a:xfrm>
-            <a:off x="685800" y="5806440"/>
-            <a:ext cx="10789920" cy="292608"/>
-          </a:xfrm>
-          <a:prstGeom prst="rect">
-            <a:avLst/>
-          </a:prstGeom>
-          <a:noFill/>
-          <a:ln/>
-        </p:spPr>
-        <p:txBody>
-          <a:bodyPr wrap="square" lIns="0" tIns="0" rIns="0" bIns="0" rtlCol="0" anchor="ctr"/>
-          <a:lstStyle/>
-          <a:p>
-            <a:pPr algn="ctr" indent="0" marL="0">
-              <a:buNone/>
-            </a:pPr>
-            <a:r>
-              <a:rPr lang="en-US" sz="1150" i="1" dirty="0">
-                <a:solidFill>
-                  <a:srgbClr val="64748B"/>
-                </a:solidFill>
-                <a:latin typeface="Calibri" pitchFamily="34" charset="0"/>
-                <a:ea typeface="Calibri" pitchFamily="34" charset="-122"/>
-                <a:cs typeface="Calibri" pitchFamily="34" charset="-120"/>
-              </a:rPr>
-              <a:t>[ Add contact email · GitHub · LinkedIn ]</a:t>
-            </a:r>
-            <a:endParaRPr lang="en-US" sz="1150" dirty="0"/>
+              <a:t>A dataset that looked ideal and turned out unusable. A merge that made the model worse. A metric that hid a failure for an hour.</a:t>
+            </a:r>
+            <a:endParaRPr lang="en-US" sz="1200" dirty="0"/>
+          </a:p>
+          <a:p>
+            <a:pPr indent="0" marL="0">
+              <a:lnSpc>
+                <a:spcPct val="112000"/>
+              </a:lnSpc>
+              <a:buNone/>
+            </a:pPr>
+            <a:endParaRPr lang="en-US" sz="1200" dirty="0"/>
+          </a:p>
+          <a:p>
+            <a:pPr indent="0" marL="0">
+              <a:lnSpc>
+                <a:spcPct val="112000"/>
+              </a:lnSpc>
+              <a:buNone/>
+            </a:pPr>
+            <a:r>
+              <a:rPr lang="en-US" sz="1200" dirty="0">
+                <a:solidFill>
+                  <a:srgbClr val="9FB0CC"/>
+                </a:solidFill>
+                <a:latin typeface="Calibri" pitchFamily="34" charset="0"/>
+                <a:ea typeface="Calibri" pitchFamily="34" charset="-122"/>
+                <a:cs typeface="Calibri" pitchFamily="34" charset="-120"/>
+              </a:rPr>
+              <a:t>All of it is in the repository.</a:t>
+            </a:r>
+            <a:endParaRPr lang="en-US" sz="1200" dirty="0"/>
           </a:p>
         </p:txBody>
       </p:sp>
@@ -3692,7 +4264,7 @@
                 <a:ea typeface="Calibri" pitchFamily="34" charset="-122"/>
                 <a:cs typeface="Calibri" pitchFamily="34" charset="-120"/>
               </a:rPr>
-              <a:t>WHAT COMES NEXT</a:t>
+              <a:t>THE TEAM</a:t>
             </a:r>
             <a:endParaRPr lang="en-US" sz="1100" dirty="0"/>
           </a:p>
@@ -3731,7 +4303,7 @@
                 <a:ea typeface="Calibri" pitchFamily="34" charset="-122"/>
                 <a:cs typeface="Calibri" pitchFamily="34" charset="-120"/>
               </a:rPr>
-              <a:t>The honest roadmap.</a:t>
+              <a:t>Three people, one build.</a:t>
             </a:r>
             <a:endParaRPr lang="en-US" sz="3800" dirty="0"/>
           </a:p>
@@ -3746,11 +4318,11 @@
         <p:spPr>
           <a:xfrm>
             <a:off x="685800" y="2286000"/>
-            <a:ext cx="3337560" cy="2926080"/>
+            <a:ext cx="3337560" cy="3246120"/>
           </a:xfrm>
           <a:prstGeom prst="roundRect">
             <a:avLst>
-              <a:gd name="adj" fmla="val 3750"/>
+              <a:gd name="adj" fmla="val 3380"/>
             </a:avLst>
           </a:prstGeom>
           <a:solidFill>
@@ -3775,158 +4347,184 @@
       </p:sp>
       <p:sp>
         <p:nvSpPr>
-          <p:cNvPr id="7" name="Text 5"/>
-          <p:cNvSpPr txBox="1"/>
-          <p:nvPr/>
-        </p:nvSpPr>
-        <p:spPr>
-          <a:xfrm>
-            <a:off x="960120" y="2505456"/>
-            <a:ext cx="2743200" cy="274320"/>
-          </a:xfrm>
-          <a:prstGeom prst="rect">
-            <a:avLst/>
-          </a:prstGeom>
-          <a:noFill/>
-          <a:ln/>
-        </p:spPr>
-        <p:txBody>
-          <a:bodyPr wrap="square" lIns="0" tIns="0" rIns="0" bIns="0" rtlCol="0" anchor="ctr"/>
-          <a:lstStyle/>
-          <a:p>
-            <a:pPr indent="0" marL="0">
-              <a:buNone/>
-            </a:pPr>
-            <a:r>
-              <a:rPr lang="en-US" sz="1150" b="1" spc="200" kern="0" dirty="0">
-                <a:solidFill>
-                  <a:srgbClr val="10B981"/>
-                </a:solidFill>
-                <a:latin typeface="Calibri" pitchFamily="34" charset="0"/>
-                <a:ea typeface="Calibri" pitchFamily="34" charset="-122"/>
-                <a:cs typeface="Calibri" pitchFamily="34" charset="-120"/>
-              </a:rPr>
-              <a:t>SHIPPED</a:t>
+          <p:cNvPr id="7" name="Shape 5"/>
+          <p:cNvSpPr/>
+          <p:nvPr/>
+        </p:nvSpPr>
+        <p:spPr>
+          <a:xfrm>
+            <a:off x="1764792" y="2578608"/>
+            <a:ext cx="1188720" cy="1188720"/>
+          </a:xfrm>
+          <a:prstGeom prst="ellipse">
+            <a:avLst/>
+          </a:prstGeom>
+          <a:solidFill>
+            <a:srgbClr val="22D3EE">
+              <a:alpha val="18000"/>
+            </a:srgbClr>
+          </a:solidFill>
+          <a:ln w="19050">
+            <a:solidFill>
+              <a:srgbClr val="22D3EE"/>
+            </a:solidFill>
+            <a:prstDash val="solid"/>
+          </a:ln>
+        </p:spPr>
+      </p:sp>
+      <p:sp>
+        <p:nvSpPr>
+          <p:cNvPr id="8" name="Text 6"/>
+          <p:cNvSpPr txBox="1"/>
+          <p:nvPr/>
+        </p:nvSpPr>
+        <p:spPr>
+          <a:xfrm>
+            <a:off x="1764792" y="3054096"/>
+            <a:ext cx="1188720" cy="256032"/>
+          </a:xfrm>
+          <a:prstGeom prst="rect">
+            <a:avLst/>
+          </a:prstGeom>
+          <a:noFill/>
+          <a:ln/>
+        </p:spPr>
+        <p:txBody>
+          <a:bodyPr wrap="square" lIns="0" tIns="0" rIns="0" bIns="0" rtlCol="0" anchor="ctr"/>
+          <a:lstStyle/>
+          <a:p>
+            <a:pPr algn="ctr" indent="0" marL="0">
+              <a:buNone/>
+            </a:pPr>
+            <a:r>
+              <a:rPr lang="en-US" sz="950" spc="140" kern="0" dirty="0">
+                <a:solidFill>
+                  <a:srgbClr val="22D3EE"/>
+                </a:solidFill>
+                <a:latin typeface="Calibri" pitchFamily="34" charset="0"/>
+                <a:ea typeface="Calibri" pitchFamily="34" charset="-122"/>
+                <a:cs typeface="Calibri" pitchFamily="34" charset="-120"/>
+              </a:rPr>
+              <a:t>PHOTO</a:t>
+            </a:r>
+            <a:endParaRPr lang="en-US" sz="950" dirty="0"/>
+          </a:p>
+        </p:txBody>
+      </p:sp>
+      <p:sp>
+        <p:nvSpPr>
+          <p:cNvPr id="9" name="Text 7"/>
+          <p:cNvSpPr txBox="1"/>
+          <p:nvPr/>
+        </p:nvSpPr>
+        <p:spPr>
+          <a:xfrm>
+            <a:off x="914400" y="3950208"/>
+            <a:ext cx="2880360" cy="329184"/>
+          </a:xfrm>
+          <a:prstGeom prst="rect">
+            <a:avLst/>
+          </a:prstGeom>
+          <a:noFill/>
+          <a:ln/>
+        </p:spPr>
+        <p:txBody>
+          <a:bodyPr wrap="square" lIns="0" tIns="0" rIns="0" bIns="0" rtlCol="0" anchor="ctr"/>
+          <a:lstStyle/>
+          <a:p>
+            <a:pPr algn="ctr" indent="0" marL="0">
+              <a:buNone/>
+            </a:pPr>
+            <a:r>
+              <a:rPr lang="en-US" sz="1600" b="1" dirty="0">
+                <a:solidFill>
+                  <a:srgbClr val="E8EEF8"/>
+                </a:solidFill>
+                <a:latin typeface="Calibri" pitchFamily="34" charset="0"/>
+                <a:ea typeface="Calibri" pitchFamily="34" charset="-122"/>
+                <a:cs typeface="Calibri" pitchFamily="34" charset="-120"/>
+              </a:rPr>
+              <a:t>Ayaan Aatif</a:t>
+            </a:r>
+            <a:endParaRPr lang="en-US" sz="1600" dirty="0"/>
+          </a:p>
+        </p:txBody>
+      </p:sp>
+      <p:sp>
+        <p:nvSpPr>
+          <p:cNvPr id="10" name="Text 8"/>
+          <p:cNvSpPr txBox="1"/>
+          <p:nvPr/>
+        </p:nvSpPr>
+        <p:spPr>
+          <a:xfrm>
+            <a:off x="914400" y="4297680"/>
+            <a:ext cx="2880360" cy="274320"/>
+          </a:xfrm>
+          <a:prstGeom prst="rect">
+            <a:avLst/>
+          </a:prstGeom>
+          <a:noFill/>
+          <a:ln/>
+        </p:spPr>
+        <p:txBody>
+          <a:bodyPr wrap="square" lIns="0" tIns="0" rIns="0" bIns="0" rtlCol="0" anchor="ctr"/>
+          <a:lstStyle/>
+          <a:p>
+            <a:pPr algn="ctr" indent="0" marL="0">
+              <a:buNone/>
+            </a:pPr>
+            <a:r>
+              <a:rPr lang="en-US" sz="1200" dirty="0">
+                <a:solidFill>
+                  <a:srgbClr val="22D3EE"/>
+                </a:solidFill>
+                <a:latin typeface="Calibri" pitchFamily="34" charset="0"/>
+                <a:ea typeface="Calibri" pitchFamily="34" charset="-122"/>
+                <a:cs typeface="Calibri" pitchFamily="34" charset="-120"/>
+              </a:rPr>
+              <a:t>Team Lead</a:t>
+            </a:r>
+            <a:endParaRPr lang="en-US" sz="1200" dirty="0"/>
+          </a:p>
+        </p:txBody>
+      </p:sp>
+      <p:sp>
+        <p:nvSpPr>
+          <p:cNvPr id="11" name="Text 9"/>
+          <p:cNvSpPr txBox="1"/>
+          <p:nvPr/>
+        </p:nvSpPr>
+        <p:spPr>
+          <a:xfrm>
+            <a:off x="914400" y="4626864"/>
+            <a:ext cx="2880360" cy="640080"/>
+          </a:xfrm>
+          <a:prstGeom prst="rect">
+            <a:avLst/>
+          </a:prstGeom>
+          <a:noFill/>
+          <a:ln/>
+        </p:spPr>
+        <p:txBody>
+          <a:bodyPr wrap="square" lIns="0" tIns="0" rIns="0" bIns="0" rtlCol="0" anchor="ctr"/>
+          <a:lstStyle/>
+          <a:p>
+            <a:pPr algn="ctr" indent="0" marL="0">
+              <a:buNone/>
+            </a:pPr>
+            <a:r>
+              <a:rPr lang="en-US" sz="1150" dirty="0">
+                <a:solidFill>
+                  <a:srgbClr val="9FB0CC"/>
+                </a:solidFill>
+                <a:latin typeface="Calibri" pitchFamily="34" charset="0"/>
+                <a:ea typeface="Calibri" pitchFamily="34" charset="-122"/>
+                <a:cs typeface="Calibri" pitchFamily="34" charset="-120"/>
+              </a:rPr>
+              <a:t>Architecture, ML pipeline, demo delivery</a:t>
             </a:r>
             <a:endParaRPr lang="en-US" sz="1150" dirty="0"/>
-          </a:p>
-        </p:txBody>
-      </p:sp>
-      <p:sp>
-        <p:nvSpPr>
-          <p:cNvPr id="8" name="Shape 6"/>
-          <p:cNvSpPr/>
-          <p:nvPr/>
-        </p:nvSpPr>
-        <p:spPr>
-          <a:xfrm>
-            <a:off x="960120" y="2999232"/>
-            <a:ext cx="91440" cy="91440"/>
-          </a:xfrm>
-          <a:prstGeom prst="ellipse">
-            <a:avLst/>
-          </a:prstGeom>
-          <a:solidFill>
-            <a:srgbClr val="10B981"/>
-          </a:solidFill>
-          <a:ln/>
-        </p:spPr>
-      </p:sp>
-      <p:sp>
-        <p:nvSpPr>
-          <p:cNvPr id="9" name="Text 7"/>
-          <p:cNvSpPr txBox="1"/>
-          <p:nvPr/>
-        </p:nvSpPr>
-        <p:spPr>
-          <a:xfrm>
-            <a:off x="1179576" y="2926080"/>
-            <a:ext cx="2651760" cy="621792"/>
-          </a:xfrm>
-          <a:prstGeom prst="rect">
-            <a:avLst/>
-          </a:prstGeom>
-          <a:noFill/>
-          <a:ln/>
-        </p:spPr>
-        <p:txBody>
-          <a:bodyPr wrap="square" lIns="0" tIns="0" rIns="0" bIns="0" rtlCol="0" anchor="ctr"/>
-          <a:lstStyle/>
-          <a:p>
-            <a:pPr indent="0" marL="0">
-              <a:buNone/>
-            </a:pPr>
-            <a:r>
-              <a:rPr lang="en-US" sz="1200" dirty="0">
-                <a:solidFill>
-                  <a:srgbClr val="9FB0CC"/>
-                </a:solidFill>
-                <a:latin typeface="Calibri" pitchFamily="34" charset="0"/>
-                <a:ea typeface="Calibri" pitchFamily="34" charset="-122"/>
-                <a:cs typeface="Calibri" pitchFamily="34" charset="-120"/>
-              </a:rPr>
-              <a:t>Crack detection at 0.611 separation</a:t>
-            </a:r>
-            <a:endParaRPr lang="en-US" sz="1200" dirty="0"/>
-          </a:p>
-        </p:txBody>
-      </p:sp>
-      <p:sp>
-        <p:nvSpPr>
-          <p:cNvPr id="10" name="Shape 8"/>
-          <p:cNvSpPr/>
-          <p:nvPr/>
-        </p:nvSpPr>
-        <p:spPr>
-          <a:xfrm>
-            <a:off x="960120" y="3712464"/>
-            <a:ext cx="91440" cy="91440"/>
-          </a:xfrm>
-          <a:prstGeom prst="ellipse">
-            <a:avLst/>
-          </a:prstGeom>
-          <a:solidFill>
-            <a:srgbClr val="10B981"/>
-          </a:solidFill>
-          <a:ln/>
-        </p:spPr>
-      </p:sp>
-      <p:sp>
-        <p:nvSpPr>
-          <p:cNvPr id="11" name="Text 9"/>
-          <p:cNvSpPr txBox="1"/>
-          <p:nvPr/>
-        </p:nvSpPr>
-        <p:spPr>
-          <a:xfrm>
-            <a:off x="1179576" y="3639312"/>
-            <a:ext cx="2651760" cy="621792"/>
-          </a:xfrm>
-          <a:prstGeom prst="rect">
-            <a:avLst/>
-          </a:prstGeom>
-          <a:noFill/>
-          <a:ln/>
-        </p:spPr>
-        <p:txBody>
-          <a:bodyPr wrap="square" lIns="0" tIns="0" rIns="0" bIns="0" rtlCol="0" anchor="ctr"/>
-          <a:lstStyle/>
-          <a:p>
-            <a:pPr indent="0" marL="0">
-              <a:buNone/>
-            </a:pPr>
-            <a:r>
-              <a:rPr lang="en-US" sz="1200" dirty="0">
-                <a:solidFill>
-                  <a:srgbClr val="9FB0CC"/>
-                </a:solidFill>
-                <a:latin typeface="Calibri" pitchFamily="34" charset="0"/>
-                <a:ea typeface="Calibri" pitchFamily="34" charset="-122"/>
-                <a:cs typeface="Calibri" pitchFamily="34" charset="-120"/>
-              </a:rPr>
-              <a:t>Severity scoring and PDF reports</a:t>
-            </a:r>
-            <a:endParaRPr lang="en-US" sz="1200" dirty="0"/>
           </a:p>
         </p:txBody>
       </p:sp>
@@ -3938,71 +4536,12 @@
         </p:nvSpPr>
         <p:spPr>
           <a:xfrm>
-            <a:off x="960120" y="4425696"/>
-            <a:ext cx="91440" cy="91440"/>
-          </a:xfrm>
-          <a:prstGeom prst="ellipse">
-            <a:avLst/>
-          </a:prstGeom>
-          <a:solidFill>
-            <a:srgbClr val="10B981"/>
-          </a:solidFill>
-          <a:ln/>
-        </p:spPr>
-      </p:sp>
-      <p:sp>
-        <p:nvSpPr>
-          <p:cNvPr id="13" name="Text 11"/>
-          <p:cNvSpPr txBox="1"/>
-          <p:nvPr/>
-        </p:nvSpPr>
-        <p:spPr>
-          <a:xfrm>
-            <a:off x="1179576" y="4352544"/>
-            <a:ext cx="2651760" cy="621792"/>
-          </a:xfrm>
-          <a:prstGeom prst="rect">
-            <a:avLst/>
-          </a:prstGeom>
-          <a:noFill/>
-          <a:ln/>
-        </p:spPr>
-        <p:txBody>
-          <a:bodyPr wrap="square" lIns="0" tIns="0" rIns="0" bIns="0" rtlCol="0" anchor="ctr"/>
-          <a:lstStyle/>
-          <a:p>
-            <a:pPr indent="0" marL="0">
-              <a:buNone/>
-            </a:pPr>
-            <a:r>
-              <a:rPr lang="en-US" sz="1200" dirty="0">
-                <a:solidFill>
-                  <a:srgbClr val="9FB0CC"/>
-                </a:solidFill>
-                <a:latin typeface="Calibri" pitchFamily="34" charset="0"/>
-                <a:ea typeface="Calibri" pitchFamily="34" charset="-122"/>
-                <a:cs typeface="Calibri" pitchFamily="34" charset="-120"/>
-              </a:rPr>
-              <a:t>Dashboard, 3D viewer, auth, Docker</a:t>
-            </a:r>
-            <a:endParaRPr lang="en-US" sz="1200" dirty="0"/>
-          </a:p>
-        </p:txBody>
-      </p:sp>
-      <p:sp>
-        <p:nvSpPr>
-          <p:cNvPr id="14" name="Shape 12"/>
-          <p:cNvSpPr/>
-          <p:nvPr/>
-        </p:nvSpPr>
-        <p:spPr>
-          <a:xfrm>
             <a:off x="4343400" y="2286000"/>
-            <a:ext cx="3337560" cy="2926080"/>
+            <a:ext cx="3337560" cy="3246120"/>
           </a:xfrm>
           <a:prstGeom prst="roundRect">
             <a:avLst>
-              <a:gd name="adj" fmla="val 3750"/>
+              <a:gd name="adj" fmla="val 3380"/>
             </a:avLst>
           </a:prstGeom>
           <a:solidFill>
@@ -4027,99 +4566,184 @@
       </p:sp>
       <p:sp>
         <p:nvSpPr>
+          <p:cNvPr id="13" name="Shape 11"/>
+          <p:cNvSpPr/>
+          <p:nvPr/>
+        </p:nvSpPr>
+        <p:spPr>
+          <a:xfrm>
+            <a:off x="5422392" y="2578608"/>
+            <a:ext cx="1188720" cy="1188720"/>
+          </a:xfrm>
+          <a:prstGeom prst="ellipse">
+            <a:avLst/>
+          </a:prstGeom>
+          <a:solidFill>
+            <a:srgbClr val="6366F1">
+              <a:alpha val="18000"/>
+            </a:srgbClr>
+          </a:solidFill>
+          <a:ln w="19050">
+            <a:solidFill>
+              <a:srgbClr val="6366F1"/>
+            </a:solidFill>
+            <a:prstDash val="solid"/>
+          </a:ln>
+        </p:spPr>
+      </p:sp>
+      <p:sp>
+        <p:nvSpPr>
+          <p:cNvPr id="14" name="Text 12"/>
+          <p:cNvSpPr txBox="1"/>
+          <p:nvPr/>
+        </p:nvSpPr>
+        <p:spPr>
+          <a:xfrm>
+            <a:off x="5422392" y="3054096"/>
+            <a:ext cx="1188720" cy="256032"/>
+          </a:xfrm>
+          <a:prstGeom prst="rect">
+            <a:avLst/>
+          </a:prstGeom>
+          <a:noFill/>
+          <a:ln/>
+        </p:spPr>
+        <p:txBody>
+          <a:bodyPr wrap="square" lIns="0" tIns="0" rIns="0" bIns="0" rtlCol="0" anchor="ctr"/>
+          <a:lstStyle/>
+          <a:p>
+            <a:pPr algn="ctr" indent="0" marL="0">
+              <a:buNone/>
+            </a:pPr>
+            <a:r>
+              <a:rPr lang="en-US" sz="950" spc="140" kern="0" dirty="0">
+                <a:solidFill>
+                  <a:srgbClr val="6366F1"/>
+                </a:solidFill>
+                <a:latin typeface="Calibri" pitchFamily="34" charset="0"/>
+                <a:ea typeface="Calibri" pitchFamily="34" charset="-122"/>
+                <a:cs typeface="Calibri" pitchFamily="34" charset="-120"/>
+              </a:rPr>
+              <a:t>PHOTO</a:t>
+            </a:r>
+            <a:endParaRPr lang="en-US" sz="950" dirty="0"/>
+          </a:p>
+        </p:txBody>
+      </p:sp>
+      <p:sp>
+        <p:nvSpPr>
           <p:cNvPr id="15" name="Text 13"/>
           <p:cNvSpPr txBox="1"/>
           <p:nvPr/>
         </p:nvSpPr>
         <p:spPr>
           <a:xfrm>
-            <a:off x="4617720" y="2505456"/>
-            <a:ext cx="2743200" cy="274320"/>
-          </a:xfrm>
-          <a:prstGeom prst="rect">
-            <a:avLst/>
-          </a:prstGeom>
-          <a:noFill/>
-          <a:ln/>
-        </p:spPr>
-        <p:txBody>
-          <a:bodyPr wrap="square" lIns="0" tIns="0" rIns="0" bIns="0" rtlCol="0" anchor="ctr"/>
-          <a:lstStyle/>
-          <a:p>
-            <a:pPr indent="0" marL="0">
-              <a:buNone/>
-            </a:pPr>
-            <a:r>
-              <a:rPr lang="en-US" sz="1150" b="1" spc="200" kern="0" dirty="0">
-                <a:solidFill>
-                  <a:srgbClr val="22D3EE"/>
-                </a:solidFill>
-                <a:latin typeface="Calibri" pitchFamily="34" charset="0"/>
-                <a:ea typeface="Calibri" pitchFamily="34" charset="-122"/>
-                <a:cs typeface="Calibri" pitchFamily="34" charset="-120"/>
-              </a:rPr>
-              <a:t>NEXT</a:t>
+            <a:off x="4572000" y="3950208"/>
+            <a:ext cx="2880360" cy="329184"/>
+          </a:xfrm>
+          <a:prstGeom prst="rect">
+            <a:avLst/>
+          </a:prstGeom>
+          <a:noFill/>
+          <a:ln/>
+        </p:spPr>
+        <p:txBody>
+          <a:bodyPr wrap="square" lIns="0" tIns="0" rIns="0" bIns="0" rtlCol="0" anchor="ctr"/>
+          <a:lstStyle/>
+          <a:p>
+            <a:pPr algn="ctr" indent="0" marL="0">
+              <a:buNone/>
+            </a:pPr>
+            <a:r>
+              <a:rPr lang="en-US" sz="1600" b="1" dirty="0">
+                <a:solidFill>
+                  <a:srgbClr val="E8EEF8"/>
+                </a:solidFill>
+                <a:latin typeface="Calibri" pitchFamily="34" charset="0"/>
+                <a:ea typeface="Calibri" pitchFamily="34" charset="-122"/>
+                <a:cs typeface="Calibri" pitchFamily="34" charset="-120"/>
+              </a:rPr>
+              <a:t>Muhammad Muneed</a:t>
+            </a:r>
+            <a:endParaRPr lang="en-US" sz="1600" dirty="0"/>
+          </a:p>
+        </p:txBody>
+      </p:sp>
+      <p:sp>
+        <p:nvSpPr>
+          <p:cNvPr id="16" name="Text 14"/>
+          <p:cNvSpPr txBox="1"/>
+          <p:nvPr/>
+        </p:nvSpPr>
+        <p:spPr>
+          <a:xfrm>
+            <a:off x="4572000" y="4297680"/>
+            <a:ext cx="2880360" cy="274320"/>
+          </a:xfrm>
+          <a:prstGeom prst="rect">
+            <a:avLst/>
+          </a:prstGeom>
+          <a:noFill/>
+          <a:ln/>
+        </p:spPr>
+        <p:txBody>
+          <a:bodyPr wrap="square" lIns="0" tIns="0" rIns="0" bIns="0" rtlCol="0" anchor="ctr"/>
+          <a:lstStyle/>
+          <a:p>
+            <a:pPr algn="ctr" indent="0" marL="0">
+              <a:buNone/>
+            </a:pPr>
+            <a:r>
+              <a:rPr lang="en-US" sz="1200" dirty="0">
+                <a:solidFill>
+                  <a:srgbClr val="6366F1"/>
+                </a:solidFill>
+                <a:latin typeface="Calibri" pitchFamily="34" charset="0"/>
+                <a:ea typeface="Calibri" pitchFamily="34" charset="-122"/>
+                <a:cs typeface="Calibri" pitchFamily="34" charset="-120"/>
+              </a:rPr>
+              <a:t>Team Member</a:t>
+            </a:r>
+            <a:endParaRPr lang="en-US" sz="1200" dirty="0"/>
+          </a:p>
+        </p:txBody>
+      </p:sp>
+      <p:sp>
+        <p:nvSpPr>
+          <p:cNvPr id="17" name="Text 15"/>
+          <p:cNvSpPr txBox="1"/>
+          <p:nvPr/>
+        </p:nvSpPr>
+        <p:spPr>
+          <a:xfrm>
+            <a:off x="4572000" y="4626864"/>
+            <a:ext cx="2880360" cy="640080"/>
+          </a:xfrm>
+          <a:prstGeom prst="rect">
+            <a:avLst/>
+          </a:prstGeom>
+          <a:noFill/>
+          <a:ln/>
+        </p:spPr>
+        <p:txBody>
+          <a:bodyPr wrap="square" lIns="0" tIns="0" rIns="0" bIns="0" rtlCol="0" anchor="ctr"/>
+          <a:lstStyle/>
+          <a:p>
+            <a:pPr algn="ctr" indent="0" marL="0">
+              <a:buNone/>
+            </a:pPr>
+            <a:r>
+              <a:rPr lang="en-US" sz="1150" dirty="0">
+                <a:solidFill>
+                  <a:srgbClr val="9FB0CC"/>
+                </a:solidFill>
+                <a:latin typeface="Calibri" pitchFamily="34" charset="0"/>
+                <a:ea typeface="Calibri" pitchFamily="34" charset="-122"/>
+                <a:cs typeface="Calibri" pitchFamily="34" charset="-120"/>
+              </a:rPr>
+              <a:t>[ Add focus area ]</a:t>
             </a:r>
             <a:endParaRPr lang="en-US" sz="1150" dirty="0"/>
-          </a:p>
-        </p:txBody>
-      </p:sp>
-      <p:sp>
-        <p:nvSpPr>
-          <p:cNvPr id="16" name="Shape 14"/>
-          <p:cNvSpPr/>
-          <p:nvPr/>
-        </p:nvSpPr>
-        <p:spPr>
-          <a:xfrm>
-            <a:off x="4617720" y="2999232"/>
-            <a:ext cx="91440" cy="91440"/>
-          </a:xfrm>
-          <a:prstGeom prst="ellipse">
-            <a:avLst/>
-          </a:prstGeom>
-          <a:solidFill>
-            <a:srgbClr val="22D3EE"/>
-          </a:solidFill>
-          <a:ln/>
-        </p:spPr>
-      </p:sp>
-      <p:sp>
-        <p:nvSpPr>
-          <p:cNvPr id="17" name="Text 15"/>
-          <p:cNvSpPr txBox="1"/>
-          <p:nvPr/>
-        </p:nvSpPr>
-        <p:spPr>
-          <a:xfrm>
-            <a:off x="4837176" y="2926080"/>
-            <a:ext cx="2651760" cy="621792"/>
-          </a:xfrm>
-          <a:prstGeom prst="rect">
-            <a:avLst/>
-          </a:prstGeom>
-          <a:noFill/>
-          <a:ln/>
-        </p:spPr>
-        <p:txBody>
-          <a:bodyPr wrap="square" lIns="0" tIns="0" rIns="0" bIns="0" rtlCol="0" anchor="ctr"/>
-          <a:lstStyle/>
-          <a:p>
-            <a:pPr indent="0" marL="0">
-              <a:buNone/>
-            </a:pPr>
-            <a:r>
-              <a:rPr lang="en-US" sz="1200" dirty="0">
-                <a:solidFill>
-                  <a:srgbClr val="9FB0CC"/>
-                </a:solidFill>
-                <a:latin typeface="Calibri" pitchFamily="34" charset="0"/>
-                <a:ea typeface="Calibri" pitchFamily="34" charset="-122"/>
-                <a:cs typeface="Calibri" pitchFamily="34" charset="-120"/>
-              </a:rPr>
-              <a:t>More defect classes — corrosion, spalling</a:t>
-            </a:r>
-            <a:endParaRPr lang="en-US" sz="1200" dirty="0"/>
           </a:p>
         </p:txBody>
       </p:sp>
@@ -4131,130 +4755,12 @@
         </p:nvSpPr>
         <p:spPr>
           <a:xfrm>
-            <a:off x="4617720" y="3712464"/>
-            <a:ext cx="91440" cy="91440"/>
-          </a:xfrm>
-          <a:prstGeom prst="ellipse">
-            <a:avLst/>
-          </a:prstGeom>
-          <a:solidFill>
-            <a:srgbClr val="22D3EE"/>
-          </a:solidFill>
-          <a:ln/>
-        </p:spPr>
-      </p:sp>
-      <p:sp>
-        <p:nvSpPr>
-          <p:cNvPr id="19" name="Text 17"/>
-          <p:cNvSpPr txBox="1"/>
-          <p:nvPr/>
-        </p:nvSpPr>
-        <p:spPr>
-          <a:xfrm>
-            <a:off x="4837176" y="3639312"/>
-            <a:ext cx="2651760" cy="621792"/>
-          </a:xfrm>
-          <a:prstGeom prst="rect">
-            <a:avLst/>
-          </a:prstGeom>
-          <a:noFill/>
-          <a:ln/>
-        </p:spPr>
-        <p:txBody>
-          <a:bodyPr wrap="square" lIns="0" tIns="0" rIns="0" bIns="0" rtlCol="0" anchor="ctr"/>
-          <a:lstStyle/>
-          <a:p>
-            <a:pPr indent="0" marL="0">
-              <a:buNone/>
-            </a:pPr>
-            <a:r>
-              <a:rPr lang="en-US" sz="1200" dirty="0">
-                <a:solidFill>
-                  <a:srgbClr val="9FB0CC"/>
-                </a:solidFill>
-                <a:latin typeface="Calibri" pitchFamily="34" charset="0"/>
-                <a:ea typeface="Calibri" pitchFamily="34" charset="-122"/>
-                <a:cs typeface="Calibri" pitchFamily="34" charset="-120"/>
-              </a:rPr>
-              <a:t>Cross-frame tracking so video counts are real</a:t>
-            </a:r>
-            <a:endParaRPr lang="en-US" sz="1200" dirty="0"/>
-          </a:p>
-        </p:txBody>
-      </p:sp>
-      <p:sp>
-        <p:nvSpPr>
-          <p:cNvPr id="20" name="Shape 18"/>
-          <p:cNvSpPr/>
-          <p:nvPr/>
-        </p:nvSpPr>
-        <p:spPr>
-          <a:xfrm>
-            <a:off x="4617720" y="4425696"/>
-            <a:ext cx="91440" cy="91440"/>
-          </a:xfrm>
-          <a:prstGeom prst="ellipse">
-            <a:avLst/>
-          </a:prstGeom>
-          <a:solidFill>
-            <a:srgbClr val="22D3EE"/>
-          </a:solidFill>
-          <a:ln/>
-        </p:spPr>
-      </p:sp>
-      <p:sp>
-        <p:nvSpPr>
-          <p:cNvPr id="21" name="Text 19"/>
-          <p:cNvSpPr txBox="1"/>
-          <p:nvPr/>
-        </p:nvSpPr>
-        <p:spPr>
-          <a:xfrm>
-            <a:off x="4837176" y="4352544"/>
-            <a:ext cx="2651760" cy="621792"/>
-          </a:xfrm>
-          <a:prstGeom prst="rect">
-            <a:avLst/>
-          </a:prstGeom>
-          <a:noFill/>
-          <a:ln/>
-        </p:spPr>
-        <p:txBody>
-          <a:bodyPr wrap="square" lIns="0" tIns="0" rIns="0" bIns="0" rtlCol="0" anchor="ctr"/>
-          <a:lstStyle/>
-          <a:p>
-            <a:pPr indent="0" marL="0">
-              <a:buNone/>
-            </a:pPr>
-            <a:r>
-              <a:rPr lang="en-US" sz="1200" dirty="0">
-                <a:solidFill>
-                  <a:srgbClr val="9FB0CC"/>
-                </a:solidFill>
-                <a:latin typeface="Calibri" pitchFamily="34" charset="0"/>
-                <a:ea typeface="Calibri" pitchFamily="34" charset="-122"/>
-                <a:cs typeface="Calibri" pitchFamily="34" charset="-120"/>
-              </a:rPr>
-              <a:t>Segmentation instead of boxes for thin cracks</a:t>
-            </a:r>
-            <a:endParaRPr lang="en-US" sz="1200" dirty="0"/>
-          </a:p>
-        </p:txBody>
-      </p:sp>
-      <p:sp>
-        <p:nvSpPr>
-          <p:cNvPr id="22" name="Shape 20"/>
-          <p:cNvSpPr/>
-          <p:nvPr/>
-        </p:nvSpPr>
-        <p:spPr>
-          <a:xfrm>
             <a:off x="8001000" y="2286000"/>
-            <a:ext cx="3337560" cy="2926080"/>
+            <a:ext cx="3337560" cy="3246120"/>
           </a:xfrm>
           <a:prstGeom prst="roundRect">
             <a:avLst>
-              <a:gd name="adj" fmla="val 3750"/>
+              <a:gd name="adj" fmla="val 3380"/>
             </a:avLst>
           </a:prstGeom>
           <a:solidFill>
@@ -4279,30 +4785,213 @@
       </p:sp>
       <p:sp>
         <p:nvSpPr>
+          <p:cNvPr id="19" name="Shape 17"/>
+          <p:cNvSpPr/>
+          <p:nvPr/>
+        </p:nvSpPr>
+        <p:spPr>
+          <a:xfrm>
+            <a:off x="9079992" y="2578608"/>
+            <a:ext cx="1188720" cy="1188720"/>
+          </a:xfrm>
+          <a:prstGeom prst="ellipse">
+            <a:avLst/>
+          </a:prstGeom>
+          <a:solidFill>
+            <a:srgbClr val="A78BFA">
+              <a:alpha val="18000"/>
+            </a:srgbClr>
+          </a:solidFill>
+          <a:ln w="19050">
+            <a:solidFill>
+              <a:srgbClr val="A78BFA"/>
+            </a:solidFill>
+            <a:prstDash val="solid"/>
+          </a:ln>
+        </p:spPr>
+      </p:sp>
+      <p:sp>
+        <p:nvSpPr>
+          <p:cNvPr id="20" name="Text 18"/>
+          <p:cNvSpPr txBox="1"/>
+          <p:nvPr/>
+        </p:nvSpPr>
+        <p:spPr>
+          <a:xfrm>
+            <a:off x="9079992" y="3054096"/>
+            <a:ext cx="1188720" cy="256032"/>
+          </a:xfrm>
+          <a:prstGeom prst="rect">
+            <a:avLst/>
+          </a:prstGeom>
+          <a:noFill/>
+          <a:ln/>
+        </p:spPr>
+        <p:txBody>
+          <a:bodyPr wrap="square" lIns="0" tIns="0" rIns="0" bIns="0" rtlCol="0" anchor="ctr"/>
+          <a:lstStyle/>
+          <a:p>
+            <a:pPr algn="ctr" indent="0" marL="0">
+              <a:buNone/>
+            </a:pPr>
+            <a:r>
+              <a:rPr lang="en-US" sz="950" spc="140" kern="0" dirty="0">
+                <a:solidFill>
+                  <a:srgbClr val="A78BFA"/>
+                </a:solidFill>
+                <a:latin typeface="Calibri" pitchFamily="34" charset="0"/>
+                <a:ea typeface="Calibri" pitchFamily="34" charset="-122"/>
+                <a:cs typeface="Calibri" pitchFamily="34" charset="-120"/>
+              </a:rPr>
+              <a:t>PHOTO</a:t>
+            </a:r>
+            <a:endParaRPr lang="en-US" sz="950" dirty="0"/>
+          </a:p>
+        </p:txBody>
+      </p:sp>
+      <p:sp>
+        <p:nvSpPr>
+          <p:cNvPr id="21" name="Text 19"/>
+          <p:cNvSpPr txBox="1"/>
+          <p:nvPr/>
+        </p:nvSpPr>
+        <p:spPr>
+          <a:xfrm>
+            <a:off x="8229600" y="3950208"/>
+            <a:ext cx="2880360" cy="329184"/>
+          </a:xfrm>
+          <a:prstGeom prst="rect">
+            <a:avLst/>
+          </a:prstGeom>
+          <a:noFill/>
+          <a:ln/>
+        </p:spPr>
+        <p:txBody>
+          <a:bodyPr wrap="square" lIns="0" tIns="0" rIns="0" bIns="0" rtlCol="0" anchor="ctr"/>
+          <a:lstStyle/>
+          <a:p>
+            <a:pPr algn="ctr" indent="0" marL="0">
+              <a:buNone/>
+            </a:pPr>
+            <a:r>
+              <a:rPr lang="en-US" sz="1600" b="1" dirty="0">
+                <a:solidFill>
+                  <a:srgbClr val="E8EEF8"/>
+                </a:solidFill>
+                <a:latin typeface="Calibri" pitchFamily="34" charset="0"/>
+                <a:ea typeface="Calibri" pitchFamily="34" charset="-122"/>
+                <a:cs typeface="Calibri" pitchFamily="34" charset="-120"/>
+              </a:rPr>
+              <a:t>Inshrah Mehmood</a:t>
+            </a:r>
+            <a:endParaRPr lang="en-US" sz="1600" dirty="0"/>
+          </a:p>
+        </p:txBody>
+      </p:sp>
+      <p:sp>
+        <p:nvSpPr>
+          <p:cNvPr id="22" name="Text 20"/>
+          <p:cNvSpPr txBox="1"/>
+          <p:nvPr/>
+        </p:nvSpPr>
+        <p:spPr>
+          <a:xfrm>
+            <a:off x="8229600" y="4297680"/>
+            <a:ext cx="2880360" cy="274320"/>
+          </a:xfrm>
+          <a:prstGeom prst="rect">
+            <a:avLst/>
+          </a:prstGeom>
+          <a:noFill/>
+          <a:ln/>
+        </p:spPr>
+        <p:txBody>
+          <a:bodyPr wrap="square" lIns="0" tIns="0" rIns="0" bIns="0" rtlCol="0" anchor="ctr"/>
+          <a:lstStyle/>
+          <a:p>
+            <a:pPr algn="ctr" indent="0" marL="0">
+              <a:buNone/>
+            </a:pPr>
+            <a:r>
+              <a:rPr lang="en-US" sz="1200" dirty="0">
+                <a:solidFill>
+                  <a:srgbClr val="A78BFA"/>
+                </a:solidFill>
+                <a:latin typeface="Calibri" pitchFamily="34" charset="0"/>
+                <a:ea typeface="Calibri" pitchFamily="34" charset="-122"/>
+                <a:cs typeface="Calibri" pitchFamily="34" charset="-120"/>
+              </a:rPr>
+              <a:t>Team Member</a:t>
+            </a:r>
+            <a:endParaRPr lang="en-US" sz="1200" dirty="0"/>
+          </a:p>
+        </p:txBody>
+      </p:sp>
+      <p:sp>
+        <p:nvSpPr>
           <p:cNvPr id="23" name="Text 21"/>
           <p:cNvSpPr txBox="1"/>
           <p:nvPr/>
         </p:nvSpPr>
         <p:spPr>
           <a:xfrm>
-            <a:off x="8275320" y="2505456"/>
-            <a:ext cx="2743200" cy="274320"/>
-          </a:xfrm>
-          <a:prstGeom prst="rect">
-            <a:avLst/>
-          </a:prstGeom>
-          <a:noFill/>
-          <a:ln/>
-        </p:spPr>
-        <p:txBody>
-          <a:bodyPr wrap="square" lIns="0" tIns="0" rIns="0" bIns="0" rtlCol="0" anchor="ctr"/>
-          <a:lstStyle/>
-          <a:p>
-            <a:pPr indent="0" marL="0">
-              <a:buNone/>
-            </a:pPr>
-            <a:r>
-              <a:rPr lang="en-US" sz="1150" b="1" spc="200" kern="0" dirty="0">
+            <a:off x="8229600" y="4626864"/>
+            <a:ext cx="2880360" cy="640080"/>
+          </a:xfrm>
+          <a:prstGeom prst="rect">
+            <a:avLst/>
+          </a:prstGeom>
+          <a:noFill/>
+          <a:ln/>
+        </p:spPr>
+        <p:txBody>
+          <a:bodyPr wrap="square" lIns="0" tIns="0" rIns="0" bIns="0" rtlCol="0" anchor="ctr"/>
+          <a:lstStyle/>
+          <a:p>
+            <a:pPr algn="ctr" indent="0" marL="0">
+              <a:buNone/>
+            </a:pPr>
+            <a:r>
+              <a:rPr lang="en-US" sz="1150" dirty="0">
+                <a:solidFill>
+                  <a:srgbClr val="9FB0CC"/>
+                </a:solidFill>
+                <a:latin typeface="Calibri" pitchFamily="34" charset="0"/>
+                <a:ea typeface="Calibri" pitchFamily="34" charset="-122"/>
+                <a:cs typeface="Calibri" pitchFamily="34" charset="-120"/>
+              </a:rPr>
+              <a:t>[ Add focus area ]</a:t>
+            </a:r>
+            <a:endParaRPr lang="en-US" sz="1150" dirty="0"/>
+          </a:p>
+        </p:txBody>
+      </p:sp>
+      <p:sp>
+        <p:nvSpPr>
+          <p:cNvPr id="24" name="Text 22"/>
+          <p:cNvSpPr txBox="1"/>
+          <p:nvPr/>
+        </p:nvSpPr>
+        <p:spPr>
+          <a:xfrm>
+            <a:off x="685800" y="5806440"/>
+            <a:ext cx="10789920" cy="292608"/>
+          </a:xfrm>
+          <a:prstGeom prst="rect">
+            <a:avLst/>
+          </a:prstGeom>
+          <a:noFill/>
+          <a:ln/>
+        </p:spPr>
+        <p:txBody>
+          <a:bodyPr wrap="square" lIns="0" tIns="0" rIns="0" bIns="0" rtlCol="0" anchor="ctr"/>
+          <a:lstStyle/>
+          <a:p>
+            <a:pPr algn="ctr" indent="0" marL="0">
+              <a:buNone/>
+            </a:pPr>
+            <a:r>
+              <a:rPr lang="en-US" sz="1150" i="1" dirty="0">
                 <a:solidFill>
                   <a:srgbClr val="64748B"/>
                 </a:solidFill>
@@ -4310,225 +4999,9 @@
                 <a:ea typeface="Calibri" pitchFamily="34" charset="-122"/>
                 <a:cs typeface="Calibri" pitchFamily="34" charset="-120"/>
               </a:rPr>
-              <a:t>LATER</a:t>
+              <a:t>[ Add contact email · GitHub · LinkedIn ]</a:t>
             </a:r>
             <a:endParaRPr lang="en-US" sz="1150" dirty="0"/>
-          </a:p>
-        </p:txBody>
-      </p:sp>
-      <p:sp>
-        <p:nvSpPr>
-          <p:cNvPr id="24" name="Shape 22"/>
-          <p:cNvSpPr/>
-          <p:nvPr/>
-        </p:nvSpPr>
-        <p:spPr>
-          <a:xfrm>
-            <a:off x="8275320" y="2999232"/>
-            <a:ext cx="91440" cy="91440"/>
-          </a:xfrm>
-          <a:prstGeom prst="ellipse">
-            <a:avLst/>
-          </a:prstGeom>
-          <a:solidFill>
-            <a:srgbClr val="64748B"/>
-          </a:solidFill>
-          <a:ln/>
-        </p:spPr>
-      </p:sp>
-      <p:sp>
-        <p:nvSpPr>
-          <p:cNvPr id="25" name="Text 23"/>
-          <p:cNvSpPr txBox="1"/>
-          <p:nvPr/>
-        </p:nvSpPr>
-        <p:spPr>
-          <a:xfrm>
-            <a:off x="8494776" y="2926080"/>
-            <a:ext cx="2651760" cy="621792"/>
-          </a:xfrm>
-          <a:prstGeom prst="rect">
-            <a:avLst/>
-          </a:prstGeom>
-          <a:noFill/>
-          <a:ln/>
-        </p:spPr>
-        <p:txBody>
-          <a:bodyPr wrap="square" lIns="0" tIns="0" rIns="0" bIns="0" rtlCol="0" anchor="ctr"/>
-          <a:lstStyle/>
-          <a:p>
-            <a:pPr indent="0" marL="0">
-              <a:buNone/>
-            </a:pPr>
-            <a:r>
-              <a:rPr lang="en-US" sz="1200" dirty="0">
-                <a:solidFill>
-                  <a:srgbClr val="9FB0CC"/>
-                </a:solidFill>
-                <a:latin typeface="Calibri" pitchFamily="34" charset="0"/>
-                <a:ea typeface="Calibri" pitchFamily="34" charset="-122"/>
-                <a:cs typeface="Calibri" pitchFamily="34" charset="-120"/>
-              </a:rPr>
-              <a:t>Photogrammetric twin from the imagery itself</a:t>
-            </a:r>
-            <a:endParaRPr lang="en-US" sz="1200" dirty="0"/>
-          </a:p>
-        </p:txBody>
-      </p:sp>
-      <p:sp>
-        <p:nvSpPr>
-          <p:cNvPr id="26" name="Shape 24"/>
-          <p:cNvSpPr/>
-          <p:nvPr/>
-        </p:nvSpPr>
-        <p:spPr>
-          <a:xfrm>
-            <a:off x="8275320" y="3712464"/>
-            <a:ext cx="91440" cy="91440"/>
-          </a:xfrm>
-          <a:prstGeom prst="ellipse">
-            <a:avLst/>
-          </a:prstGeom>
-          <a:solidFill>
-            <a:srgbClr val="64748B"/>
-          </a:solidFill>
-          <a:ln/>
-        </p:spPr>
-      </p:sp>
-      <p:sp>
-        <p:nvSpPr>
-          <p:cNvPr id="27" name="Text 25"/>
-          <p:cNvSpPr txBox="1"/>
-          <p:nvPr/>
-        </p:nvSpPr>
-        <p:spPr>
-          <a:xfrm>
-            <a:off x="8494776" y="3639312"/>
-            <a:ext cx="2651760" cy="621792"/>
-          </a:xfrm>
-          <a:prstGeom prst="rect">
-            <a:avLst/>
-          </a:prstGeom>
-          <a:noFill/>
-          <a:ln/>
-        </p:spPr>
-        <p:txBody>
-          <a:bodyPr wrap="square" lIns="0" tIns="0" rIns="0" bIns="0" rtlCol="0" anchor="ctr"/>
-          <a:lstStyle/>
-          <a:p>
-            <a:pPr indent="0" marL="0">
-              <a:buNone/>
-            </a:pPr>
-            <a:r>
-              <a:rPr lang="en-US" sz="1200" dirty="0">
-                <a:solidFill>
-                  <a:srgbClr val="9FB0CC"/>
-                </a:solidFill>
-                <a:latin typeface="Calibri" pitchFamily="34" charset="0"/>
-                <a:ea typeface="Calibri" pitchFamily="34" charset="-122"/>
-                <a:cs typeface="Calibri" pitchFamily="34" charset="-120"/>
-              </a:rPr>
-              <a:t>Predictive maintenance once trend data exists</a:t>
-            </a:r>
-            <a:endParaRPr lang="en-US" sz="1200" dirty="0"/>
-          </a:p>
-        </p:txBody>
-      </p:sp>
-      <p:sp>
-        <p:nvSpPr>
-          <p:cNvPr id="28" name="Shape 26"/>
-          <p:cNvSpPr/>
-          <p:nvPr/>
-        </p:nvSpPr>
-        <p:spPr>
-          <a:xfrm>
-            <a:off x="8275320" y="4425696"/>
-            <a:ext cx="91440" cy="91440"/>
-          </a:xfrm>
-          <a:prstGeom prst="ellipse">
-            <a:avLst/>
-          </a:prstGeom>
-          <a:solidFill>
-            <a:srgbClr val="64748B"/>
-          </a:solidFill>
-          <a:ln/>
-        </p:spPr>
-      </p:sp>
-      <p:sp>
-        <p:nvSpPr>
-          <p:cNvPr id="29" name="Text 27"/>
-          <p:cNvSpPr txBox="1"/>
-          <p:nvPr/>
-        </p:nvSpPr>
-        <p:spPr>
-          <a:xfrm>
-            <a:off x="8494776" y="4352544"/>
-            <a:ext cx="2651760" cy="621792"/>
-          </a:xfrm>
-          <a:prstGeom prst="rect">
-            <a:avLst/>
-          </a:prstGeom>
-          <a:noFill/>
-          <a:ln/>
-        </p:spPr>
-        <p:txBody>
-          <a:bodyPr wrap="square" lIns="0" tIns="0" rIns="0" bIns="0" rtlCol="0" anchor="ctr"/>
-          <a:lstStyle/>
-          <a:p>
-            <a:pPr indent="0" marL="0">
-              <a:buNone/>
-            </a:pPr>
-            <a:r>
-              <a:rPr lang="en-US" sz="1200" dirty="0">
-                <a:solidFill>
-                  <a:srgbClr val="9FB0CC"/>
-                </a:solidFill>
-                <a:latin typeface="Calibri" pitchFamily="34" charset="0"/>
-                <a:ea typeface="Calibri" pitchFamily="34" charset="-122"/>
-                <a:cs typeface="Calibri" pitchFamily="34" charset="-120"/>
-              </a:rPr>
-              <a:t>Live drone and robot integration</a:t>
-            </a:r>
-            <a:endParaRPr lang="en-US" sz="1200" dirty="0"/>
-          </a:p>
-        </p:txBody>
-      </p:sp>
-      <p:sp>
-        <p:nvSpPr>
-          <p:cNvPr id="30" name="Text 28"/>
-          <p:cNvSpPr txBox="1"/>
-          <p:nvPr/>
-        </p:nvSpPr>
-        <p:spPr>
-          <a:xfrm>
-            <a:off x="685800" y="5486400"/>
-            <a:ext cx="10789920" cy="365760"/>
-          </a:xfrm>
-          <a:prstGeom prst="rect">
-            <a:avLst/>
-          </a:prstGeom>
-          <a:noFill/>
-          <a:ln/>
-        </p:spPr>
-        <p:txBody>
-          <a:bodyPr wrap="square" lIns="0" tIns="0" rIns="0" bIns="0" rtlCol="0" anchor="ctr"/>
-          <a:lstStyle/>
-          <a:p>
-            <a:pPr algn="ctr" indent="0" marL="0">
-              <a:buNone/>
-            </a:pPr>
-            <a:r>
-              <a:rPr lang="en-US" sz="1300" i="1" dirty="0">
-                <a:solidFill>
-                  <a:srgbClr val="9FB0CC"/>
-                </a:solidFill>
-                <a:latin typeface="Calibri" pitchFamily="34" charset="0"/>
-                <a:ea typeface="Calibri" pitchFamily="34" charset="-122"/>
-                <a:cs typeface="Calibri" pitchFamily="34" charset="-120"/>
-              </a:rPr>
-              <a:t>Predictive maintenance needs longitudinal data that does not exist yet. We are not going to pretend otherwise.</a:t>
-            </a:r>
-            <a:endParaRPr lang="en-US" sz="1300" dirty="0"/>
           </a:p>
         </p:txBody>
       </p:sp>
@@ -4572,6 +5045,955 @@
         </p:nvSpPr>
         <p:spPr>
           <a:xfrm>
+            <a:off x="-2011680" y="-2377440"/>
+            <a:ext cx="6858000" cy="6858000"/>
+          </a:xfrm>
+          <a:prstGeom prst="ellipse">
+            <a:avLst/>
+          </a:prstGeom>
+          <a:solidFill>
+            <a:srgbClr val="6366F1">
+              <a:alpha val="12000"/>
+            </a:srgbClr>
+          </a:solidFill>
+          <a:ln/>
+        </p:spPr>
+      </p:sp>
+      <p:sp>
+        <p:nvSpPr>
+          <p:cNvPr id="3" name="Shape 1"/>
+          <p:cNvSpPr/>
+          <p:nvPr/>
+        </p:nvSpPr>
+        <p:spPr>
+          <a:xfrm>
+            <a:off x="7955280" y="3017520"/>
+            <a:ext cx="6400800" cy="6400800"/>
+          </a:xfrm>
+          <a:prstGeom prst="ellipse">
+            <a:avLst/>
+          </a:prstGeom>
+          <a:solidFill>
+            <a:srgbClr val="22D3EE">
+              <a:alpha val="9000"/>
+            </a:srgbClr>
+          </a:solidFill>
+          <a:ln/>
+        </p:spPr>
+      </p:sp>
+      <p:sp>
+        <p:nvSpPr>
+          <p:cNvPr id="4" name="Text 2"/>
+          <p:cNvSpPr txBox="1"/>
+          <p:nvPr/>
+        </p:nvSpPr>
+        <p:spPr>
+          <a:xfrm>
+            <a:off x="685800" y="566928"/>
+            <a:ext cx="8229600" cy="274320"/>
+          </a:xfrm>
+          <a:prstGeom prst="rect">
+            <a:avLst/>
+          </a:prstGeom>
+          <a:noFill/>
+          <a:ln/>
+        </p:spPr>
+        <p:txBody>
+          <a:bodyPr wrap="square" lIns="0" tIns="0" rIns="0" bIns="0" rtlCol="0" anchor="ctr"/>
+          <a:lstStyle/>
+          <a:p>
+            <a:pPr indent="0" marL="0">
+              <a:buNone/>
+            </a:pPr>
+            <a:r>
+              <a:rPr lang="en-US" sz="1100" b="1" spc="240" kern="0" dirty="0">
+                <a:solidFill>
+                  <a:srgbClr val="22D3EE"/>
+                </a:solidFill>
+                <a:latin typeface="Calibri" pitchFamily="34" charset="0"/>
+                <a:ea typeface="Calibri" pitchFamily="34" charset="-122"/>
+                <a:cs typeface="Calibri" pitchFamily="34" charset="-120"/>
+              </a:rPr>
+              <a:t>WHAT COMES NEXT</a:t>
+            </a:r>
+            <a:endParaRPr lang="en-US" sz="1100" dirty="0"/>
+          </a:p>
+        </p:txBody>
+      </p:sp>
+      <p:sp>
+        <p:nvSpPr>
+          <p:cNvPr id="5" name="Text 3"/>
+          <p:cNvSpPr txBox="1"/>
+          <p:nvPr/>
+        </p:nvSpPr>
+        <p:spPr>
+          <a:xfrm>
+            <a:off x="685800" y="896112"/>
+            <a:ext cx="10789920" cy="868680"/>
+          </a:xfrm>
+          <a:prstGeom prst="rect">
+            <a:avLst/>
+          </a:prstGeom>
+          <a:noFill/>
+          <a:ln/>
+        </p:spPr>
+        <p:txBody>
+          <a:bodyPr wrap="square" lIns="0" tIns="0" rIns="0" bIns="0" rtlCol="0" anchor="ctr"/>
+          <a:lstStyle/>
+          <a:p>
+            <a:pPr indent="0" marL="0">
+              <a:buNone/>
+            </a:pPr>
+            <a:r>
+              <a:rPr lang="en-US" sz="3800" b="1" dirty="0">
+                <a:solidFill>
+                  <a:srgbClr val="E8EEF8"/>
+                </a:solidFill>
+                <a:latin typeface="Calibri" pitchFamily="34" charset="0"/>
+                <a:ea typeface="Calibri" pitchFamily="34" charset="-122"/>
+                <a:cs typeface="Calibri" pitchFamily="34" charset="-120"/>
+              </a:rPr>
+              <a:t>The honest roadmap.</a:t>
+            </a:r>
+            <a:endParaRPr lang="en-US" sz="3800" dirty="0"/>
+          </a:p>
+        </p:txBody>
+      </p:sp>
+      <p:sp>
+        <p:nvSpPr>
+          <p:cNvPr id="6" name="Shape 4"/>
+          <p:cNvSpPr/>
+          <p:nvPr/>
+        </p:nvSpPr>
+        <p:spPr>
+          <a:xfrm>
+            <a:off x="685800" y="2286000"/>
+            <a:ext cx="3337560" cy="2926080"/>
+          </a:xfrm>
+          <a:prstGeom prst="roundRect">
+            <a:avLst>
+              <a:gd name="adj" fmla="val 3750"/>
+            </a:avLst>
+          </a:prstGeom>
+          <a:solidFill>
+            <a:srgbClr val="111A2E">
+              <a:alpha val="82000"/>
+            </a:srgbClr>
+          </a:solidFill>
+          <a:ln w="12700">
+            <a:solidFill>
+              <a:srgbClr val="1E2B44"/>
+            </a:solidFill>
+            <a:prstDash val="solid"/>
+          </a:ln>
+          <a:effectLst>
+            <a:outerShdw sx="100000" sy="100000" kx="0" ky="0" algn="bl" rotWithShape="0" blurRad="177800" dist="38100" dir="5400000">
+              <a:srgbClr val="000000">
+                <a:alpha val="35000"/>
+              </a:srgbClr>
+            </a:outerShdw>
+          </a:effectLst>
+        </p:spPr>
+      </p:sp>
+      <p:sp>
+        <p:nvSpPr>
+          <p:cNvPr id="7" name="Text 5"/>
+          <p:cNvSpPr txBox="1"/>
+          <p:nvPr/>
+        </p:nvSpPr>
+        <p:spPr>
+          <a:xfrm>
+            <a:off x="960120" y="2505456"/>
+            <a:ext cx="2743200" cy="274320"/>
+          </a:xfrm>
+          <a:prstGeom prst="rect">
+            <a:avLst/>
+          </a:prstGeom>
+          <a:noFill/>
+          <a:ln/>
+        </p:spPr>
+        <p:txBody>
+          <a:bodyPr wrap="square" lIns="0" tIns="0" rIns="0" bIns="0" rtlCol="0" anchor="ctr"/>
+          <a:lstStyle/>
+          <a:p>
+            <a:pPr indent="0" marL="0">
+              <a:buNone/>
+            </a:pPr>
+            <a:r>
+              <a:rPr lang="en-US" sz="1150" b="1" spc="200" kern="0" dirty="0">
+                <a:solidFill>
+                  <a:srgbClr val="10B981"/>
+                </a:solidFill>
+                <a:latin typeface="Calibri" pitchFamily="34" charset="0"/>
+                <a:ea typeface="Calibri" pitchFamily="34" charset="-122"/>
+                <a:cs typeface="Calibri" pitchFamily="34" charset="-120"/>
+              </a:rPr>
+              <a:t>SHIPPED</a:t>
+            </a:r>
+            <a:endParaRPr lang="en-US" sz="1150" dirty="0"/>
+          </a:p>
+        </p:txBody>
+      </p:sp>
+      <p:sp>
+        <p:nvSpPr>
+          <p:cNvPr id="8" name="Shape 6"/>
+          <p:cNvSpPr/>
+          <p:nvPr/>
+        </p:nvSpPr>
+        <p:spPr>
+          <a:xfrm>
+            <a:off x="960120" y="2999232"/>
+            <a:ext cx="91440" cy="91440"/>
+          </a:xfrm>
+          <a:prstGeom prst="ellipse">
+            <a:avLst/>
+          </a:prstGeom>
+          <a:solidFill>
+            <a:srgbClr val="10B981"/>
+          </a:solidFill>
+          <a:ln/>
+        </p:spPr>
+      </p:sp>
+      <p:sp>
+        <p:nvSpPr>
+          <p:cNvPr id="9" name="Text 7"/>
+          <p:cNvSpPr txBox="1"/>
+          <p:nvPr/>
+        </p:nvSpPr>
+        <p:spPr>
+          <a:xfrm>
+            <a:off x="1179576" y="2926080"/>
+            <a:ext cx="2651760" cy="621792"/>
+          </a:xfrm>
+          <a:prstGeom prst="rect">
+            <a:avLst/>
+          </a:prstGeom>
+          <a:noFill/>
+          <a:ln/>
+        </p:spPr>
+        <p:txBody>
+          <a:bodyPr wrap="square" lIns="0" tIns="0" rIns="0" bIns="0" rtlCol="0" anchor="ctr"/>
+          <a:lstStyle/>
+          <a:p>
+            <a:pPr indent="0" marL="0">
+              <a:buNone/>
+            </a:pPr>
+            <a:r>
+              <a:rPr lang="en-US" sz="1200" dirty="0">
+                <a:solidFill>
+                  <a:srgbClr val="9FB0CC"/>
+                </a:solidFill>
+                <a:latin typeface="Calibri" pitchFamily="34" charset="0"/>
+                <a:ea typeface="Calibri" pitchFamily="34" charset="-122"/>
+                <a:cs typeface="Calibri" pitchFamily="34" charset="-120"/>
+              </a:rPr>
+              <a:t>Crack detection, measured on unseen data</a:t>
+            </a:r>
+            <a:endParaRPr lang="en-US" sz="1200" dirty="0"/>
+          </a:p>
+        </p:txBody>
+      </p:sp>
+      <p:sp>
+        <p:nvSpPr>
+          <p:cNvPr id="10" name="Shape 8"/>
+          <p:cNvSpPr/>
+          <p:nvPr/>
+        </p:nvSpPr>
+        <p:spPr>
+          <a:xfrm>
+            <a:off x="960120" y="3712464"/>
+            <a:ext cx="91440" cy="91440"/>
+          </a:xfrm>
+          <a:prstGeom prst="ellipse">
+            <a:avLst/>
+          </a:prstGeom>
+          <a:solidFill>
+            <a:srgbClr val="10B981"/>
+          </a:solidFill>
+          <a:ln/>
+        </p:spPr>
+      </p:sp>
+      <p:sp>
+        <p:nvSpPr>
+          <p:cNvPr id="11" name="Text 9"/>
+          <p:cNvSpPr txBox="1"/>
+          <p:nvPr/>
+        </p:nvSpPr>
+        <p:spPr>
+          <a:xfrm>
+            <a:off x="1179576" y="3639312"/>
+            <a:ext cx="2651760" cy="621792"/>
+          </a:xfrm>
+          <a:prstGeom prst="rect">
+            <a:avLst/>
+          </a:prstGeom>
+          <a:noFill/>
+          <a:ln/>
+        </p:spPr>
+        <p:txBody>
+          <a:bodyPr wrap="square" lIns="0" tIns="0" rIns="0" bIns="0" rtlCol="0" anchor="ctr"/>
+          <a:lstStyle/>
+          <a:p>
+            <a:pPr indent="0" marL="0">
+              <a:buNone/>
+            </a:pPr>
+            <a:r>
+              <a:rPr lang="en-US" sz="1200" dirty="0">
+                <a:solidFill>
+                  <a:srgbClr val="9FB0CC"/>
+                </a:solidFill>
+                <a:latin typeface="Calibri" pitchFamily="34" charset="0"/>
+                <a:ea typeface="Calibri" pitchFamily="34" charset="-122"/>
+                <a:cs typeface="Calibri" pitchFamily="34" charset="-120"/>
+              </a:rPr>
+              <a:t>Severity scoring and PDF reports</a:t>
+            </a:r>
+            <a:endParaRPr lang="en-US" sz="1200" dirty="0"/>
+          </a:p>
+        </p:txBody>
+      </p:sp>
+      <p:sp>
+        <p:nvSpPr>
+          <p:cNvPr id="12" name="Shape 10"/>
+          <p:cNvSpPr/>
+          <p:nvPr/>
+        </p:nvSpPr>
+        <p:spPr>
+          <a:xfrm>
+            <a:off x="960120" y="4425696"/>
+            <a:ext cx="91440" cy="91440"/>
+          </a:xfrm>
+          <a:prstGeom prst="ellipse">
+            <a:avLst/>
+          </a:prstGeom>
+          <a:solidFill>
+            <a:srgbClr val="10B981"/>
+          </a:solidFill>
+          <a:ln/>
+        </p:spPr>
+      </p:sp>
+      <p:sp>
+        <p:nvSpPr>
+          <p:cNvPr id="13" name="Text 11"/>
+          <p:cNvSpPr txBox="1"/>
+          <p:nvPr/>
+        </p:nvSpPr>
+        <p:spPr>
+          <a:xfrm>
+            <a:off x="1179576" y="4352544"/>
+            <a:ext cx="2651760" cy="621792"/>
+          </a:xfrm>
+          <a:prstGeom prst="rect">
+            <a:avLst/>
+          </a:prstGeom>
+          <a:noFill/>
+          <a:ln/>
+        </p:spPr>
+        <p:txBody>
+          <a:bodyPr wrap="square" lIns="0" tIns="0" rIns="0" bIns="0" rtlCol="0" anchor="ctr"/>
+          <a:lstStyle/>
+          <a:p>
+            <a:pPr indent="0" marL="0">
+              <a:buNone/>
+            </a:pPr>
+            <a:r>
+              <a:rPr lang="en-US" sz="1200" dirty="0">
+                <a:solidFill>
+                  <a:srgbClr val="9FB0CC"/>
+                </a:solidFill>
+                <a:latin typeface="Calibri" pitchFamily="34" charset="0"/>
+                <a:ea typeface="Calibri" pitchFamily="34" charset="-122"/>
+                <a:cs typeface="Calibri" pitchFamily="34" charset="-120"/>
+              </a:rPr>
+              <a:t>Dashboard, 3D viewer, auth, Docker</a:t>
+            </a:r>
+            <a:endParaRPr lang="en-US" sz="1200" dirty="0"/>
+          </a:p>
+        </p:txBody>
+      </p:sp>
+      <p:sp>
+        <p:nvSpPr>
+          <p:cNvPr id="14" name="Shape 12"/>
+          <p:cNvSpPr/>
+          <p:nvPr/>
+        </p:nvSpPr>
+        <p:spPr>
+          <a:xfrm>
+            <a:off x="4343400" y="2286000"/>
+            <a:ext cx="3337560" cy="2926080"/>
+          </a:xfrm>
+          <a:prstGeom prst="roundRect">
+            <a:avLst>
+              <a:gd name="adj" fmla="val 3750"/>
+            </a:avLst>
+          </a:prstGeom>
+          <a:solidFill>
+            <a:srgbClr val="111A2E">
+              <a:alpha val="82000"/>
+            </a:srgbClr>
+          </a:solidFill>
+          <a:ln w="12700">
+            <a:solidFill>
+              <a:srgbClr val="1E2B44"/>
+            </a:solidFill>
+            <a:prstDash val="solid"/>
+          </a:ln>
+          <a:effectLst>
+            <a:outerShdw sx="100000" sy="100000" kx="0" ky="0" algn="bl" rotWithShape="0" blurRad="177800" dist="38100" dir="5400000">
+              <a:srgbClr val="000000">
+                <a:alpha val="35000"/>
+              </a:srgbClr>
+            </a:outerShdw>
+          </a:effectLst>
+        </p:spPr>
+      </p:sp>
+      <p:sp>
+        <p:nvSpPr>
+          <p:cNvPr id="15" name="Text 13"/>
+          <p:cNvSpPr txBox="1"/>
+          <p:nvPr/>
+        </p:nvSpPr>
+        <p:spPr>
+          <a:xfrm>
+            <a:off x="4617720" y="2505456"/>
+            <a:ext cx="2743200" cy="274320"/>
+          </a:xfrm>
+          <a:prstGeom prst="rect">
+            <a:avLst/>
+          </a:prstGeom>
+          <a:noFill/>
+          <a:ln/>
+        </p:spPr>
+        <p:txBody>
+          <a:bodyPr wrap="square" lIns="0" tIns="0" rIns="0" bIns="0" rtlCol="0" anchor="ctr"/>
+          <a:lstStyle/>
+          <a:p>
+            <a:pPr indent="0" marL="0">
+              <a:buNone/>
+            </a:pPr>
+            <a:r>
+              <a:rPr lang="en-US" sz="1150" b="1" spc="200" kern="0" dirty="0">
+                <a:solidFill>
+                  <a:srgbClr val="22D3EE"/>
+                </a:solidFill>
+                <a:latin typeface="Calibri" pitchFamily="34" charset="0"/>
+                <a:ea typeface="Calibri" pitchFamily="34" charset="-122"/>
+                <a:cs typeface="Calibri" pitchFamily="34" charset="-120"/>
+              </a:rPr>
+              <a:t>NEXT</a:t>
+            </a:r>
+            <a:endParaRPr lang="en-US" sz="1150" dirty="0"/>
+          </a:p>
+        </p:txBody>
+      </p:sp>
+      <p:sp>
+        <p:nvSpPr>
+          <p:cNvPr id="16" name="Shape 14"/>
+          <p:cNvSpPr/>
+          <p:nvPr/>
+        </p:nvSpPr>
+        <p:spPr>
+          <a:xfrm>
+            <a:off x="4617720" y="2999232"/>
+            <a:ext cx="91440" cy="91440"/>
+          </a:xfrm>
+          <a:prstGeom prst="ellipse">
+            <a:avLst/>
+          </a:prstGeom>
+          <a:solidFill>
+            <a:srgbClr val="22D3EE"/>
+          </a:solidFill>
+          <a:ln/>
+        </p:spPr>
+      </p:sp>
+      <p:sp>
+        <p:nvSpPr>
+          <p:cNvPr id="17" name="Text 15"/>
+          <p:cNvSpPr txBox="1"/>
+          <p:nvPr/>
+        </p:nvSpPr>
+        <p:spPr>
+          <a:xfrm>
+            <a:off x="4837176" y="2926080"/>
+            <a:ext cx="2651760" cy="621792"/>
+          </a:xfrm>
+          <a:prstGeom prst="rect">
+            <a:avLst/>
+          </a:prstGeom>
+          <a:noFill/>
+          <a:ln/>
+        </p:spPr>
+        <p:txBody>
+          <a:bodyPr wrap="square" lIns="0" tIns="0" rIns="0" bIns="0" rtlCol="0" anchor="ctr"/>
+          <a:lstStyle/>
+          <a:p>
+            <a:pPr indent="0" marL="0">
+              <a:buNone/>
+            </a:pPr>
+            <a:r>
+              <a:rPr lang="en-US" sz="1200" dirty="0">
+                <a:solidFill>
+                  <a:srgbClr val="9FB0CC"/>
+                </a:solidFill>
+                <a:latin typeface="Calibri" pitchFamily="34" charset="0"/>
+                <a:ea typeface="Calibri" pitchFamily="34" charset="-122"/>
+                <a:cs typeface="Calibri" pitchFamily="34" charset="-120"/>
+              </a:rPr>
+              <a:t>Varied training data to close the 63/81 gap</a:t>
+            </a:r>
+            <a:endParaRPr lang="en-US" sz="1200" dirty="0"/>
+          </a:p>
+        </p:txBody>
+      </p:sp>
+      <p:sp>
+        <p:nvSpPr>
+          <p:cNvPr id="18" name="Shape 16"/>
+          <p:cNvSpPr/>
+          <p:nvPr/>
+        </p:nvSpPr>
+        <p:spPr>
+          <a:xfrm>
+            <a:off x="4617720" y="3712464"/>
+            <a:ext cx="91440" cy="91440"/>
+          </a:xfrm>
+          <a:prstGeom prst="ellipse">
+            <a:avLst/>
+          </a:prstGeom>
+          <a:solidFill>
+            <a:srgbClr val="22D3EE"/>
+          </a:solidFill>
+          <a:ln/>
+        </p:spPr>
+      </p:sp>
+      <p:sp>
+        <p:nvSpPr>
+          <p:cNvPr id="19" name="Text 17"/>
+          <p:cNvSpPr txBox="1"/>
+          <p:nvPr/>
+        </p:nvSpPr>
+        <p:spPr>
+          <a:xfrm>
+            <a:off x="4837176" y="3639312"/>
+            <a:ext cx="2651760" cy="621792"/>
+          </a:xfrm>
+          <a:prstGeom prst="rect">
+            <a:avLst/>
+          </a:prstGeom>
+          <a:noFill/>
+          <a:ln/>
+        </p:spPr>
+        <p:txBody>
+          <a:bodyPr wrap="square" lIns="0" tIns="0" rIns="0" bIns="0" rtlCol="0" anchor="ctr"/>
+          <a:lstStyle/>
+          <a:p>
+            <a:pPr indent="0" marL="0">
+              <a:buNone/>
+            </a:pPr>
+            <a:r>
+              <a:rPr lang="en-US" sz="1200" dirty="0">
+                <a:solidFill>
+                  <a:srgbClr val="9FB0CC"/>
+                </a:solidFill>
+                <a:latin typeface="Calibri" pitchFamily="34" charset="0"/>
+                <a:ea typeface="Calibri" pitchFamily="34" charset="-122"/>
+                <a:cs typeface="Calibri" pitchFamily="34" charset="-120"/>
+              </a:rPr>
+              <a:t>More defect classes — corrosion, spalling</a:t>
+            </a:r>
+            <a:endParaRPr lang="en-US" sz="1200" dirty="0"/>
+          </a:p>
+        </p:txBody>
+      </p:sp>
+      <p:sp>
+        <p:nvSpPr>
+          <p:cNvPr id="20" name="Shape 18"/>
+          <p:cNvSpPr/>
+          <p:nvPr/>
+        </p:nvSpPr>
+        <p:spPr>
+          <a:xfrm>
+            <a:off x="4617720" y="4425696"/>
+            <a:ext cx="91440" cy="91440"/>
+          </a:xfrm>
+          <a:prstGeom prst="ellipse">
+            <a:avLst/>
+          </a:prstGeom>
+          <a:solidFill>
+            <a:srgbClr val="22D3EE"/>
+          </a:solidFill>
+          <a:ln/>
+        </p:spPr>
+      </p:sp>
+      <p:sp>
+        <p:nvSpPr>
+          <p:cNvPr id="21" name="Text 19"/>
+          <p:cNvSpPr txBox="1"/>
+          <p:nvPr/>
+        </p:nvSpPr>
+        <p:spPr>
+          <a:xfrm>
+            <a:off x="4837176" y="4352544"/>
+            <a:ext cx="2651760" cy="621792"/>
+          </a:xfrm>
+          <a:prstGeom prst="rect">
+            <a:avLst/>
+          </a:prstGeom>
+          <a:noFill/>
+          <a:ln/>
+        </p:spPr>
+        <p:txBody>
+          <a:bodyPr wrap="square" lIns="0" tIns="0" rIns="0" bIns="0" rtlCol="0" anchor="ctr"/>
+          <a:lstStyle/>
+          <a:p>
+            <a:pPr indent="0" marL="0">
+              <a:buNone/>
+            </a:pPr>
+            <a:r>
+              <a:rPr lang="en-US" sz="1200" dirty="0">
+                <a:solidFill>
+                  <a:srgbClr val="9FB0CC"/>
+                </a:solidFill>
+                <a:latin typeface="Calibri" pitchFamily="34" charset="0"/>
+                <a:ea typeface="Calibri" pitchFamily="34" charset="-122"/>
+                <a:cs typeface="Calibri" pitchFamily="34" charset="-120"/>
+              </a:rPr>
+              <a:t>Cross-frame tracking so video counts are real</a:t>
+            </a:r>
+            <a:endParaRPr lang="en-US" sz="1200" dirty="0"/>
+          </a:p>
+        </p:txBody>
+      </p:sp>
+      <p:sp>
+        <p:nvSpPr>
+          <p:cNvPr id="22" name="Shape 20"/>
+          <p:cNvSpPr/>
+          <p:nvPr/>
+        </p:nvSpPr>
+        <p:spPr>
+          <a:xfrm>
+            <a:off x="8001000" y="2286000"/>
+            <a:ext cx="3337560" cy="2926080"/>
+          </a:xfrm>
+          <a:prstGeom prst="roundRect">
+            <a:avLst>
+              <a:gd name="adj" fmla="val 3750"/>
+            </a:avLst>
+          </a:prstGeom>
+          <a:solidFill>
+            <a:srgbClr val="111A2E">
+              <a:alpha val="82000"/>
+            </a:srgbClr>
+          </a:solidFill>
+          <a:ln w="12700">
+            <a:solidFill>
+              <a:srgbClr val="1E2B44"/>
+            </a:solidFill>
+            <a:prstDash val="solid"/>
+          </a:ln>
+          <a:effectLst>
+            <a:outerShdw sx="100000" sy="100000" kx="0" ky="0" algn="bl" rotWithShape="0" blurRad="177800" dist="38100" dir="5400000">
+              <a:srgbClr val="000000">
+                <a:alpha val="35000"/>
+              </a:srgbClr>
+            </a:outerShdw>
+          </a:effectLst>
+        </p:spPr>
+      </p:sp>
+      <p:sp>
+        <p:nvSpPr>
+          <p:cNvPr id="23" name="Text 21"/>
+          <p:cNvSpPr txBox="1"/>
+          <p:nvPr/>
+        </p:nvSpPr>
+        <p:spPr>
+          <a:xfrm>
+            <a:off x="8275320" y="2505456"/>
+            <a:ext cx="2743200" cy="274320"/>
+          </a:xfrm>
+          <a:prstGeom prst="rect">
+            <a:avLst/>
+          </a:prstGeom>
+          <a:noFill/>
+          <a:ln/>
+        </p:spPr>
+        <p:txBody>
+          <a:bodyPr wrap="square" lIns="0" tIns="0" rIns="0" bIns="0" rtlCol="0" anchor="ctr"/>
+          <a:lstStyle/>
+          <a:p>
+            <a:pPr indent="0" marL="0">
+              <a:buNone/>
+            </a:pPr>
+            <a:r>
+              <a:rPr lang="en-US" sz="1150" b="1" spc="200" kern="0" dirty="0">
+                <a:solidFill>
+                  <a:srgbClr val="64748B"/>
+                </a:solidFill>
+                <a:latin typeface="Calibri" pitchFamily="34" charset="0"/>
+                <a:ea typeface="Calibri" pitchFamily="34" charset="-122"/>
+                <a:cs typeface="Calibri" pitchFamily="34" charset="-120"/>
+              </a:rPr>
+              <a:t>LATER</a:t>
+            </a:r>
+            <a:endParaRPr lang="en-US" sz="1150" dirty="0"/>
+          </a:p>
+        </p:txBody>
+      </p:sp>
+      <p:sp>
+        <p:nvSpPr>
+          <p:cNvPr id="24" name="Shape 22"/>
+          <p:cNvSpPr/>
+          <p:nvPr/>
+        </p:nvSpPr>
+        <p:spPr>
+          <a:xfrm>
+            <a:off x="8275320" y="2999232"/>
+            <a:ext cx="91440" cy="91440"/>
+          </a:xfrm>
+          <a:prstGeom prst="ellipse">
+            <a:avLst/>
+          </a:prstGeom>
+          <a:solidFill>
+            <a:srgbClr val="64748B"/>
+          </a:solidFill>
+          <a:ln/>
+        </p:spPr>
+      </p:sp>
+      <p:sp>
+        <p:nvSpPr>
+          <p:cNvPr id="25" name="Text 23"/>
+          <p:cNvSpPr txBox="1"/>
+          <p:nvPr/>
+        </p:nvSpPr>
+        <p:spPr>
+          <a:xfrm>
+            <a:off x="8494776" y="2926080"/>
+            <a:ext cx="2651760" cy="621792"/>
+          </a:xfrm>
+          <a:prstGeom prst="rect">
+            <a:avLst/>
+          </a:prstGeom>
+          <a:noFill/>
+          <a:ln/>
+        </p:spPr>
+        <p:txBody>
+          <a:bodyPr wrap="square" lIns="0" tIns="0" rIns="0" bIns="0" rtlCol="0" anchor="ctr"/>
+          <a:lstStyle/>
+          <a:p>
+            <a:pPr indent="0" marL="0">
+              <a:buNone/>
+            </a:pPr>
+            <a:r>
+              <a:rPr lang="en-US" sz="1200" dirty="0">
+                <a:solidFill>
+                  <a:srgbClr val="9FB0CC"/>
+                </a:solidFill>
+                <a:latin typeface="Calibri" pitchFamily="34" charset="0"/>
+                <a:ea typeface="Calibri" pitchFamily="34" charset="-122"/>
+                <a:cs typeface="Calibri" pitchFamily="34" charset="-120"/>
+              </a:rPr>
+              <a:t>Photogrammetric twin from the imagery itself</a:t>
+            </a:r>
+            <a:endParaRPr lang="en-US" sz="1200" dirty="0"/>
+          </a:p>
+        </p:txBody>
+      </p:sp>
+      <p:sp>
+        <p:nvSpPr>
+          <p:cNvPr id="26" name="Shape 24"/>
+          <p:cNvSpPr/>
+          <p:nvPr/>
+        </p:nvSpPr>
+        <p:spPr>
+          <a:xfrm>
+            <a:off x="8275320" y="3712464"/>
+            <a:ext cx="91440" cy="91440"/>
+          </a:xfrm>
+          <a:prstGeom prst="ellipse">
+            <a:avLst/>
+          </a:prstGeom>
+          <a:solidFill>
+            <a:srgbClr val="64748B"/>
+          </a:solidFill>
+          <a:ln/>
+        </p:spPr>
+      </p:sp>
+      <p:sp>
+        <p:nvSpPr>
+          <p:cNvPr id="27" name="Text 25"/>
+          <p:cNvSpPr txBox="1"/>
+          <p:nvPr/>
+        </p:nvSpPr>
+        <p:spPr>
+          <a:xfrm>
+            <a:off x="8494776" y="3639312"/>
+            <a:ext cx="2651760" cy="621792"/>
+          </a:xfrm>
+          <a:prstGeom prst="rect">
+            <a:avLst/>
+          </a:prstGeom>
+          <a:noFill/>
+          <a:ln/>
+        </p:spPr>
+        <p:txBody>
+          <a:bodyPr wrap="square" lIns="0" tIns="0" rIns="0" bIns="0" rtlCol="0" anchor="ctr"/>
+          <a:lstStyle/>
+          <a:p>
+            <a:pPr indent="0" marL="0">
+              <a:buNone/>
+            </a:pPr>
+            <a:r>
+              <a:rPr lang="en-US" sz="1200" dirty="0">
+                <a:solidFill>
+                  <a:srgbClr val="9FB0CC"/>
+                </a:solidFill>
+                <a:latin typeface="Calibri" pitchFamily="34" charset="0"/>
+                <a:ea typeface="Calibri" pitchFamily="34" charset="-122"/>
+                <a:cs typeface="Calibri" pitchFamily="34" charset="-120"/>
+              </a:rPr>
+              <a:t>Predictive maintenance once trend data exists</a:t>
+            </a:r>
+            <a:endParaRPr lang="en-US" sz="1200" dirty="0"/>
+          </a:p>
+        </p:txBody>
+      </p:sp>
+      <p:sp>
+        <p:nvSpPr>
+          <p:cNvPr id="28" name="Shape 26"/>
+          <p:cNvSpPr/>
+          <p:nvPr/>
+        </p:nvSpPr>
+        <p:spPr>
+          <a:xfrm>
+            <a:off x="8275320" y="4425696"/>
+            <a:ext cx="91440" cy="91440"/>
+          </a:xfrm>
+          <a:prstGeom prst="ellipse">
+            <a:avLst/>
+          </a:prstGeom>
+          <a:solidFill>
+            <a:srgbClr val="64748B"/>
+          </a:solidFill>
+          <a:ln/>
+        </p:spPr>
+      </p:sp>
+      <p:sp>
+        <p:nvSpPr>
+          <p:cNvPr id="29" name="Text 27"/>
+          <p:cNvSpPr txBox="1"/>
+          <p:nvPr/>
+        </p:nvSpPr>
+        <p:spPr>
+          <a:xfrm>
+            <a:off x="8494776" y="4352544"/>
+            <a:ext cx="2651760" cy="621792"/>
+          </a:xfrm>
+          <a:prstGeom prst="rect">
+            <a:avLst/>
+          </a:prstGeom>
+          <a:noFill/>
+          <a:ln/>
+        </p:spPr>
+        <p:txBody>
+          <a:bodyPr wrap="square" lIns="0" tIns="0" rIns="0" bIns="0" rtlCol="0" anchor="ctr"/>
+          <a:lstStyle/>
+          <a:p>
+            <a:pPr indent="0" marL="0">
+              <a:buNone/>
+            </a:pPr>
+            <a:r>
+              <a:rPr lang="en-US" sz="1200" dirty="0">
+                <a:solidFill>
+                  <a:srgbClr val="9FB0CC"/>
+                </a:solidFill>
+                <a:latin typeface="Calibri" pitchFamily="34" charset="0"/>
+                <a:ea typeface="Calibri" pitchFamily="34" charset="-122"/>
+                <a:cs typeface="Calibri" pitchFamily="34" charset="-120"/>
+              </a:rPr>
+              <a:t>Live drone and robot integration</a:t>
+            </a:r>
+            <a:endParaRPr lang="en-US" sz="1200" dirty="0"/>
+          </a:p>
+        </p:txBody>
+      </p:sp>
+      <p:sp>
+        <p:nvSpPr>
+          <p:cNvPr id="30" name="Text 28"/>
+          <p:cNvSpPr txBox="1"/>
+          <p:nvPr/>
+        </p:nvSpPr>
+        <p:spPr>
+          <a:xfrm>
+            <a:off x="685800" y="5486400"/>
+            <a:ext cx="10789920" cy="365760"/>
+          </a:xfrm>
+          <a:prstGeom prst="rect">
+            <a:avLst/>
+          </a:prstGeom>
+          <a:noFill/>
+          <a:ln/>
+        </p:spPr>
+        <p:txBody>
+          <a:bodyPr wrap="square" lIns="0" tIns="0" rIns="0" bIns="0" rtlCol="0" anchor="ctr"/>
+          <a:lstStyle/>
+          <a:p>
+            <a:pPr algn="ctr" indent="0" marL="0">
+              <a:buNone/>
+            </a:pPr>
+            <a:r>
+              <a:rPr lang="en-US" sz="1300" i="1" dirty="0">
+                <a:solidFill>
+                  <a:srgbClr val="9FB0CC"/>
+                </a:solidFill>
+                <a:latin typeface="Calibri" pitchFamily="34" charset="0"/>
+                <a:ea typeface="Calibri" pitchFamily="34" charset="-122"/>
+                <a:cs typeface="Calibri" pitchFamily="34" charset="-120"/>
+              </a:rPr>
+              <a:t>Predictive maintenance needs longitudinal data that does not exist yet. We are not going to pretend otherwise.</a:t>
+            </a:r>
+            <a:endParaRPr lang="en-US" sz="1300" dirty="0"/>
+          </a:p>
+        </p:txBody>
+      </p:sp>
+    </p:spTree>
+  </p:cSld>
+  <p:clrMapOvr>
+    <a:masterClrMapping/>
+  </p:clrMapOvr>
+</p:sld>
+</file>
+
+<file path=ppt/slides/slide13.xml><?xml version="1.0" encoding="utf-8"?>
+<p:sld xmlns:a="http://schemas.openxmlformats.org/drawingml/2006/main" xmlns:r="http://schemas.openxmlformats.org/officeDocument/2006/relationships" xmlns:p="http://schemas.openxmlformats.org/presentationml/2006/main">
+  <p:cSld name="Slide 13">
+    <p:bg>
+      <p:bgPr>
+        <a:solidFill>
+          <a:srgbClr val="070B14"/>
+        </a:solidFill>
+      </p:bgPr>
+    </p:bg>
+    <p:spTree>
+      <p:nvGrpSpPr>
+        <p:cNvPr id="1" name=""/>
+        <p:cNvGrpSpPr/>
+        <p:nvPr/>
+      </p:nvGrpSpPr>
+      <p:grpSpPr>
+        <a:xfrm>
+          <a:off x="0" y="0"/>
+          <a:ext cx="0" cy="0"/>
+          <a:chOff x="0" y="0"/>
+          <a:chExt cx="0" cy="0"/>
+        </a:xfrm>
+      </p:grpSpPr>
+      <p:sp>
+        <p:nvSpPr>
+          <p:cNvPr id="2" name="Shape 0"/>
+          <p:cNvSpPr/>
+          <p:nvPr/>
+        </p:nvSpPr>
+        <p:spPr>
+          <a:xfrm>
             <a:off x="1508760" y="-2011680"/>
             <a:ext cx="9144000" cy="9144000"/>
           </a:xfrm>
@@ -6656,7 +8078,7 @@
                 <a:ea typeface="Calibri" pitchFamily="34" charset="-122"/>
                 <a:cs typeface="Calibri" pitchFamily="34" charset="-120"/>
               </a:rPr>
-              <a:t>101</a:t>
+              <a:t>104</a:t>
             </a:r>
             <a:endParaRPr lang="en-US" sz="4000" dirty="0"/>
           </a:p>
@@ -8645,6 +10067,35 @@
             </a:r>
             <a:endParaRPr lang="en-US" sz="1200" dirty="0"/>
           </a:p>
+          <a:p>
+            <a:pPr indent="0" marL="0">
+              <a:lnSpc>
+                <a:spcPct val="112000"/>
+              </a:lnSpc>
+              <a:buNone/>
+            </a:pPr>
+            <a:endParaRPr lang="en-US" sz="1200" dirty="0"/>
+          </a:p>
+          <a:p>
+            <a:pPr indent="0" marL="0">
+              <a:lnSpc>
+                <a:spcPct val="112000"/>
+              </a:lnSpc>
+              <a:buNone/>
+            </a:pPr>
+            <a:r>
+              <a:rPr lang="en-US" sz="1200" dirty="0">
+                <a:solidFill>
+                  <a:srgbClr val="9FB0CC"/>
+                </a:solidFill>
+                <a:latin typeface="Calibri" pitchFamily="34" charset="0"/>
+                <a:ea typeface="Calibri" pitchFamily="34" charset="-122"/>
+                <a:cs typeface="Calibri" pitchFamily="34" charset="-120"/>
+              </a:rPr>
+              <a:t>Then we asked the harder question: does it hold up on imagery from somewhere else?</a:t>
+            </a:r>
+            <a:endParaRPr lang="en-US" sz="1200" dirty="0"/>
+          </a:p>
         </p:txBody>
       </p:sp>
     </p:spTree>
@@ -8756,7 +10207,7 @@
                 <a:ea typeface="Calibri" pitchFamily="34" charset="-122"/>
                 <a:cs typeface="Calibri" pitchFamily="34" charset="-120"/>
               </a:rPr>
-              <a:t>VISUALISATION</a:t>
+              <a:t>THE NUMBER MOST TEAMS NEVER CHECK</a:t>
             </a:r>
             <a:endParaRPr lang="en-US" sz="1100" dirty="0"/>
           </a:p>
@@ -8771,23 +10222,23 @@
         <p:spPr>
           <a:xfrm>
             <a:off x="685800" y="896112"/>
-            <a:ext cx="10789920" cy="868680"/>
-          </a:xfrm>
-          <a:prstGeom prst="rect">
-            <a:avLst/>
-          </a:prstGeom>
-          <a:noFill/>
-          <a:ln/>
-        </p:spPr>
-        <p:txBody>
-          <a:bodyPr wrap="square" lIns="0" tIns="0" rIns="0" bIns="0" rtlCol="0" anchor="ctr"/>
-          <a:lstStyle/>
-          <a:p>
-            <a:pPr indent="0" marL="0">
-              <a:buNone/>
-            </a:pPr>
-            <a:r>
-              <a:rPr lang="en-US" sz="3800" b="1" dirty="0">
+            <a:ext cx="10789920" cy="1371600"/>
+          </a:xfrm>
+          <a:prstGeom prst="rect">
+            <a:avLst/>
+          </a:prstGeom>
+          <a:noFill/>
+          <a:ln/>
+        </p:spPr>
+        <p:txBody>
+          <a:bodyPr wrap="square" lIns="0" tIns="0" rIns="0" bIns="0" rtlCol="0" anchor="ctr"/>
+          <a:lstStyle/>
+          <a:p>
+            <a:pPr indent="0" marL="0">
+              <a:buNone/>
+            </a:pPr>
+            <a:r>
+              <a:rPr lang="en-US" sz="3200" b="1" dirty="0">
                 <a:solidFill>
                   <a:srgbClr val="E8EEF8"/>
                 </a:solidFill>
@@ -8795,26 +10246,101 @@
                 <a:ea typeface="Calibri" pitchFamily="34" charset="-122"/>
                 <a:cs typeface="Calibri" pitchFamily="34" charset="-120"/>
               </a:rPr>
-              <a:t>From a photograph to a structure you can orbit.</a:t>
-            </a:r>
-            <a:endParaRPr lang="en-US" sz="3800" dirty="0"/>
-          </a:p>
-        </p:txBody>
-      </p:sp>
-      <p:sp>
-        <p:nvSpPr>
-          <p:cNvPr id="6" name="Shape 4"/>
+              <a:t>Then we tested it on a dataset</a:t>
+            </a:r>
+            <a:endParaRPr lang="en-US" sz="3200" dirty="0"/>
+          </a:p>
+          <a:p>
+            <a:pPr indent="0" marL="0">
+              <a:buNone/>
+            </a:pPr>
+            <a:r>
+              <a:rPr lang="en-US" sz="3200" b="1" dirty="0">
+                <a:solidFill>
+                  <a:srgbClr val="E8EEF8"/>
+                </a:solidFill>
+                <a:latin typeface="Calibri" pitchFamily="34" charset="0"/>
+                <a:ea typeface="Calibri" pitchFamily="34" charset="-122"/>
+                <a:cs typeface="Calibri" pitchFamily="34" charset="-120"/>
+              </a:rPr>
+              <a:t>it had never seen.</a:t>
+            </a:r>
+            <a:endParaRPr lang="en-US" sz="3200" dirty="0"/>
+          </a:p>
+        </p:txBody>
+      </p:sp>
+      <p:sp>
+        <p:nvSpPr>
+          <p:cNvPr id="6" name="Text 4"/>
+          <p:cNvSpPr txBox="1"/>
+          <p:nvPr/>
+        </p:nvSpPr>
+        <p:spPr>
+          <a:xfrm>
+            <a:off x="685800" y="2121408"/>
+            <a:ext cx="10607040" cy="731520"/>
+          </a:xfrm>
+          <a:prstGeom prst="rect">
+            <a:avLst/>
+          </a:prstGeom>
+          <a:noFill/>
+          <a:ln/>
+        </p:spPr>
+        <p:txBody>
+          <a:bodyPr wrap="square" lIns="0" tIns="0" rIns="0" bIns="0" rtlCol="0" anchor="ctr"/>
+          <a:lstStyle/>
+          <a:p>
+            <a:pPr indent="0" marL="0">
+              <a:lnSpc>
+                <a:spcPct val="110000"/>
+              </a:lnSpc>
+              <a:buNone/>
+            </a:pPr>
+            <a:r>
+              <a:rPr lang="en-US" sz="1350" dirty="0">
+                <a:solidFill>
+                  <a:srgbClr val="9FB0CC"/>
+                </a:solidFill>
+                <a:latin typeface="Calibri" pitchFamily="34" charset="0"/>
+                <a:ea typeface="Calibri" pitchFamily="34" charset="-122"/>
+                <a:cs typeface="Calibri" pitchFamily="34" charset="-120"/>
+              </a:rPr>
+              <a:t>Every accuracy figure above came from our own dataset's held-out split — different photographs, but the same cameras and the same walls. So we ran it against crack-bphdr, a public benchmark from an unrelated source that contributed nothing to training.</a:t>
+            </a:r>
+            <a:endParaRPr lang="en-US" sz="1350" dirty="0"/>
+          </a:p>
+        </p:txBody>
+      </p:sp>
+      <p:graphicFrame>
+        <p:nvGraphicFramePr>
+          <p:cNvPr id="7" name="Chart 0" descr=""/>
+          <p:cNvGraphicFramePr/>
+          <p:nvPr/>
+        </p:nvGraphicFramePr>
+        <p:xfrm>
+          <a:off x="685800" y="3017520"/>
+          <a:ext cx="6583680" cy="2514600"/>
+        </p:xfrm>
+        <a:graphic xmlns:a="http://schemas.openxmlformats.org/drawingml/2006/main">
+          <a:graphicData uri="http://schemas.openxmlformats.org/drawingml/2006/chart">
+            <c:chart xmlns:c="http://schemas.openxmlformats.org/drawingml/2006/chart" r:id="rId1"/>
+          </a:graphicData>
+        </a:graphic>
+      </p:graphicFrame>
+      <p:sp>
+        <p:nvSpPr>
+          <p:cNvPr id="8" name="Shape 5"/>
           <p:cNvSpPr/>
           <p:nvPr/>
         </p:nvSpPr>
         <p:spPr>
           <a:xfrm>
-            <a:off x="685800" y="2286000"/>
-            <a:ext cx="5257800" cy="3200400"/>
+            <a:off x="7589520" y="3017520"/>
+            <a:ext cx="3886200" cy="2514600"/>
           </a:xfrm>
           <a:prstGeom prst="roundRect">
             <a:avLst>
-              <a:gd name="adj" fmla="val 3429"/>
+              <a:gd name="adj" fmla="val 4364"/>
             </a:avLst>
           </a:prstGeom>
           <a:solidFill>
@@ -8839,30 +10365,30 @@
       </p:sp>
       <p:sp>
         <p:nvSpPr>
-          <p:cNvPr id="7" name="Text 5"/>
-          <p:cNvSpPr txBox="1"/>
-          <p:nvPr/>
-        </p:nvSpPr>
-        <p:spPr>
-          <a:xfrm>
-            <a:off x="1051560" y="2542032"/>
-            <a:ext cx="4480560" cy="320040"/>
-          </a:xfrm>
-          <a:prstGeom prst="rect">
-            <a:avLst/>
-          </a:prstGeom>
-          <a:noFill/>
-          <a:ln/>
-        </p:spPr>
-        <p:txBody>
-          <a:bodyPr wrap="square" lIns="0" tIns="0" rIns="0" bIns="0" rtlCol="0" anchor="ctr"/>
-          <a:lstStyle/>
-          <a:p>
-            <a:pPr indent="0" marL="0">
-              <a:buNone/>
-            </a:pPr>
-            <a:r>
-              <a:rPr lang="en-US" sz="1600" b="1" dirty="0">
+          <p:cNvPr id="9" name="Text 6"/>
+          <p:cNvSpPr txBox="1"/>
+          <p:nvPr/>
+        </p:nvSpPr>
+        <p:spPr>
+          <a:xfrm>
+            <a:off x="7909560" y="3218688"/>
+            <a:ext cx="3291840" cy="292608"/>
+          </a:xfrm>
+          <a:prstGeom prst="rect">
+            <a:avLst/>
+          </a:prstGeom>
+          <a:noFill/>
+          <a:ln/>
+        </p:spPr>
+        <p:txBody>
+          <a:bodyPr wrap="square" lIns="0" tIns="0" rIns="0" bIns="0" rtlCol="0" anchor="ctr"/>
+          <a:lstStyle/>
+          <a:p>
+            <a:pPr indent="0" marL="0">
+              <a:buNone/>
+            </a:pPr>
+            <a:r>
+              <a:rPr lang="en-US" sz="1500" b="1" dirty="0">
                 <a:solidFill>
                   <a:srgbClr val="E8EEF8"/>
                 </a:solidFill>
@@ -8870,58 +10396,41 @@
                 <a:ea typeface="Calibri" pitchFamily="34" charset="-122"/>
                 <a:cs typeface="Calibri" pitchFamily="34" charset="-120"/>
               </a:rPr>
-              <a:t>On the image</a:t>
-            </a:r>
-            <a:endParaRPr lang="en-US" sz="1600" dirty="0"/>
-          </a:p>
-        </p:txBody>
-      </p:sp>
-      <p:sp>
-        <p:nvSpPr>
-          <p:cNvPr id="8" name="Shape 6"/>
-          <p:cNvSpPr/>
-          <p:nvPr/>
-        </p:nvSpPr>
-        <p:spPr>
-          <a:xfrm>
-            <a:off x="1051560" y="3072384"/>
-            <a:ext cx="91440" cy="91440"/>
-          </a:xfrm>
-          <a:prstGeom prst="ellipse">
-            <a:avLst/>
-          </a:prstGeom>
-          <a:solidFill>
-            <a:srgbClr val="22D3EE"/>
-          </a:solidFill>
-          <a:ln/>
-        </p:spPr>
-      </p:sp>
-      <p:sp>
-        <p:nvSpPr>
-          <p:cNvPr id="9" name="Text 7"/>
-          <p:cNvSpPr txBox="1"/>
-          <p:nvPr/>
-        </p:nvSpPr>
-        <p:spPr>
-          <a:xfrm>
-            <a:off x="1271016" y="2999232"/>
-            <a:ext cx="4297680" cy="365760"/>
-          </a:xfrm>
-          <a:prstGeom prst="rect">
-            <a:avLst/>
-          </a:prstGeom>
-          <a:noFill/>
-          <a:ln/>
-        </p:spPr>
-        <p:txBody>
-          <a:bodyPr wrap="square" lIns="0" tIns="0" rIns="0" bIns="0" rtlCol="0" anchor="ctr"/>
-          <a:lstStyle/>
-          <a:p>
-            <a:pPr indent="0" marL="0">
-              <a:buNone/>
-            </a:pPr>
-            <a:r>
-              <a:rPr lang="en-US" sz="1250" dirty="0">
+              <a:t>What this means</a:t>
+            </a:r>
+            <a:endParaRPr lang="en-US" sz="1500" dirty="0"/>
+          </a:p>
+        </p:txBody>
+      </p:sp>
+      <p:sp>
+        <p:nvSpPr>
+          <p:cNvPr id="10" name="Text 7"/>
+          <p:cNvSpPr txBox="1"/>
+          <p:nvPr/>
+        </p:nvSpPr>
+        <p:spPr>
+          <a:xfrm>
+            <a:off x="7909560" y="3611880"/>
+            <a:ext cx="3291840" cy="1828800"/>
+          </a:xfrm>
+          <a:prstGeom prst="rect">
+            <a:avLst/>
+          </a:prstGeom>
+          <a:noFill/>
+          <a:ln/>
+        </p:spPr>
+        <p:txBody>
+          <a:bodyPr wrap="square" lIns="0" tIns="0" rIns="0" bIns="0" rtlCol="0" anchor="ctr"/>
+          <a:lstStyle/>
+          <a:p>
+            <a:pPr indent="0" marL="0">
+              <a:lnSpc>
+                <a:spcPct val="112000"/>
+              </a:lnSpc>
+              <a:buNone/>
+            </a:pPr>
+            <a:r>
+              <a:rPr lang="en-US" sz="1150" dirty="0">
                 <a:solidFill>
                   <a:srgbClr val="9FB0CC"/>
                 </a:solidFill>
@@ -8929,58 +10438,28 @@
                 <a:ea typeface="Calibri" pitchFamily="34" charset="-122"/>
                 <a:cs typeface="Calibri" pitchFamily="34" charset="-120"/>
               </a:rPr>
-              <a:t>Bounding boxes drawn over each detection</a:t>
-            </a:r>
-            <a:endParaRPr lang="en-US" sz="1250" dirty="0"/>
-          </a:p>
-        </p:txBody>
-      </p:sp>
-      <p:sp>
-        <p:nvSpPr>
-          <p:cNvPr id="10" name="Shape 8"/>
-          <p:cNvSpPr/>
-          <p:nvPr/>
-        </p:nvSpPr>
-        <p:spPr>
-          <a:xfrm>
-            <a:off x="1051560" y="3575304"/>
-            <a:ext cx="91440" cy="91440"/>
-          </a:xfrm>
-          <a:prstGeom prst="ellipse">
-            <a:avLst/>
-          </a:prstGeom>
-          <a:solidFill>
-            <a:srgbClr val="22D3EE"/>
-          </a:solidFill>
-          <a:ln/>
-        </p:spPr>
-      </p:sp>
-      <p:sp>
-        <p:nvSpPr>
-          <p:cNvPr id="11" name="Text 9"/>
-          <p:cNvSpPr txBox="1"/>
-          <p:nvPr/>
-        </p:nvSpPr>
-        <p:spPr>
-          <a:xfrm>
-            <a:off x="1271016" y="3502152"/>
-            <a:ext cx="4297680" cy="365760"/>
-          </a:xfrm>
-          <a:prstGeom prst="rect">
-            <a:avLst/>
-          </a:prstGeom>
-          <a:noFill/>
-          <a:ln/>
-        </p:spPr>
-        <p:txBody>
-          <a:bodyPr wrap="square" lIns="0" tIns="0" rIns="0" bIns="0" rtlCol="0" anchor="ctr"/>
-          <a:lstStyle/>
-          <a:p>
-            <a:pPr indent="0" marL="0">
-              <a:buNone/>
-            </a:pPr>
-            <a:r>
-              <a:rPr lang="en-US" sz="1250" dirty="0">
+              <a:t>On unfamiliar imagery it finds roughly 3 cracks in 5, not 4 in 5. The false-alarm rate does not move — only recall does.</a:t>
+            </a:r>
+            <a:endParaRPr lang="en-US" sz="1150" dirty="0"/>
+          </a:p>
+          <a:p>
+            <a:pPr indent="0" marL="0">
+              <a:lnSpc>
+                <a:spcPct val="112000"/>
+              </a:lnSpc>
+              <a:buNone/>
+            </a:pPr>
+            <a:endParaRPr lang="en-US" sz="1150" dirty="0"/>
+          </a:p>
+          <a:p>
+            <a:pPr indent="0" marL="0">
+              <a:lnSpc>
+                <a:spcPct val="112000"/>
+              </a:lnSpc>
+              <a:buNone/>
+            </a:pPr>
+            <a:r>
+              <a:rPr lang="en-US" sz="1150" dirty="0">
                 <a:solidFill>
                   <a:srgbClr val="9FB0CC"/>
                 </a:solidFill>
@@ -8988,451 +10467,22 @@
                 <a:ea typeface="Calibri" pitchFamily="34" charset="-122"/>
                 <a:cs typeface="Calibri" pitchFamily="34" charset="-120"/>
               </a:rPr>
-              <a:t>Colour and size both carry severity</a:t>
-            </a:r>
-            <a:endParaRPr lang="en-US" sz="1250" dirty="0"/>
-          </a:p>
-        </p:txBody>
-      </p:sp>
-      <p:sp>
-        <p:nvSpPr>
-          <p:cNvPr id="12" name="Shape 10"/>
-          <p:cNvSpPr/>
-          <p:nvPr/>
-        </p:nvSpPr>
-        <p:spPr>
-          <a:xfrm>
-            <a:off x="1051560" y="4078224"/>
-            <a:ext cx="91440" cy="91440"/>
-          </a:xfrm>
-          <a:prstGeom prst="ellipse">
-            <a:avLst/>
-          </a:prstGeom>
-          <a:solidFill>
-            <a:srgbClr val="22D3EE"/>
-          </a:solidFill>
-          <a:ln/>
-        </p:spPr>
-      </p:sp>
-      <p:sp>
-        <p:nvSpPr>
-          <p:cNvPr id="13" name="Text 11"/>
-          <p:cNvSpPr txBox="1"/>
-          <p:nvPr/>
-        </p:nvSpPr>
-        <p:spPr>
-          <a:xfrm>
-            <a:off x="1271016" y="4005072"/>
-            <a:ext cx="4297680" cy="365760"/>
-          </a:xfrm>
-          <a:prstGeom prst="rect">
-            <a:avLst/>
-          </a:prstGeom>
-          <a:noFill/>
-          <a:ln/>
-        </p:spPr>
-        <p:txBody>
-          <a:bodyPr wrap="square" lIns="0" tIns="0" rIns="0" bIns="0" rtlCol="0" anchor="ctr"/>
-          <a:lstStyle/>
-          <a:p>
-            <a:pPr indent="0" marL="0">
-              <a:buNone/>
-            </a:pPr>
-            <a:r>
-              <a:rPr lang="en-US" sz="1250" dirty="0">
-                <a:solidFill>
-                  <a:srgbClr val="9FB0CC"/>
-                </a:solidFill>
-                <a:latin typeface="Calibri" pitchFamily="34" charset="0"/>
-                <a:ea typeface="Calibri" pitchFamily="34" charset="-122"/>
-                <a:cs typeface="Calibri" pitchFamily="34" charset="-120"/>
-              </a:rPr>
-              <a:t>Hover a finding to see its arithmetic</a:t>
-            </a:r>
-            <a:endParaRPr lang="en-US" sz="1250" dirty="0"/>
-          </a:p>
-        </p:txBody>
-      </p:sp>
-      <p:sp>
-        <p:nvSpPr>
-          <p:cNvPr id="14" name="Shape 12"/>
-          <p:cNvSpPr/>
-          <p:nvPr/>
-        </p:nvSpPr>
-        <p:spPr>
-          <a:xfrm>
-            <a:off x="1051560" y="4581144"/>
-            <a:ext cx="91440" cy="91440"/>
-          </a:xfrm>
-          <a:prstGeom prst="ellipse">
-            <a:avLst/>
-          </a:prstGeom>
-          <a:solidFill>
-            <a:srgbClr val="22D3EE"/>
-          </a:solidFill>
-          <a:ln/>
-        </p:spPr>
-      </p:sp>
-      <p:sp>
-        <p:nvSpPr>
-          <p:cNvPr id="15" name="Text 13"/>
-          <p:cNvSpPr txBox="1"/>
-          <p:nvPr/>
-        </p:nvSpPr>
-        <p:spPr>
-          <a:xfrm>
-            <a:off x="1271016" y="4507992"/>
-            <a:ext cx="4297680" cy="365760"/>
-          </a:xfrm>
-          <a:prstGeom prst="rect">
-            <a:avLst/>
-          </a:prstGeom>
-          <a:noFill/>
-          <a:ln/>
-        </p:spPr>
-        <p:txBody>
-          <a:bodyPr wrap="square" lIns="0" tIns="0" rIns="0" bIns="0" rtlCol="0" anchor="ctr"/>
-          <a:lstStyle/>
-          <a:p>
-            <a:pPr indent="0" marL="0">
-              <a:buNone/>
-            </a:pPr>
-            <a:r>
-              <a:rPr lang="en-US" sz="1250" dirty="0">
-                <a:solidFill>
-                  <a:srgbClr val="9FB0CC"/>
-                </a:solidFill>
-                <a:latin typeface="Calibri" pitchFamily="34" charset="0"/>
-                <a:ea typeface="Calibri" pitchFamily="34" charset="-122"/>
-                <a:cs typeface="Calibri" pitchFamily="34" charset="-120"/>
-              </a:rPr>
-              <a:t>Boxes stored normalised, so they align at any zoom</a:t>
-            </a:r>
-            <a:endParaRPr lang="en-US" sz="1250" dirty="0"/>
-          </a:p>
-        </p:txBody>
-      </p:sp>
-      <p:sp>
-        <p:nvSpPr>
-          <p:cNvPr id="16" name="Shape 14"/>
-          <p:cNvSpPr/>
-          <p:nvPr/>
-        </p:nvSpPr>
-        <p:spPr>
-          <a:xfrm>
-            <a:off x="6263640" y="2286000"/>
-            <a:ext cx="5212080" cy="3200400"/>
-          </a:xfrm>
-          <a:prstGeom prst="roundRect">
-            <a:avLst>
-              <a:gd name="adj" fmla="val 3429"/>
-            </a:avLst>
-          </a:prstGeom>
-          <a:solidFill>
-            <a:srgbClr val="111A2E">
-              <a:alpha val="82000"/>
-            </a:srgbClr>
-          </a:solidFill>
-          <a:ln w="12700">
-            <a:solidFill>
-              <a:srgbClr val="1E2B44"/>
-            </a:solidFill>
-            <a:prstDash val="solid"/>
-          </a:ln>
-          <a:effectLst>
-            <a:outerShdw sx="100000" sy="100000" kx="0" ky="0" algn="bl" rotWithShape="0" blurRad="177800" dist="38100" dir="5400000">
-              <a:srgbClr val="000000">
-                <a:alpha val="35000"/>
-              </a:srgbClr>
-            </a:outerShdw>
-          </a:effectLst>
-        </p:spPr>
-      </p:sp>
-      <p:sp>
-        <p:nvSpPr>
-          <p:cNvPr id="17" name="Text 15"/>
-          <p:cNvSpPr txBox="1"/>
-          <p:nvPr/>
-        </p:nvSpPr>
-        <p:spPr>
-          <a:xfrm>
-            <a:off x="6629400" y="2542032"/>
-            <a:ext cx="4480560" cy="320040"/>
-          </a:xfrm>
-          <a:prstGeom prst="rect">
-            <a:avLst/>
-          </a:prstGeom>
-          <a:noFill/>
-          <a:ln/>
-        </p:spPr>
-        <p:txBody>
-          <a:bodyPr wrap="square" lIns="0" tIns="0" rIns="0" bIns="0" rtlCol="0" anchor="ctr"/>
-          <a:lstStyle/>
-          <a:p>
-            <a:pPr indent="0" marL="0">
-              <a:buNone/>
-            </a:pPr>
-            <a:r>
-              <a:rPr lang="en-US" sz="1600" b="1" dirty="0">
-                <a:solidFill>
-                  <a:srgbClr val="E8EEF8"/>
-                </a:solidFill>
-                <a:latin typeface="Calibri" pitchFamily="34" charset="0"/>
-                <a:ea typeface="Calibri" pitchFamily="34" charset="-122"/>
-                <a:cs typeface="Calibri" pitchFamily="34" charset="-120"/>
-              </a:rPr>
-              <a:t>Digital Twin v1</a:t>
-            </a:r>
-            <a:endParaRPr lang="en-US" sz="1600" dirty="0"/>
-          </a:p>
-        </p:txBody>
-      </p:sp>
-      <p:sp>
-        <p:nvSpPr>
-          <p:cNvPr id="18" name="Shape 16"/>
-          <p:cNvSpPr/>
-          <p:nvPr/>
-        </p:nvSpPr>
-        <p:spPr>
-          <a:xfrm>
-            <a:off x="6629400" y="3072384"/>
-            <a:ext cx="91440" cy="91440"/>
-          </a:xfrm>
-          <a:prstGeom prst="ellipse">
-            <a:avLst/>
-          </a:prstGeom>
-          <a:solidFill>
-            <a:srgbClr val="A78BFA"/>
-          </a:solidFill>
-          <a:ln/>
-        </p:spPr>
-      </p:sp>
-      <p:sp>
-        <p:nvSpPr>
-          <p:cNvPr id="19" name="Text 17"/>
-          <p:cNvSpPr txBox="1"/>
-          <p:nvPr/>
-        </p:nvSpPr>
-        <p:spPr>
-          <a:xfrm>
-            <a:off x="6848856" y="2999232"/>
-            <a:ext cx="4297680" cy="365760"/>
-          </a:xfrm>
-          <a:prstGeom prst="rect">
-            <a:avLst/>
-          </a:prstGeom>
-          <a:noFill/>
-          <a:ln/>
-        </p:spPr>
-        <p:txBody>
-          <a:bodyPr wrap="square" lIns="0" tIns="0" rIns="0" bIns="0" rtlCol="0" anchor="ctr"/>
-          <a:lstStyle/>
-          <a:p>
-            <a:pPr indent="0" marL="0">
-              <a:buNone/>
-            </a:pPr>
-            <a:r>
-              <a:rPr lang="en-US" sz="1250" dirty="0">
-                <a:solidFill>
-                  <a:srgbClr val="9FB0CC"/>
-                </a:solidFill>
-                <a:latin typeface="Calibri" pitchFamily="34" charset="0"/>
-                <a:ea typeface="Calibri" pitchFamily="34" charset="-122"/>
-                <a:cs typeface="Calibri" pitchFamily="34" charset="-120"/>
-              </a:rPr>
-              <a:t>A 3D structure with glowing severity markers</a:t>
-            </a:r>
-            <a:endParaRPr lang="en-US" sz="1250" dirty="0"/>
-          </a:p>
-        </p:txBody>
-      </p:sp>
-      <p:sp>
-        <p:nvSpPr>
-          <p:cNvPr id="20" name="Shape 18"/>
-          <p:cNvSpPr/>
-          <p:nvPr/>
-        </p:nvSpPr>
-        <p:spPr>
-          <a:xfrm>
-            <a:off x="6629400" y="3575304"/>
-            <a:ext cx="91440" cy="91440"/>
-          </a:xfrm>
-          <a:prstGeom prst="ellipse">
-            <a:avLst/>
-          </a:prstGeom>
-          <a:solidFill>
-            <a:srgbClr val="A78BFA"/>
-          </a:solidFill>
-          <a:ln/>
-        </p:spPr>
-      </p:sp>
-      <p:sp>
-        <p:nvSpPr>
-          <p:cNvPr id="21" name="Text 19"/>
-          <p:cNvSpPr txBox="1"/>
-          <p:nvPr/>
-        </p:nvSpPr>
-        <p:spPr>
-          <a:xfrm>
-            <a:off x="6848856" y="3502152"/>
-            <a:ext cx="4297680" cy="365760"/>
-          </a:xfrm>
-          <a:prstGeom prst="rect">
-            <a:avLst/>
-          </a:prstGeom>
-          <a:noFill/>
-          <a:ln/>
-        </p:spPr>
-        <p:txBody>
-          <a:bodyPr wrap="square" lIns="0" tIns="0" rIns="0" bIns="0" rtlCol="0" anchor="ctr"/>
-          <a:lstStyle/>
-          <a:p>
-            <a:pPr indent="0" marL="0">
-              <a:buNone/>
-            </a:pPr>
-            <a:r>
-              <a:rPr lang="en-US" sz="1250" dirty="0">
-                <a:solidFill>
-                  <a:srgbClr val="9FB0CC"/>
-                </a:solidFill>
-                <a:latin typeface="Calibri" pitchFamily="34" charset="0"/>
-                <a:ea typeface="Calibri" pitchFamily="34" charset="-122"/>
-                <a:cs typeface="Calibri" pitchFamily="34" charset="-120"/>
-              </a:rPr>
-              <a:t>Click any marker for its source image and score</a:t>
-            </a:r>
-            <a:endParaRPr lang="en-US" sz="1250" dirty="0"/>
-          </a:p>
-        </p:txBody>
-      </p:sp>
-      <p:sp>
-        <p:nvSpPr>
-          <p:cNvPr id="22" name="Shape 20"/>
-          <p:cNvSpPr/>
-          <p:nvPr/>
-        </p:nvSpPr>
-        <p:spPr>
-          <a:xfrm>
-            <a:off x="6629400" y="4078224"/>
-            <a:ext cx="91440" cy="91440"/>
-          </a:xfrm>
-          <a:prstGeom prst="ellipse">
-            <a:avLst/>
-          </a:prstGeom>
-          <a:solidFill>
-            <a:srgbClr val="A78BFA"/>
-          </a:solidFill>
-          <a:ln/>
-        </p:spPr>
-      </p:sp>
-      <p:sp>
-        <p:nvSpPr>
-          <p:cNvPr id="23" name="Text 21"/>
-          <p:cNvSpPr txBox="1"/>
-          <p:nvPr/>
-        </p:nvSpPr>
-        <p:spPr>
-          <a:xfrm>
-            <a:off x="6848856" y="4005072"/>
-            <a:ext cx="4297680" cy="365760"/>
-          </a:xfrm>
-          <a:prstGeom prst="rect">
-            <a:avLst/>
-          </a:prstGeom>
-          <a:noFill/>
-          <a:ln/>
-        </p:spPr>
-        <p:txBody>
-          <a:bodyPr wrap="square" lIns="0" tIns="0" rIns="0" bIns="0" rtlCol="0" anchor="ctr"/>
-          <a:lstStyle/>
-          <a:p>
-            <a:pPr indent="0" marL="0">
-              <a:buNone/>
-            </a:pPr>
-            <a:r>
-              <a:rPr lang="en-US" sz="1250" dirty="0">
-                <a:solidFill>
-                  <a:srgbClr val="9FB0CC"/>
-                </a:solidFill>
-                <a:latin typeface="Calibri" pitchFamily="34" charset="0"/>
-                <a:ea typeface="Calibri" pitchFamily="34" charset="-122"/>
-                <a:cs typeface="Calibri" pitchFamily="34" charset="-120"/>
-              </a:rPr>
-              <a:t>Built in code — no scanning rig required</a:t>
-            </a:r>
-            <a:endParaRPr lang="en-US" sz="1250" dirty="0"/>
-          </a:p>
-        </p:txBody>
-      </p:sp>
-      <p:sp>
-        <p:nvSpPr>
-          <p:cNvPr id="24" name="Shape 22"/>
-          <p:cNvSpPr/>
-          <p:nvPr/>
-        </p:nvSpPr>
-        <p:spPr>
-          <a:xfrm>
-            <a:off x="6629400" y="4581144"/>
-            <a:ext cx="91440" cy="91440"/>
-          </a:xfrm>
-          <a:prstGeom prst="ellipse">
-            <a:avLst/>
-          </a:prstGeom>
-          <a:solidFill>
-            <a:srgbClr val="A78BFA"/>
-          </a:solidFill>
-          <a:ln/>
-        </p:spPr>
-      </p:sp>
-      <p:sp>
-        <p:nvSpPr>
-          <p:cNvPr id="25" name="Text 23"/>
-          <p:cNvSpPr txBox="1"/>
-          <p:nvPr/>
-        </p:nvSpPr>
-        <p:spPr>
-          <a:xfrm>
-            <a:off x="6848856" y="4507992"/>
-            <a:ext cx="4297680" cy="365760"/>
-          </a:xfrm>
-          <a:prstGeom prst="rect">
-            <a:avLst/>
-          </a:prstGeom>
-          <a:noFill/>
-          <a:ln/>
-        </p:spPr>
-        <p:txBody>
-          <a:bodyPr wrap="square" lIns="0" tIns="0" rIns="0" bIns="0" rtlCol="0" anchor="ctr"/>
-          <a:lstStyle/>
-          <a:p>
-            <a:pPr indent="0" marL="0">
-              <a:buNone/>
-            </a:pPr>
-            <a:r>
-              <a:rPr lang="en-US" sz="1250" dirty="0">
-                <a:solidFill>
-                  <a:srgbClr val="9FB0CC"/>
-                </a:solidFill>
-                <a:latin typeface="Calibri" pitchFamily="34" charset="0"/>
-                <a:ea typeface="Calibri" pitchFamily="34" charset="-122"/>
-                <a:cs typeface="Calibri" pitchFamily="34" charset="-120"/>
-              </a:rPr>
-              <a:t>Illustrative placement, and we say so on screen</a:t>
-            </a:r>
-            <a:endParaRPr lang="en-US" sz="1250" dirty="0"/>
-          </a:p>
-        </p:txBody>
-      </p:sp>
-      <p:sp>
-        <p:nvSpPr>
-          <p:cNvPr id="26" name="Text 24"/>
-          <p:cNvSpPr txBox="1"/>
-          <p:nvPr/>
-        </p:nvSpPr>
-        <p:spPr>
-          <a:xfrm>
-            <a:off x="685800" y="5715000"/>
-            <a:ext cx="10789920" cy="320040"/>
+              <a:t>No threshold recovers it. The fix is more varied training data, and we know that because we swept the thresholds and looked.</a:t>
+            </a:r>
+            <a:endParaRPr lang="en-US" sz="1150" dirty="0"/>
+          </a:p>
+        </p:txBody>
+      </p:sp>
+      <p:sp>
+        <p:nvSpPr>
+          <p:cNvPr id="11" name="Text 8"/>
+          <p:cNvSpPr txBox="1"/>
+          <p:nvPr/>
+        </p:nvSpPr>
+        <p:spPr>
+          <a:xfrm>
+            <a:off x="685800" y="5852160"/>
+            <a:ext cx="10789920" cy="365760"/>
           </a:xfrm>
           <a:prstGeom prst="rect">
             <a:avLst/>
@@ -9448,17 +10498,17 @@
               <a:buNone/>
             </a:pPr>
             <a:r>
-              <a:rPr lang="en-US" sz="1150" i="1" dirty="0">
-                <a:solidFill>
-                  <a:srgbClr val="64748B"/>
-                </a:solidFill>
-                <a:latin typeface="Calibri" pitchFamily="34" charset="0"/>
-                <a:ea typeface="Calibri" pitchFamily="34" charset="-122"/>
-                <a:cs typeface="Calibri" pitchFamily="34" charset="-120"/>
-              </a:rPr>
-              <a:t>[ Replace this line with a screenshot of the dashboard and the 3D viewer ]</a:t>
-            </a:r>
-            <a:endParaRPr lang="en-US" sz="1150" dirty="0"/>
+              <a:rPr lang="en-US" sz="1400" i="1" dirty="0">
+                <a:solidFill>
+                  <a:srgbClr val="22D3EE"/>
+                </a:solidFill>
+                <a:latin typeface="Calibri" pitchFamily="34" charset="0"/>
+                <a:ea typeface="Calibri" pitchFamily="34" charset="-122"/>
+                <a:cs typeface="Calibri" pitchFamily="34" charset="-120"/>
+              </a:rPr>
+              <a:t>We would rather tell you this than have you find it.</a:t>
+            </a:r>
+            <a:endParaRPr lang="en-US" sz="1400" dirty="0"/>
           </a:p>
         </p:txBody>
       </p:sp>
@@ -9571,7 +10621,7 @@
                 <a:ea typeface="Calibri" pitchFamily="34" charset="-122"/>
                 <a:cs typeface="Calibri" pitchFamily="34" charset="-120"/>
               </a:rPr>
-              <a:t>WHAT IT DOES NOT DO</a:t>
+              <a:t>VISUALISATION</a:t>
             </a:r>
             <a:endParaRPr lang="en-US" sz="1100" dirty="0"/>
           </a:p>
@@ -9610,7 +10660,7 @@
                 <a:ea typeface="Calibri" pitchFamily="34" charset="-122"/>
                 <a:cs typeface="Calibri" pitchFamily="34" charset="-120"/>
               </a:rPr>
-              <a:t>We measured the weaknesses too.</a:t>
+              <a:t>From a photograph to a structure you can orbit.</a:t>
             </a:r>
             <a:endParaRPr lang="en-US" sz="3800" dirty="0"/>
           </a:p>
@@ -9618,57 +10668,18 @@
       </p:sp>
       <p:sp>
         <p:nvSpPr>
-          <p:cNvPr id="6" name="Text 4"/>
-          <p:cNvSpPr txBox="1"/>
-          <p:nvPr/>
-        </p:nvSpPr>
-        <p:spPr>
-          <a:xfrm>
-            <a:off x="685800" y="1783080"/>
-            <a:ext cx="10515600" cy="320040"/>
-          </a:xfrm>
-          <a:prstGeom prst="rect">
-            <a:avLst/>
-          </a:prstGeom>
-          <a:noFill/>
-          <a:ln/>
-        </p:spPr>
-        <p:txBody>
-          <a:bodyPr wrap="square" lIns="0" tIns="0" rIns="0" bIns="0" rtlCol="0" anchor="ctr"/>
-          <a:lstStyle/>
-          <a:p>
-            <a:pPr indent="0" marL="0">
-              <a:buNone/>
-            </a:pPr>
-            <a:r>
-              <a:rPr lang="en-US" sz="1350" dirty="0">
-                <a:solidFill>
-                  <a:srgbClr val="22D3EE"/>
-                </a:solidFill>
-                <a:latin typeface="Calibri" pitchFamily="34" charset="0"/>
-                <a:ea typeface="Calibri" pitchFamily="34" charset="-122"/>
-                <a:cs typeface="Calibri" pitchFamily="34" charset="-120"/>
-              </a:rPr>
-              <a:t>Every one of these is stated in the product itself and on the last page of every report.</a:t>
-            </a:r>
-            <a:endParaRPr lang="en-US" sz="1350" dirty="0"/>
-          </a:p>
-        </p:txBody>
-      </p:sp>
-      <p:sp>
-        <p:nvSpPr>
-          <p:cNvPr id="7" name="Shape 5"/>
+          <p:cNvPr id="6" name="Shape 4"/>
           <p:cNvSpPr/>
           <p:nvPr/>
         </p:nvSpPr>
         <p:spPr>
           <a:xfrm>
-            <a:off x="685800" y="2395728"/>
-            <a:ext cx="5120640" cy="987552"/>
+            <a:off x="685800" y="2286000"/>
+            <a:ext cx="5257800" cy="3200400"/>
           </a:xfrm>
           <a:prstGeom prst="roundRect">
             <a:avLst>
-              <a:gd name="adj" fmla="val 11111"/>
+              <a:gd name="adj" fmla="val 3429"/>
             </a:avLst>
           </a:prstGeom>
           <a:solidFill>
@@ -9693,30 +10704,30 @@
       </p:sp>
       <p:sp>
         <p:nvSpPr>
-          <p:cNvPr id="8" name="Text 6"/>
-          <p:cNvSpPr txBox="1"/>
-          <p:nvPr/>
-        </p:nvSpPr>
-        <p:spPr>
-          <a:xfrm>
-            <a:off x="978408" y="2523744"/>
-            <a:ext cx="4572000" cy="292608"/>
-          </a:xfrm>
-          <a:prstGeom prst="rect">
-            <a:avLst/>
-          </a:prstGeom>
-          <a:noFill/>
-          <a:ln/>
-        </p:spPr>
-        <p:txBody>
-          <a:bodyPr wrap="square" lIns="0" tIns="0" rIns="0" bIns="0" rtlCol="0" anchor="ctr"/>
-          <a:lstStyle/>
-          <a:p>
-            <a:pPr indent="0" marL="0">
-              <a:buNone/>
-            </a:pPr>
-            <a:r>
-              <a:rPr lang="en-US" sz="1400" b="1" dirty="0">
+          <p:cNvPr id="7" name="Text 5"/>
+          <p:cNvSpPr txBox="1"/>
+          <p:nvPr/>
+        </p:nvSpPr>
+        <p:spPr>
+          <a:xfrm>
+            <a:off x="1051560" y="2542032"/>
+            <a:ext cx="4480560" cy="320040"/>
+          </a:xfrm>
+          <a:prstGeom prst="rect">
+            <a:avLst/>
+          </a:prstGeom>
+          <a:noFill/>
+          <a:ln/>
+        </p:spPr>
+        <p:txBody>
+          <a:bodyPr wrap="square" lIns="0" tIns="0" rIns="0" bIns="0" rtlCol="0" anchor="ctr"/>
+          <a:lstStyle/>
+          <a:p>
+            <a:pPr indent="0" marL="0">
+              <a:buNone/>
+            </a:pPr>
+            <a:r>
+              <a:rPr lang="en-US" sz="1600" b="1" dirty="0">
                 <a:solidFill>
                   <a:srgbClr val="E8EEF8"/>
                 </a:solidFill>
@@ -9724,11 +10735,31 @@
                 <a:ea typeface="Calibri" pitchFamily="34" charset="-122"/>
                 <a:cs typeface="Calibri" pitchFamily="34" charset="-120"/>
               </a:rPr>
-              <a:t>Cracks only</a:t>
-            </a:r>
-            <a:endParaRPr lang="en-US" sz="1400" dirty="0"/>
-          </a:p>
-        </p:txBody>
+              <a:t>On the image</a:t>
+            </a:r>
+            <a:endParaRPr lang="en-US" sz="1600" dirty="0"/>
+          </a:p>
+        </p:txBody>
+      </p:sp>
+      <p:sp>
+        <p:nvSpPr>
+          <p:cNvPr id="8" name="Shape 6"/>
+          <p:cNvSpPr/>
+          <p:nvPr/>
+        </p:nvSpPr>
+        <p:spPr>
+          <a:xfrm>
+            <a:off x="1051560" y="3072384"/>
+            <a:ext cx="91440" cy="91440"/>
+          </a:xfrm>
+          <a:prstGeom prst="ellipse">
+            <a:avLst/>
+          </a:prstGeom>
+          <a:solidFill>
+            <a:srgbClr val="22D3EE"/>
+          </a:solidFill>
+          <a:ln/>
+        </p:spPr>
       </p:sp>
       <p:sp>
         <p:nvSpPr>
@@ -9738,24 +10769,24 @@
         </p:nvSpPr>
         <p:spPr>
           <a:xfrm>
-            <a:off x="978408" y="2834640"/>
-            <a:ext cx="4617720" cy="457200"/>
-          </a:xfrm>
-          <a:prstGeom prst="rect">
-            <a:avLst/>
-          </a:prstGeom>
-          <a:noFill/>
-          <a:ln/>
-        </p:spPr>
-        <p:txBody>
-          <a:bodyPr wrap="square" lIns="0" tIns="0" rIns="0" bIns="0" rtlCol="0" anchor="ctr"/>
-          <a:lstStyle/>
-          <a:p>
-            <a:pPr indent="0" marL="0">
-              <a:buNone/>
-            </a:pPr>
-            <a:r>
-              <a:rPr lang="en-US" sz="1150" dirty="0">
+            <a:off x="1271016" y="2999232"/>
+            <a:ext cx="4297680" cy="365760"/>
+          </a:xfrm>
+          <a:prstGeom prst="rect">
+            <a:avLst/>
+          </a:prstGeom>
+          <a:noFill/>
+          <a:ln/>
+        </p:spPr>
+        <p:txBody>
+          <a:bodyPr wrap="square" lIns="0" tIns="0" rIns="0" bIns="0" rtlCol="0" anchor="ctr"/>
+          <a:lstStyle/>
+          <a:p>
+            <a:pPr indent="0" marL="0">
+              <a:buNone/>
+            </a:pPr>
+            <a:r>
+              <a:rPr lang="en-US" sz="1250" dirty="0">
                 <a:solidFill>
                   <a:srgbClr val="9FB0CC"/>
                 </a:solidFill>
@@ -9763,9 +10794,9 @@
                 <a:ea typeface="Calibri" pitchFamily="34" charset="-122"/>
                 <a:cs typeface="Calibri" pitchFamily="34" charset="-120"/>
               </a:rPr>
-              <a:t>One defect class. It has never seen corrosion or spalling and will not report them.</a:t>
-            </a:r>
-            <a:endParaRPr lang="en-US" sz="1150" dirty="0"/>
+              <a:t>Bounding boxes drawn over each detection</a:t>
+            </a:r>
+            <a:endParaRPr lang="en-US" sz="1250" dirty="0"/>
           </a:p>
         </p:txBody>
       </p:sp>
@@ -9777,12 +10808,189 @@
         </p:nvSpPr>
         <p:spPr>
           <a:xfrm>
-            <a:off x="6217920" y="2395728"/>
-            <a:ext cx="5120640" cy="987552"/>
+            <a:off x="1051560" y="3575304"/>
+            <a:ext cx="91440" cy="91440"/>
+          </a:xfrm>
+          <a:prstGeom prst="ellipse">
+            <a:avLst/>
+          </a:prstGeom>
+          <a:solidFill>
+            <a:srgbClr val="22D3EE"/>
+          </a:solidFill>
+          <a:ln/>
+        </p:spPr>
+      </p:sp>
+      <p:sp>
+        <p:nvSpPr>
+          <p:cNvPr id="11" name="Text 9"/>
+          <p:cNvSpPr txBox="1"/>
+          <p:nvPr/>
+        </p:nvSpPr>
+        <p:spPr>
+          <a:xfrm>
+            <a:off x="1271016" y="3502152"/>
+            <a:ext cx="4297680" cy="365760"/>
+          </a:xfrm>
+          <a:prstGeom prst="rect">
+            <a:avLst/>
+          </a:prstGeom>
+          <a:noFill/>
+          <a:ln/>
+        </p:spPr>
+        <p:txBody>
+          <a:bodyPr wrap="square" lIns="0" tIns="0" rIns="0" bIns="0" rtlCol="0" anchor="ctr"/>
+          <a:lstStyle/>
+          <a:p>
+            <a:pPr indent="0" marL="0">
+              <a:buNone/>
+            </a:pPr>
+            <a:r>
+              <a:rPr lang="en-US" sz="1250" dirty="0">
+                <a:solidFill>
+                  <a:srgbClr val="9FB0CC"/>
+                </a:solidFill>
+                <a:latin typeface="Calibri" pitchFamily="34" charset="0"/>
+                <a:ea typeface="Calibri" pitchFamily="34" charset="-122"/>
+                <a:cs typeface="Calibri" pitchFamily="34" charset="-120"/>
+              </a:rPr>
+              <a:t>Colour and size both carry severity</a:t>
+            </a:r>
+            <a:endParaRPr lang="en-US" sz="1250" dirty="0"/>
+          </a:p>
+        </p:txBody>
+      </p:sp>
+      <p:sp>
+        <p:nvSpPr>
+          <p:cNvPr id="12" name="Shape 10"/>
+          <p:cNvSpPr/>
+          <p:nvPr/>
+        </p:nvSpPr>
+        <p:spPr>
+          <a:xfrm>
+            <a:off x="1051560" y="4078224"/>
+            <a:ext cx="91440" cy="91440"/>
+          </a:xfrm>
+          <a:prstGeom prst="ellipse">
+            <a:avLst/>
+          </a:prstGeom>
+          <a:solidFill>
+            <a:srgbClr val="22D3EE"/>
+          </a:solidFill>
+          <a:ln/>
+        </p:spPr>
+      </p:sp>
+      <p:sp>
+        <p:nvSpPr>
+          <p:cNvPr id="13" name="Text 11"/>
+          <p:cNvSpPr txBox="1"/>
+          <p:nvPr/>
+        </p:nvSpPr>
+        <p:spPr>
+          <a:xfrm>
+            <a:off x="1271016" y="4005072"/>
+            <a:ext cx="4297680" cy="365760"/>
+          </a:xfrm>
+          <a:prstGeom prst="rect">
+            <a:avLst/>
+          </a:prstGeom>
+          <a:noFill/>
+          <a:ln/>
+        </p:spPr>
+        <p:txBody>
+          <a:bodyPr wrap="square" lIns="0" tIns="0" rIns="0" bIns="0" rtlCol="0" anchor="ctr"/>
+          <a:lstStyle/>
+          <a:p>
+            <a:pPr indent="0" marL="0">
+              <a:buNone/>
+            </a:pPr>
+            <a:r>
+              <a:rPr lang="en-US" sz="1250" dirty="0">
+                <a:solidFill>
+                  <a:srgbClr val="9FB0CC"/>
+                </a:solidFill>
+                <a:latin typeface="Calibri" pitchFamily="34" charset="0"/>
+                <a:ea typeface="Calibri" pitchFamily="34" charset="-122"/>
+                <a:cs typeface="Calibri" pitchFamily="34" charset="-120"/>
+              </a:rPr>
+              <a:t>Hover a finding to see its arithmetic</a:t>
+            </a:r>
+            <a:endParaRPr lang="en-US" sz="1250" dirty="0"/>
+          </a:p>
+        </p:txBody>
+      </p:sp>
+      <p:sp>
+        <p:nvSpPr>
+          <p:cNvPr id="14" name="Shape 12"/>
+          <p:cNvSpPr/>
+          <p:nvPr/>
+        </p:nvSpPr>
+        <p:spPr>
+          <a:xfrm>
+            <a:off x="1051560" y="4581144"/>
+            <a:ext cx="91440" cy="91440"/>
+          </a:xfrm>
+          <a:prstGeom prst="ellipse">
+            <a:avLst/>
+          </a:prstGeom>
+          <a:solidFill>
+            <a:srgbClr val="22D3EE"/>
+          </a:solidFill>
+          <a:ln/>
+        </p:spPr>
+      </p:sp>
+      <p:sp>
+        <p:nvSpPr>
+          <p:cNvPr id="15" name="Text 13"/>
+          <p:cNvSpPr txBox="1"/>
+          <p:nvPr/>
+        </p:nvSpPr>
+        <p:spPr>
+          <a:xfrm>
+            <a:off x="1271016" y="4507992"/>
+            <a:ext cx="4297680" cy="365760"/>
+          </a:xfrm>
+          <a:prstGeom prst="rect">
+            <a:avLst/>
+          </a:prstGeom>
+          <a:noFill/>
+          <a:ln/>
+        </p:spPr>
+        <p:txBody>
+          <a:bodyPr wrap="square" lIns="0" tIns="0" rIns="0" bIns="0" rtlCol="0" anchor="ctr"/>
+          <a:lstStyle/>
+          <a:p>
+            <a:pPr indent="0" marL="0">
+              <a:buNone/>
+            </a:pPr>
+            <a:r>
+              <a:rPr lang="en-US" sz="1250" dirty="0">
+                <a:solidFill>
+                  <a:srgbClr val="9FB0CC"/>
+                </a:solidFill>
+                <a:latin typeface="Calibri" pitchFamily="34" charset="0"/>
+                <a:ea typeface="Calibri" pitchFamily="34" charset="-122"/>
+                <a:cs typeface="Calibri" pitchFamily="34" charset="-120"/>
+              </a:rPr>
+              <a:t>Boxes stored normalised, so they align at any zoom</a:t>
+            </a:r>
+            <a:endParaRPr lang="en-US" sz="1250" dirty="0"/>
+          </a:p>
+        </p:txBody>
+      </p:sp>
+      <p:sp>
+        <p:nvSpPr>
+          <p:cNvPr id="16" name="Shape 14"/>
+          <p:cNvSpPr/>
+          <p:nvPr/>
+        </p:nvSpPr>
+        <p:spPr>
+          <a:xfrm>
+            <a:off x="6263640" y="2286000"/>
+            <a:ext cx="5212080" cy="3200400"/>
           </a:xfrm>
           <a:prstGeom prst="roundRect">
             <a:avLst>
-              <a:gd name="adj" fmla="val 11111"/>
+              <a:gd name="adj" fmla="val 3429"/>
             </a:avLst>
           </a:prstGeom>
           <a:solidFill>
@@ -9807,30 +11015,30 @@
       </p:sp>
       <p:sp>
         <p:nvSpPr>
-          <p:cNvPr id="11" name="Text 9"/>
-          <p:cNvSpPr txBox="1"/>
-          <p:nvPr/>
-        </p:nvSpPr>
-        <p:spPr>
-          <a:xfrm>
-            <a:off x="6510528" y="2523744"/>
-            <a:ext cx="4572000" cy="292608"/>
-          </a:xfrm>
-          <a:prstGeom prst="rect">
-            <a:avLst/>
-          </a:prstGeom>
-          <a:noFill/>
-          <a:ln/>
-        </p:spPr>
-        <p:txBody>
-          <a:bodyPr wrap="square" lIns="0" tIns="0" rIns="0" bIns="0" rtlCol="0" anchor="ctr"/>
-          <a:lstStyle/>
-          <a:p>
-            <a:pPr indent="0" marL="0">
-              <a:buNone/>
-            </a:pPr>
-            <a:r>
-              <a:rPr lang="en-US" sz="1400" b="1" dirty="0">
+          <p:cNvPr id="17" name="Text 15"/>
+          <p:cNvSpPr txBox="1"/>
+          <p:nvPr/>
+        </p:nvSpPr>
+        <p:spPr>
+          <a:xfrm>
+            <a:off x="6629400" y="2542032"/>
+            <a:ext cx="4480560" cy="320040"/>
+          </a:xfrm>
+          <a:prstGeom prst="rect">
+            <a:avLst/>
+          </a:prstGeom>
+          <a:noFill/>
+          <a:ln/>
+        </p:spPr>
+        <p:txBody>
+          <a:bodyPr wrap="square" lIns="0" tIns="0" rIns="0" bIns="0" rtlCol="0" anchor="ctr"/>
+          <a:lstStyle/>
+          <a:p>
+            <a:pPr indent="0" marL="0">
+              <a:buNone/>
+            </a:pPr>
+            <a:r>
+              <a:rPr lang="en-US" sz="1600" b="1" dirty="0">
                 <a:solidFill>
                   <a:srgbClr val="E8EEF8"/>
                 </a:solidFill>
@@ -9838,38 +11046,58 @@
                 <a:ea typeface="Calibri" pitchFamily="34" charset="-122"/>
                 <a:cs typeface="Calibri" pitchFamily="34" charset="-120"/>
               </a:rPr>
-              <a:t>1 in 5 clean surfaces flagged</a:t>
-            </a:r>
-            <a:endParaRPr lang="en-US" sz="1400" dirty="0"/>
-          </a:p>
-        </p:txBody>
-      </p:sp>
-      <p:sp>
-        <p:nvSpPr>
-          <p:cNvPr id="12" name="Text 10"/>
-          <p:cNvSpPr txBox="1"/>
-          <p:nvPr/>
-        </p:nvSpPr>
-        <p:spPr>
-          <a:xfrm>
-            <a:off x="6510528" y="2834640"/>
-            <a:ext cx="4617720" cy="457200"/>
-          </a:xfrm>
-          <a:prstGeom prst="rect">
-            <a:avLst/>
-          </a:prstGeom>
-          <a:noFill/>
-          <a:ln/>
-        </p:spPr>
-        <p:txBody>
-          <a:bodyPr wrap="square" lIns="0" tIns="0" rIns="0" bIns="0" rtlCol="0" anchor="ctr"/>
-          <a:lstStyle/>
-          <a:p>
-            <a:pPr indent="0" marL="0">
-              <a:buNone/>
-            </a:pPr>
-            <a:r>
-              <a:rPr lang="en-US" sz="1150" dirty="0">
+              <a:t>Digital Twin v1</a:t>
+            </a:r>
+            <a:endParaRPr lang="en-US" sz="1600" dirty="0"/>
+          </a:p>
+        </p:txBody>
+      </p:sp>
+      <p:sp>
+        <p:nvSpPr>
+          <p:cNvPr id="18" name="Shape 16"/>
+          <p:cNvSpPr/>
+          <p:nvPr/>
+        </p:nvSpPr>
+        <p:spPr>
+          <a:xfrm>
+            <a:off x="6629400" y="3072384"/>
+            <a:ext cx="91440" cy="91440"/>
+          </a:xfrm>
+          <a:prstGeom prst="ellipse">
+            <a:avLst/>
+          </a:prstGeom>
+          <a:solidFill>
+            <a:srgbClr val="A78BFA"/>
+          </a:solidFill>
+          <a:ln/>
+        </p:spPr>
+      </p:sp>
+      <p:sp>
+        <p:nvSpPr>
+          <p:cNvPr id="19" name="Text 17"/>
+          <p:cNvSpPr txBox="1"/>
+          <p:nvPr/>
+        </p:nvSpPr>
+        <p:spPr>
+          <a:xfrm>
+            <a:off x="6848856" y="2999232"/>
+            <a:ext cx="4297680" cy="365760"/>
+          </a:xfrm>
+          <a:prstGeom prst="rect">
+            <a:avLst/>
+          </a:prstGeom>
+          <a:noFill/>
+          <a:ln/>
+        </p:spPr>
+        <p:txBody>
+          <a:bodyPr wrap="square" lIns="0" tIns="0" rIns="0" bIns="0" rtlCol="0" anchor="ctr"/>
+          <a:lstStyle/>
+          <a:p>
+            <a:pPr indent="0" marL="0">
+              <a:buNone/>
+            </a:pPr>
+            <a:r>
+              <a:rPr lang="en-US" sz="1250" dirty="0">
                 <a:solidFill>
                   <a:srgbClr val="9FB0CC"/>
                 </a:solidFill>
@@ -9877,113 +11105,58 @@
                 <a:ea typeface="Calibri" pitchFamily="34" charset="-122"/>
                 <a:cs typeface="Calibri" pitchFamily="34" charset="-120"/>
               </a:rPr>
-              <a:t>Measured against 94 defect-free photographs. It errs toward flagging.</a:t>
-            </a:r>
-            <a:endParaRPr lang="en-US" sz="1150" dirty="0"/>
-          </a:p>
-        </p:txBody>
-      </p:sp>
-      <p:sp>
-        <p:nvSpPr>
-          <p:cNvPr id="13" name="Shape 11"/>
+              <a:t>A 3D structure with glowing severity markers</a:t>
+            </a:r>
+            <a:endParaRPr lang="en-US" sz="1250" dirty="0"/>
+          </a:p>
+        </p:txBody>
+      </p:sp>
+      <p:sp>
+        <p:nvSpPr>
+          <p:cNvPr id="20" name="Shape 18"/>
           <p:cNvSpPr/>
           <p:nvPr/>
         </p:nvSpPr>
         <p:spPr>
           <a:xfrm>
-            <a:off x="685800" y="3584448"/>
-            <a:ext cx="5120640" cy="987552"/>
-          </a:xfrm>
-          <a:prstGeom prst="roundRect">
-            <a:avLst>
-              <a:gd name="adj" fmla="val 11111"/>
-            </a:avLst>
+            <a:off x="6629400" y="3575304"/>
+            <a:ext cx="91440" cy="91440"/>
+          </a:xfrm>
+          <a:prstGeom prst="ellipse">
+            <a:avLst/>
           </a:prstGeom>
           <a:solidFill>
-            <a:srgbClr val="111A2E">
-              <a:alpha val="82000"/>
-            </a:srgbClr>
+            <a:srgbClr val="A78BFA"/>
           </a:solidFill>
-          <a:ln w="12700">
-            <a:solidFill>
-              <a:srgbClr val="1E2B44"/>
-            </a:solidFill>
-            <a:prstDash val="solid"/>
-          </a:ln>
-          <a:effectLst>
-            <a:outerShdw sx="100000" sy="100000" kx="0" ky="0" algn="bl" rotWithShape="0" blurRad="177800" dist="38100" dir="5400000">
-              <a:srgbClr val="000000">
-                <a:alpha val="35000"/>
-              </a:srgbClr>
-            </a:outerShdw>
-          </a:effectLst>
-        </p:spPr>
-      </p:sp>
-      <p:sp>
-        <p:nvSpPr>
-          <p:cNvPr id="14" name="Text 12"/>
-          <p:cNvSpPr txBox="1"/>
-          <p:nvPr/>
-        </p:nvSpPr>
-        <p:spPr>
-          <a:xfrm>
-            <a:off x="978408" y="3712464"/>
-            <a:ext cx="4572000" cy="292608"/>
-          </a:xfrm>
-          <a:prstGeom prst="rect">
-            <a:avLst/>
-          </a:prstGeom>
-          <a:noFill/>
-          <a:ln/>
-        </p:spPr>
-        <p:txBody>
-          <a:bodyPr wrap="square" lIns="0" tIns="0" rIns="0" bIns="0" rtlCol="0" anchor="ctr"/>
-          <a:lstStyle/>
-          <a:p>
-            <a:pPr indent="0" marL="0">
-              <a:buNone/>
-            </a:pPr>
-            <a:r>
-              <a:rPr lang="en-US" sz="1400" b="1" dirty="0">
-                <a:solidFill>
-                  <a:srgbClr val="E8EEF8"/>
-                </a:solidFill>
-                <a:latin typeface="Calibri" pitchFamily="34" charset="0"/>
-                <a:ea typeface="Calibri" pitchFamily="34" charset="-122"/>
-                <a:cs typeface="Calibri" pitchFamily="34" charset="-120"/>
-              </a:rPr>
-              <a:t>Severity is relative</a:t>
-            </a:r>
-            <a:endParaRPr lang="en-US" sz="1400" dirty="0"/>
-          </a:p>
-        </p:txBody>
-      </p:sp>
-      <p:sp>
-        <p:nvSpPr>
-          <p:cNvPr id="15" name="Text 13"/>
-          <p:cNvSpPr txBox="1"/>
-          <p:nvPr/>
-        </p:nvSpPr>
-        <p:spPr>
-          <a:xfrm>
-            <a:off x="978408" y="4023360"/>
-            <a:ext cx="4617720" cy="457200"/>
-          </a:xfrm>
-          <a:prstGeom prst="rect">
-            <a:avLst/>
-          </a:prstGeom>
-          <a:noFill/>
-          <a:ln/>
-        </p:spPr>
-        <p:txBody>
-          <a:bodyPr wrap="square" lIns="0" tIns="0" rIns="0" bIns="0" rtlCol="0" anchor="ctr"/>
-          <a:lstStyle/>
-          <a:p>
-            <a:pPr indent="0" marL="0">
-              <a:buNone/>
-            </a:pPr>
-            <a:r>
-              <a:rPr lang="en-US" sz="1150" dirty="0">
+          <a:ln/>
+        </p:spPr>
+      </p:sp>
+      <p:sp>
+        <p:nvSpPr>
+          <p:cNvPr id="21" name="Text 19"/>
+          <p:cNvSpPr txBox="1"/>
+          <p:nvPr/>
+        </p:nvSpPr>
+        <p:spPr>
+          <a:xfrm>
+            <a:off x="6848856" y="3502152"/>
+            <a:ext cx="4297680" cy="365760"/>
+          </a:xfrm>
+          <a:prstGeom prst="rect">
+            <a:avLst/>
+          </a:prstGeom>
+          <a:noFill/>
+          <a:ln/>
+        </p:spPr>
+        <p:txBody>
+          <a:bodyPr wrap="square" lIns="0" tIns="0" rIns="0" bIns="0" rtlCol="0" anchor="ctr"/>
+          <a:lstStyle/>
+          <a:p>
+            <a:pPr indent="0" marL="0">
+              <a:buNone/>
+            </a:pPr>
+            <a:r>
+              <a:rPr lang="en-US" sz="1250" dirty="0">
                 <a:solidFill>
                   <a:srgbClr val="9FB0CC"/>
                 </a:solidFill>
@@ -9991,237 +11164,9 @@
                 <a:ea typeface="Calibri" pitchFamily="34" charset="-122"/>
                 <a:cs typeface="Calibri" pitchFamily="34" charset="-120"/>
               </a:rPr>
-              <a:t>It ranks which crack to look at first. It does not measure width in millimetres.</a:t>
-            </a:r>
-            <a:endParaRPr lang="en-US" sz="1150" dirty="0"/>
-          </a:p>
-        </p:txBody>
-      </p:sp>
-      <p:sp>
-        <p:nvSpPr>
-          <p:cNvPr id="16" name="Shape 14"/>
-          <p:cNvSpPr/>
-          <p:nvPr/>
-        </p:nvSpPr>
-        <p:spPr>
-          <a:xfrm>
-            <a:off x="6217920" y="3584448"/>
-            <a:ext cx="5120640" cy="987552"/>
-          </a:xfrm>
-          <a:prstGeom prst="roundRect">
-            <a:avLst>
-              <a:gd name="adj" fmla="val 11111"/>
-            </a:avLst>
-          </a:prstGeom>
-          <a:solidFill>
-            <a:srgbClr val="111A2E">
-              <a:alpha val="82000"/>
-            </a:srgbClr>
-          </a:solidFill>
-          <a:ln w="12700">
-            <a:solidFill>
-              <a:srgbClr val="1E2B44"/>
-            </a:solidFill>
-            <a:prstDash val="solid"/>
-          </a:ln>
-          <a:effectLst>
-            <a:outerShdw sx="100000" sy="100000" kx="0" ky="0" algn="bl" rotWithShape="0" blurRad="177800" dist="38100" dir="5400000">
-              <a:srgbClr val="000000">
-                <a:alpha val="35000"/>
-              </a:srgbClr>
-            </a:outerShdw>
-          </a:effectLst>
-        </p:spPr>
-      </p:sp>
-      <p:sp>
-        <p:nvSpPr>
-          <p:cNvPr id="17" name="Text 15"/>
-          <p:cNvSpPr txBox="1"/>
-          <p:nvPr/>
-        </p:nvSpPr>
-        <p:spPr>
-          <a:xfrm>
-            <a:off x="6510528" y="3712464"/>
-            <a:ext cx="4572000" cy="292608"/>
-          </a:xfrm>
-          <a:prstGeom prst="rect">
-            <a:avLst/>
-          </a:prstGeom>
-          <a:noFill/>
-          <a:ln/>
-        </p:spPr>
-        <p:txBody>
-          <a:bodyPr wrap="square" lIns="0" tIns="0" rIns="0" bIns="0" rtlCol="0" anchor="ctr"/>
-          <a:lstStyle/>
-          <a:p>
-            <a:pPr indent="0" marL="0">
-              <a:buNone/>
-            </a:pPr>
-            <a:r>
-              <a:rPr lang="en-US" sz="1400" b="1" dirty="0">
-                <a:solidFill>
-                  <a:srgbClr val="E8EEF8"/>
-                </a:solidFill>
-                <a:latin typeface="Calibri" pitchFamily="34" charset="0"/>
-                <a:ea typeface="Calibri" pitchFamily="34" charset="-122"/>
-                <a:cs typeface="Calibri" pitchFamily="34" charset="-120"/>
-              </a:rPr>
-              <a:t>The 3D view is illustrative</a:t>
-            </a:r>
-            <a:endParaRPr lang="en-US" sz="1400" dirty="0"/>
-          </a:p>
-        </p:txBody>
-      </p:sp>
-      <p:sp>
-        <p:nvSpPr>
-          <p:cNvPr id="18" name="Text 16"/>
-          <p:cNvSpPr txBox="1"/>
-          <p:nvPr/>
-        </p:nvSpPr>
-        <p:spPr>
-          <a:xfrm>
-            <a:off x="6510528" y="4023360"/>
-            <a:ext cx="4617720" cy="457200"/>
-          </a:xfrm>
-          <a:prstGeom prst="rect">
-            <a:avLst/>
-          </a:prstGeom>
-          <a:noFill/>
-          <a:ln/>
-        </p:spPr>
-        <p:txBody>
-          <a:bodyPr wrap="square" lIns="0" tIns="0" rIns="0" bIns="0" rtlCol="0" anchor="ctr"/>
-          <a:lstStyle/>
-          <a:p>
-            <a:pPr indent="0" marL="0">
-              <a:buNone/>
-            </a:pPr>
-            <a:r>
-              <a:rPr lang="en-US" sz="1150" dirty="0">
-                <a:solidFill>
-                  <a:srgbClr val="9FB0CC"/>
-                </a:solidFill>
-                <a:latin typeface="Calibri" pitchFamily="34" charset="0"/>
-                <a:ea typeface="Calibri" pitchFamily="34" charset="-122"/>
-                <a:cs typeface="Calibri" pitchFamily="34" charset="-120"/>
-              </a:rPr>
-              <a:t>Marker positions come from capture order, not surveyed coordinates.</a:t>
-            </a:r>
-            <a:endParaRPr lang="en-US" sz="1150" dirty="0"/>
-          </a:p>
-        </p:txBody>
-      </p:sp>
-      <p:sp>
-        <p:nvSpPr>
-          <p:cNvPr id="19" name="Shape 17"/>
-          <p:cNvSpPr/>
-          <p:nvPr/>
-        </p:nvSpPr>
-        <p:spPr>
-          <a:xfrm>
-            <a:off x="685800" y="4773168"/>
-            <a:ext cx="5120640" cy="987552"/>
-          </a:xfrm>
-          <a:prstGeom prst="roundRect">
-            <a:avLst>
-              <a:gd name="adj" fmla="val 11111"/>
-            </a:avLst>
-          </a:prstGeom>
-          <a:solidFill>
-            <a:srgbClr val="111A2E">
-              <a:alpha val="82000"/>
-            </a:srgbClr>
-          </a:solidFill>
-          <a:ln w="12700">
-            <a:solidFill>
-              <a:srgbClr val="1E2B44"/>
-            </a:solidFill>
-            <a:prstDash val="solid"/>
-          </a:ln>
-          <a:effectLst>
-            <a:outerShdw sx="100000" sy="100000" kx="0" ky="0" algn="bl" rotWithShape="0" blurRad="177800" dist="38100" dir="5400000">
-              <a:srgbClr val="000000">
-                <a:alpha val="35000"/>
-              </a:srgbClr>
-            </a:outerShdw>
-          </a:effectLst>
-        </p:spPr>
-      </p:sp>
-      <p:sp>
-        <p:nvSpPr>
-          <p:cNvPr id="20" name="Text 18"/>
-          <p:cNvSpPr txBox="1"/>
-          <p:nvPr/>
-        </p:nvSpPr>
-        <p:spPr>
-          <a:xfrm>
-            <a:off x="978408" y="4901184"/>
-            <a:ext cx="4572000" cy="292608"/>
-          </a:xfrm>
-          <a:prstGeom prst="rect">
-            <a:avLst/>
-          </a:prstGeom>
-          <a:noFill/>
-          <a:ln/>
-        </p:spPr>
-        <p:txBody>
-          <a:bodyPr wrap="square" lIns="0" tIns="0" rIns="0" bIns="0" rtlCol="0" anchor="ctr"/>
-          <a:lstStyle/>
-          <a:p>
-            <a:pPr indent="0" marL="0">
-              <a:buNone/>
-            </a:pPr>
-            <a:r>
-              <a:rPr lang="en-US" sz="1400" b="1" dirty="0">
-                <a:solidFill>
-                  <a:srgbClr val="E8EEF8"/>
-                </a:solidFill>
-                <a:latin typeface="Calibri" pitchFamily="34" charset="0"/>
-                <a:ea typeface="Calibri" pitchFamily="34" charset="-122"/>
-                <a:cs typeface="Calibri" pitchFamily="34" charset="-120"/>
-              </a:rPr>
-              <a:t>Video counts are inflated</a:t>
-            </a:r>
-            <a:endParaRPr lang="en-US" sz="1400" dirty="0"/>
-          </a:p>
-        </p:txBody>
-      </p:sp>
-      <p:sp>
-        <p:nvSpPr>
-          <p:cNvPr id="21" name="Text 19"/>
-          <p:cNvSpPr txBox="1"/>
-          <p:nvPr/>
-        </p:nvSpPr>
-        <p:spPr>
-          <a:xfrm>
-            <a:off x="978408" y="5212080"/>
-            <a:ext cx="4617720" cy="457200"/>
-          </a:xfrm>
-          <a:prstGeom prst="rect">
-            <a:avLst/>
-          </a:prstGeom>
-          <a:noFill/>
-          <a:ln/>
-        </p:spPr>
-        <p:txBody>
-          <a:bodyPr wrap="square" lIns="0" tIns="0" rIns="0" bIns="0" rtlCol="0" anchor="ctr"/>
-          <a:lstStyle/>
-          <a:p>
-            <a:pPr indent="0" marL="0">
-              <a:buNone/>
-            </a:pPr>
-            <a:r>
-              <a:rPr lang="en-US" sz="1150" dirty="0">
-                <a:solidFill>
-                  <a:srgbClr val="9FB0CC"/>
-                </a:solidFill>
-                <a:latin typeface="Calibri" pitchFamily="34" charset="0"/>
-                <a:ea typeface="Calibri" pitchFamily="34" charset="-122"/>
-                <a:cs typeface="Calibri" pitchFamily="34" charset="-120"/>
-              </a:rPr>
-              <a:t>Frames are analysed independently, so one crack can be counted many times.</a:t>
-            </a:r>
-            <a:endParaRPr lang="en-US" sz="1150" dirty="0"/>
+              <a:t>Click any marker for its source image and score</a:t>
+            </a:r>
+            <a:endParaRPr lang="en-US" sz="1250" dirty="0"/>
           </a:p>
         </p:txBody>
       </p:sp>
@@ -10233,32 +11178,16 @@
         </p:nvSpPr>
         <p:spPr>
           <a:xfrm>
-            <a:off x="6217920" y="4773168"/>
-            <a:ext cx="5120640" cy="987552"/>
-          </a:xfrm>
-          <a:prstGeom prst="roundRect">
-            <a:avLst>
-              <a:gd name="adj" fmla="val 11111"/>
-            </a:avLst>
+            <a:off x="6629400" y="4078224"/>
+            <a:ext cx="91440" cy="91440"/>
+          </a:xfrm>
+          <a:prstGeom prst="ellipse">
+            <a:avLst/>
           </a:prstGeom>
           <a:solidFill>
-            <a:srgbClr val="111A2E">
-              <a:alpha val="82000"/>
-            </a:srgbClr>
+            <a:srgbClr val="A78BFA"/>
           </a:solidFill>
-          <a:ln w="12700">
-            <a:solidFill>
-              <a:srgbClr val="1E2B44"/>
-            </a:solidFill>
-            <a:prstDash val="solid"/>
-          </a:ln>
-          <a:effectLst>
-            <a:outerShdw sx="100000" sy="100000" kx="0" ky="0" algn="bl" rotWithShape="0" blurRad="177800" dist="38100" dir="5400000">
-              <a:srgbClr val="000000">
-                <a:alpha val="35000"/>
-              </a:srgbClr>
-            </a:outerShdw>
-          </a:effectLst>
+          <a:ln/>
         </p:spPr>
       </p:sp>
       <p:sp>
@@ -10269,63 +11198,24 @@
         </p:nvSpPr>
         <p:spPr>
           <a:xfrm>
-            <a:off x="6510528" y="4901184"/>
-            <a:ext cx="4572000" cy="292608"/>
-          </a:xfrm>
-          <a:prstGeom prst="rect">
-            <a:avLst/>
-          </a:prstGeom>
-          <a:noFill/>
-          <a:ln/>
-        </p:spPr>
-        <p:txBody>
-          <a:bodyPr wrap="square" lIns="0" tIns="0" rIns="0" bIns="0" rtlCol="0" anchor="ctr"/>
-          <a:lstStyle/>
-          <a:p>
-            <a:pPr indent="0" marL="0">
-              <a:buNone/>
-            </a:pPr>
-            <a:r>
-              <a:rPr lang="en-US" sz="1400" b="1" dirty="0">
-                <a:solidFill>
-                  <a:srgbClr val="E8EEF8"/>
-                </a:solidFill>
-                <a:latin typeface="Calibri" pitchFamily="34" charset="0"/>
-                <a:ea typeface="Calibri" pitchFamily="34" charset="-122"/>
-                <a:cs typeface="Calibri" pitchFamily="34" charset="-120"/>
-              </a:rPr>
-              <a:t>Not an engineering assessment</a:t>
-            </a:r>
-            <a:endParaRPr lang="en-US" sz="1400" dirty="0"/>
-          </a:p>
-        </p:txBody>
-      </p:sp>
-      <p:sp>
-        <p:nvSpPr>
-          <p:cNvPr id="24" name="Text 22"/>
-          <p:cNvSpPr txBox="1"/>
-          <p:nvPr/>
-        </p:nvSpPr>
-        <p:spPr>
-          <a:xfrm>
-            <a:off x="6510528" y="5212080"/>
-            <a:ext cx="4617720" cy="457200"/>
-          </a:xfrm>
-          <a:prstGeom prst="rect">
-            <a:avLst/>
-          </a:prstGeom>
-          <a:noFill/>
-          <a:ln/>
-        </p:spPr>
-        <p:txBody>
-          <a:bodyPr wrap="square" lIns="0" tIns="0" rIns="0" bIns="0" rtlCol="0" anchor="ctr"/>
-          <a:lstStyle/>
-          <a:p>
-            <a:pPr indent="0" marL="0">
-              <a:buNone/>
-            </a:pPr>
-            <a:r>
-              <a:rPr lang="en-US" sz="1150" dirty="0">
+            <a:off x="6848856" y="4005072"/>
+            <a:ext cx="4297680" cy="365760"/>
+          </a:xfrm>
+          <a:prstGeom prst="rect">
+            <a:avLst/>
+          </a:prstGeom>
+          <a:noFill/>
+          <a:ln/>
+        </p:spPr>
+        <p:txBody>
+          <a:bodyPr wrap="square" lIns="0" tIns="0" rIns="0" bIns="0" rtlCol="0" anchor="ctr"/>
+          <a:lstStyle/>
+          <a:p>
+            <a:pPr indent="0" marL="0">
+              <a:buNone/>
+            </a:pPr>
+            <a:r>
+              <a:rPr lang="en-US" sz="1250" dirty="0">
                 <a:solidFill>
                   <a:srgbClr val="9FB0CC"/>
                 </a:solidFill>
@@ -10333,48 +11223,107 @@
                 <a:ea typeface="Calibri" pitchFamily="34" charset="-122"/>
                 <a:cs typeface="Calibri" pitchFamily="34" charset="-120"/>
               </a:rPr>
-              <a:t>It is a screening pass. A qualified engineer still signs off.</a:t>
+              <a:t>Built in code — no scanning rig required</a:t>
+            </a:r>
+            <a:endParaRPr lang="en-US" sz="1250" dirty="0"/>
+          </a:p>
+        </p:txBody>
+      </p:sp>
+      <p:sp>
+        <p:nvSpPr>
+          <p:cNvPr id="24" name="Shape 22"/>
+          <p:cNvSpPr/>
+          <p:nvPr/>
+        </p:nvSpPr>
+        <p:spPr>
+          <a:xfrm>
+            <a:off x="6629400" y="4581144"/>
+            <a:ext cx="91440" cy="91440"/>
+          </a:xfrm>
+          <a:prstGeom prst="ellipse">
+            <a:avLst/>
+          </a:prstGeom>
+          <a:solidFill>
+            <a:srgbClr val="A78BFA"/>
+          </a:solidFill>
+          <a:ln/>
+        </p:spPr>
+      </p:sp>
+      <p:sp>
+        <p:nvSpPr>
+          <p:cNvPr id="25" name="Text 23"/>
+          <p:cNvSpPr txBox="1"/>
+          <p:nvPr/>
+        </p:nvSpPr>
+        <p:spPr>
+          <a:xfrm>
+            <a:off x="6848856" y="4507992"/>
+            <a:ext cx="4297680" cy="365760"/>
+          </a:xfrm>
+          <a:prstGeom prst="rect">
+            <a:avLst/>
+          </a:prstGeom>
+          <a:noFill/>
+          <a:ln/>
+        </p:spPr>
+        <p:txBody>
+          <a:bodyPr wrap="square" lIns="0" tIns="0" rIns="0" bIns="0" rtlCol="0" anchor="ctr"/>
+          <a:lstStyle/>
+          <a:p>
+            <a:pPr indent="0" marL="0">
+              <a:buNone/>
+            </a:pPr>
+            <a:r>
+              <a:rPr lang="en-US" sz="1250" dirty="0">
+                <a:solidFill>
+                  <a:srgbClr val="9FB0CC"/>
+                </a:solidFill>
+                <a:latin typeface="Calibri" pitchFamily="34" charset="0"/>
+                <a:ea typeface="Calibri" pitchFamily="34" charset="-122"/>
+                <a:cs typeface="Calibri" pitchFamily="34" charset="-120"/>
+              </a:rPr>
+              <a:t>Illustrative placement, and we say so on screen</a:t>
+            </a:r>
+            <a:endParaRPr lang="en-US" sz="1250" dirty="0"/>
+          </a:p>
+        </p:txBody>
+      </p:sp>
+      <p:sp>
+        <p:nvSpPr>
+          <p:cNvPr id="26" name="Text 24"/>
+          <p:cNvSpPr txBox="1"/>
+          <p:nvPr/>
+        </p:nvSpPr>
+        <p:spPr>
+          <a:xfrm>
+            <a:off x="685800" y="5715000"/>
+            <a:ext cx="10789920" cy="320040"/>
+          </a:xfrm>
+          <a:prstGeom prst="rect">
+            <a:avLst/>
+          </a:prstGeom>
+          <a:noFill/>
+          <a:ln/>
+        </p:spPr>
+        <p:txBody>
+          <a:bodyPr wrap="square" lIns="0" tIns="0" rIns="0" bIns="0" rtlCol="0" anchor="ctr"/>
+          <a:lstStyle/>
+          <a:p>
+            <a:pPr algn="ctr" indent="0" marL="0">
+              <a:buNone/>
+            </a:pPr>
+            <a:r>
+              <a:rPr lang="en-US" sz="1150" i="1" dirty="0">
+                <a:solidFill>
+                  <a:srgbClr val="64748B"/>
+                </a:solidFill>
+                <a:latin typeface="Calibri" pitchFamily="34" charset="0"/>
+                <a:ea typeface="Calibri" pitchFamily="34" charset="-122"/>
+                <a:cs typeface="Calibri" pitchFamily="34" charset="-120"/>
+              </a:rPr>
+              <a:t>[ Replace this line with a screenshot of the dashboard and the 3D viewer ]</a:t>
             </a:r>
             <a:endParaRPr lang="en-US" sz="1150" dirty="0"/>
-          </a:p>
-        </p:txBody>
-      </p:sp>
-      <p:sp>
-        <p:nvSpPr>
-          <p:cNvPr id="25" name="Text 23"/>
-          <p:cNvSpPr txBox="1"/>
-          <p:nvPr/>
-        </p:nvSpPr>
-        <p:spPr>
-          <a:xfrm>
-            <a:off x="685800" y="5943600"/>
-            <a:ext cx="10789920" cy="320040"/>
-          </a:xfrm>
-          <a:prstGeom prst="rect">
-            <a:avLst/>
-          </a:prstGeom>
-          <a:noFill/>
-          <a:ln/>
-        </p:spPr>
-        <p:txBody>
-          <a:bodyPr wrap="square" lIns="0" tIns="0" rIns="0" bIns="0" rtlCol="0" anchor="ctr"/>
-          <a:lstStyle/>
-          <a:p>
-            <a:pPr algn="ctr" indent="0" marL="0">
-              <a:buNone/>
-            </a:pPr>
-            <a:r>
-              <a:rPr lang="en-US" sz="1400" i="1" dirty="0">
-                <a:solidFill>
-                  <a:srgbClr val="22D3EE"/>
-                </a:solidFill>
-                <a:latin typeface="Calibri" pitchFamily="34" charset="0"/>
-                <a:ea typeface="Calibri" pitchFamily="34" charset="-122"/>
-                <a:cs typeface="Calibri" pitchFamily="34" charset="-120"/>
-              </a:rPr>
-              <a:t>Naming a weakness costs far less than being caught by it.</a:t>
-            </a:r>
-            <a:endParaRPr lang="en-US" sz="1400" dirty="0"/>
           </a:p>
         </p:txBody>
       </p:sp>
@@ -10487,7 +11436,7 @@
                 <a:ea typeface="Calibri" pitchFamily="34" charset="-122"/>
                 <a:cs typeface="Calibri" pitchFamily="34" charset="-120"/>
               </a:rPr>
-              <a:t>UNDER THE HOOD</a:t>
+              <a:t>WHAT IT DOES NOT DO</a:t>
             </a:r>
             <a:endParaRPr lang="en-US" sz="1100" dirty="0"/>
           </a:p>
@@ -10526,7 +11475,7 @@
                 <a:ea typeface="Calibri" pitchFamily="34" charset="-122"/>
                 <a:cs typeface="Calibri" pitchFamily="34" charset="-120"/>
               </a:rPr>
-              <a:t>Boring technology, deliberately.</a:t>
+              <a:t>We measured the weaknesses too.</a:t>
             </a:r>
             <a:endParaRPr lang="en-US" sz="3800" dirty="0"/>
           </a:p>
@@ -10534,18 +11483,57 @@
       </p:sp>
       <p:sp>
         <p:nvSpPr>
-          <p:cNvPr id="6" name="Shape 4"/>
+          <p:cNvPr id="6" name="Text 4"/>
+          <p:cNvSpPr txBox="1"/>
+          <p:nvPr/>
+        </p:nvSpPr>
+        <p:spPr>
+          <a:xfrm>
+            <a:off x="685800" y="1783080"/>
+            <a:ext cx="10515600" cy="320040"/>
+          </a:xfrm>
+          <a:prstGeom prst="rect">
+            <a:avLst/>
+          </a:prstGeom>
+          <a:noFill/>
+          <a:ln/>
+        </p:spPr>
+        <p:txBody>
+          <a:bodyPr wrap="square" lIns="0" tIns="0" rIns="0" bIns="0" rtlCol="0" anchor="ctr"/>
+          <a:lstStyle/>
+          <a:p>
+            <a:pPr indent="0" marL="0">
+              <a:buNone/>
+            </a:pPr>
+            <a:r>
+              <a:rPr lang="en-US" sz="1350" dirty="0">
+                <a:solidFill>
+                  <a:srgbClr val="22D3EE"/>
+                </a:solidFill>
+                <a:latin typeface="Calibri" pitchFamily="34" charset="0"/>
+                <a:ea typeface="Calibri" pitchFamily="34" charset="-122"/>
+                <a:cs typeface="Calibri" pitchFamily="34" charset="-120"/>
+              </a:rPr>
+              <a:t>Every one of these is stated in the product itself and on the last page of every report.</a:t>
+            </a:r>
+            <a:endParaRPr lang="en-US" sz="1350" dirty="0"/>
+          </a:p>
+        </p:txBody>
+      </p:sp>
+      <p:sp>
+        <p:nvSpPr>
+          <p:cNvPr id="7" name="Shape 5"/>
           <p:cNvSpPr/>
           <p:nvPr/>
         </p:nvSpPr>
         <p:spPr>
           <a:xfrm>
-            <a:off x="685800" y="2240280"/>
-            <a:ext cx="6492240" cy="585216"/>
+            <a:off x="685800" y="2395728"/>
+            <a:ext cx="3429000" cy="1143000"/>
           </a:xfrm>
           <a:prstGeom prst="roundRect">
             <a:avLst>
-              <a:gd name="adj" fmla="val 18750"/>
+              <a:gd name="adj" fmla="val 9600"/>
             </a:avLst>
           </a:prstGeom>
           <a:solidFill>
@@ -10570,50 +11558,30 @@
       </p:sp>
       <p:sp>
         <p:nvSpPr>
-          <p:cNvPr id="7" name="Shape 5"/>
-          <p:cNvSpPr/>
-          <p:nvPr/>
-        </p:nvSpPr>
-        <p:spPr>
-          <a:xfrm>
-            <a:off x="960120" y="2468880"/>
-            <a:ext cx="128016" cy="128016"/>
-          </a:xfrm>
-          <a:prstGeom prst="ellipse">
-            <a:avLst/>
-          </a:prstGeom>
-          <a:solidFill>
-            <a:srgbClr val="22D3EE"/>
-          </a:solidFill>
-          <a:ln/>
-        </p:spPr>
-      </p:sp>
-      <p:sp>
-        <p:nvSpPr>
           <p:cNvPr id="8" name="Text 6"/>
           <p:cNvSpPr txBox="1"/>
           <p:nvPr/>
         </p:nvSpPr>
         <p:spPr>
           <a:xfrm>
-            <a:off x="1234440" y="2377440"/>
-            <a:ext cx="1463040" cy="310896"/>
-          </a:xfrm>
-          <a:prstGeom prst="rect">
-            <a:avLst/>
-          </a:prstGeom>
-          <a:noFill/>
-          <a:ln/>
-        </p:spPr>
-        <p:txBody>
-          <a:bodyPr wrap="square" lIns="0" tIns="0" rIns="0" bIns="0" rtlCol="0" anchor="ctr"/>
-          <a:lstStyle/>
-          <a:p>
-            <a:pPr indent="0" marL="0">
-              <a:buNone/>
-            </a:pPr>
-            <a:r>
-              <a:rPr lang="en-US" sz="1350" b="1" dirty="0">
+            <a:off x="923544" y="2514600"/>
+            <a:ext cx="2971800" cy="274320"/>
+          </a:xfrm>
+          <a:prstGeom prst="rect">
+            <a:avLst/>
+          </a:prstGeom>
+          <a:noFill/>
+          <a:ln/>
+        </p:spPr>
+        <p:txBody>
+          <a:bodyPr wrap="square" lIns="0" tIns="0" rIns="0" bIns="0" rtlCol="0" anchor="ctr"/>
+          <a:lstStyle/>
+          <a:p>
+            <a:pPr indent="0" marL="0">
+              <a:buNone/>
+            </a:pPr>
+            <a:r>
+              <a:rPr lang="en-US" sz="1300" b="1" dirty="0">
                 <a:solidFill>
                   <a:srgbClr val="E8EEF8"/>
                 </a:solidFill>
@@ -10621,9 +11589,9 @@
                 <a:ea typeface="Calibri" pitchFamily="34" charset="-122"/>
                 <a:cs typeface="Calibri" pitchFamily="34" charset="-120"/>
               </a:rPr>
-              <a:t>Frontend</a:t>
-            </a:r>
-            <a:endParaRPr lang="en-US" sz="1350" dirty="0"/>
+              <a:t>Cracks only</a:t>
+            </a:r>
+            <a:endParaRPr lang="en-US" sz="1300" dirty="0"/>
           </a:p>
         </p:txBody>
       </p:sp>
@@ -10635,24 +11603,27 @@
         </p:nvSpPr>
         <p:spPr>
           <a:xfrm>
-            <a:off x="2697480" y="2386584"/>
-            <a:ext cx="4297680" cy="310896"/>
-          </a:xfrm>
-          <a:prstGeom prst="rect">
-            <a:avLst/>
-          </a:prstGeom>
-          <a:noFill/>
-          <a:ln/>
-        </p:spPr>
-        <p:txBody>
-          <a:bodyPr wrap="square" lIns="0" tIns="0" rIns="0" bIns="0" rtlCol="0" anchor="ctr"/>
-          <a:lstStyle/>
-          <a:p>
-            <a:pPr indent="0" marL="0">
-              <a:buNone/>
-            </a:pPr>
-            <a:r>
-              <a:rPr lang="en-US" sz="1150" dirty="0">
+            <a:off x="923544" y="2807208"/>
+            <a:ext cx="3017520" cy="658368"/>
+          </a:xfrm>
+          <a:prstGeom prst="rect">
+            <a:avLst/>
+          </a:prstGeom>
+          <a:noFill/>
+          <a:ln/>
+        </p:spPr>
+        <p:txBody>
+          <a:bodyPr wrap="square" lIns="0" tIns="0" rIns="0" bIns="0" rtlCol="0" anchor="ctr"/>
+          <a:lstStyle/>
+          <a:p>
+            <a:pPr indent="0" marL="0">
+              <a:lnSpc>
+                <a:spcPct val="105000"/>
+              </a:lnSpc>
+              <a:buNone/>
+            </a:pPr>
+            <a:r>
+              <a:rPr lang="en-US" sz="1050" dirty="0">
                 <a:solidFill>
                   <a:srgbClr val="9FB0CC"/>
                 </a:solidFill>
@@ -10660,9 +11631,9 @@
                 <a:ea typeface="Calibri" pitchFamily="34" charset="-122"/>
                 <a:cs typeface="Calibri" pitchFamily="34" charset="-120"/>
               </a:rPr>
-              <a:t>Next.js 16 · React 19 · Three.js · Tailwind</a:t>
-            </a:r>
-            <a:endParaRPr lang="en-US" sz="1150" dirty="0"/>
+              <a:t>One defect class. It has never seen corrosion or spalling and will not report them.</a:t>
+            </a:r>
+            <a:endParaRPr lang="en-US" sz="1050" dirty="0"/>
           </a:p>
         </p:txBody>
       </p:sp>
@@ -10674,12 +11645,12 @@
         </p:nvSpPr>
         <p:spPr>
           <a:xfrm>
-            <a:off x="685800" y="2953512"/>
-            <a:ext cx="6492240" cy="585216"/>
+            <a:off x="4370832" y="2395728"/>
+            <a:ext cx="3429000" cy="1143000"/>
           </a:xfrm>
           <a:prstGeom prst="roundRect">
             <a:avLst>
-              <a:gd name="adj" fmla="val 18750"/>
+              <a:gd name="adj" fmla="val 9600"/>
             </a:avLst>
           </a:prstGeom>
           <a:solidFill>
@@ -10704,116 +11675,99 @@
       </p:sp>
       <p:sp>
         <p:nvSpPr>
-          <p:cNvPr id="11" name="Shape 9"/>
+          <p:cNvPr id="11" name="Text 9"/>
+          <p:cNvSpPr txBox="1"/>
+          <p:nvPr/>
+        </p:nvSpPr>
+        <p:spPr>
+          <a:xfrm>
+            <a:off x="4608576" y="2514600"/>
+            <a:ext cx="2971800" cy="274320"/>
+          </a:xfrm>
+          <a:prstGeom prst="rect">
+            <a:avLst/>
+          </a:prstGeom>
+          <a:noFill/>
+          <a:ln/>
+        </p:spPr>
+        <p:txBody>
+          <a:bodyPr wrap="square" lIns="0" tIns="0" rIns="0" bIns="0" rtlCol="0" anchor="ctr"/>
+          <a:lstStyle/>
+          <a:p>
+            <a:pPr indent="0" marL="0">
+              <a:buNone/>
+            </a:pPr>
+            <a:r>
+              <a:rPr lang="en-US" sz="1300" b="1" dirty="0">
+                <a:solidFill>
+                  <a:srgbClr val="E8EEF8"/>
+                </a:solidFill>
+                <a:latin typeface="Calibri" pitchFamily="34" charset="0"/>
+                <a:ea typeface="Calibri" pitchFamily="34" charset="-122"/>
+                <a:cs typeface="Calibri" pitchFamily="34" charset="-120"/>
+              </a:rPr>
+              <a:t>1 in 5 clean surfaces flagged</a:t>
+            </a:r>
+            <a:endParaRPr lang="en-US" sz="1300" dirty="0"/>
+          </a:p>
+        </p:txBody>
+      </p:sp>
+      <p:sp>
+        <p:nvSpPr>
+          <p:cNvPr id="12" name="Text 10"/>
+          <p:cNvSpPr txBox="1"/>
+          <p:nvPr/>
+        </p:nvSpPr>
+        <p:spPr>
+          <a:xfrm>
+            <a:off x="4608576" y="2807208"/>
+            <a:ext cx="3017520" cy="658368"/>
+          </a:xfrm>
+          <a:prstGeom prst="rect">
+            <a:avLst/>
+          </a:prstGeom>
+          <a:noFill/>
+          <a:ln/>
+        </p:spPr>
+        <p:txBody>
+          <a:bodyPr wrap="square" lIns="0" tIns="0" rIns="0" bIns="0" rtlCol="0" anchor="ctr"/>
+          <a:lstStyle/>
+          <a:p>
+            <a:pPr indent="0" marL="0">
+              <a:lnSpc>
+                <a:spcPct val="105000"/>
+              </a:lnSpc>
+              <a:buNone/>
+            </a:pPr>
+            <a:r>
+              <a:rPr lang="en-US" sz="1050" dirty="0">
+                <a:solidFill>
+                  <a:srgbClr val="9FB0CC"/>
+                </a:solidFill>
+                <a:latin typeface="Calibri" pitchFamily="34" charset="0"/>
+                <a:ea typeface="Calibri" pitchFamily="34" charset="-122"/>
+                <a:cs typeface="Calibri" pitchFamily="34" charset="-120"/>
+              </a:rPr>
+              <a:t>Measured against 94 defect-free photographs. It errs toward flagging.</a:t>
+            </a:r>
+            <a:endParaRPr lang="en-US" sz="1050" dirty="0"/>
+          </a:p>
+        </p:txBody>
+      </p:sp>
+      <p:sp>
+        <p:nvSpPr>
+          <p:cNvPr id="13" name="Shape 11"/>
           <p:cNvSpPr/>
           <p:nvPr/>
         </p:nvSpPr>
         <p:spPr>
           <a:xfrm>
-            <a:off x="960120" y="3182112"/>
-            <a:ext cx="128016" cy="128016"/>
-          </a:xfrm>
-          <a:prstGeom prst="ellipse">
-            <a:avLst/>
-          </a:prstGeom>
-          <a:solidFill>
-            <a:srgbClr val="6366F1"/>
-          </a:solidFill>
-          <a:ln/>
-        </p:spPr>
-      </p:sp>
-      <p:sp>
-        <p:nvSpPr>
-          <p:cNvPr id="12" name="Text 10"/>
-          <p:cNvSpPr txBox="1"/>
-          <p:nvPr/>
-        </p:nvSpPr>
-        <p:spPr>
-          <a:xfrm>
-            <a:off x="1234440" y="3090672"/>
-            <a:ext cx="1463040" cy="310896"/>
-          </a:xfrm>
-          <a:prstGeom prst="rect">
-            <a:avLst/>
-          </a:prstGeom>
-          <a:noFill/>
-          <a:ln/>
-        </p:spPr>
-        <p:txBody>
-          <a:bodyPr wrap="square" lIns="0" tIns="0" rIns="0" bIns="0" rtlCol="0" anchor="ctr"/>
-          <a:lstStyle/>
-          <a:p>
-            <a:pPr indent="0" marL="0">
-              <a:buNone/>
-            </a:pPr>
-            <a:r>
-              <a:rPr lang="en-US" sz="1350" b="1" dirty="0">
-                <a:solidFill>
-                  <a:srgbClr val="E8EEF8"/>
-                </a:solidFill>
-                <a:latin typeface="Calibri" pitchFamily="34" charset="0"/>
-                <a:ea typeface="Calibri" pitchFamily="34" charset="-122"/>
-                <a:cs typeface="Calibri" pitchFamily="34" charset="-120"/>
-              </a:rPr>
-              <a:t>API</a:t>
-            </a:r>
-            <a:endParaRPr lang="en-US" sz="1350" dirty="0"/>
-          </a:p>
-        </p:txBody>
-      </p:sp>
-      <p:sp>
-        <p:nvSpPr>
-          <p:cNvPr id="13" name="Text 11"/>
-          <p:cNvSpPr txBox="1"/>
-          <p:nvPr/>
-        </p:nvSpPr>
-        <p:spPr>
-          <a:xfrm>
-            <a:off x="2697480" y="3099816"/>
-            <a:ext cx="4297680" cy="310896"/>
-          </a:xfrm>
-          <a:prstGeom prst="rect">
-            <a:avLst/>
-          </a:prstGeom>
-          <a:noFill/>
-          <a:ln/>
-        </p:spPr>
-        <p:txBody>
-          <a:bodyPr wrap="square" lIns="0" tIns="0" rIns="0" bIns="0" rtlCol="0" anchor="ctr"/>
-          <a:lstStyle/>
-          <a:p>
-            <a:pPr indent="0" marL="0">
-              <a:buNone/>
-            </a:pPr>
-            <a:r>
-              <a:rPr lang="en-US" sz="1150" dirty="0">
-                <a:solidFill>
-                  <a:srgbClr val="9FB0CC"/>
-                </a:solidFill>
-                <a:latin typeface="Calibri" pitchFamily="34" charset="0"/>
-                <a:ea typeface="Calibri" pitchFamily="34" charset="-122"/>
-                <a:cs typeface="Calibri" pitchFamily="34" charset="-120"/>
-              </a:rPr>
-              <a:t>FastAPI · Python 3.12 · SQLAlchemy · Alembic</a:t>
-            </a:r>
-            <a:endParaRPr lang="en-US" sz="1150" dirty="0"/>
-          </a:p>
-        </p:txBody>
-      </p:sp>
-      <p:sp>
-        <p:nvSpPr>
-          <p:cNvPr id="14" name="Shape 12"/>
-          <p:cNvSpPr/>
-          <p:nvPr/>
-        </p:nvSpPr>
-        <p:spPr>
-          <a:xfrm>
-            <a:off x="685800" y="3666744"/>
-            <a:ext cx="6492240" cy="585216"/>
+            <a:off x="8055864" y="2395728"/>
+            <a:ext cx="3429000" cy="1143000"/>
           </a:xfrm>
           <a:prstGeom prst="roundRect">
             <a:avLst>
-              <a:gd name="adj" fmla="val 18750"/>
+              <a:gd name="adj" fmla="val 9600"/>
             </a:avLst>
           </a:prstGeom>
           <a:solidFill>
@@ -10838,116 +11792,99 @@
       </p:sp>
       <p:sp>
         <p:nvSpPr>
-          <p:cNvPr id="15" name="Shape 13"/>
+          <p:cNvPr id="14" name="Text 12"/>
+          <p:cNvSpPr txBox="1"/>
+          <p:nvPr/>
+        </p:nvSpPr>
+        <p:spPr>
+          <a:xfrm>
+            <a:off x="8293608" y="2514600"/>
+            <a:ext cx="2971800" cy="274320"/>
+          </a:xfrm>
+          <a:prstGeom prst="rect">
+            <a:avLst/>
+          </a:prstGeom>
+          <a:noFill/>
+          <a:ln/>
+        </p:spPr>
+        <p:txBody>
+          <a:bodyPr wrap="square" lIns="0" tIns="0" rIns="0" bIns="0" rtlCol="0" anchor="ctr"/>
+          <a:lstStyle/>
+          <a:p>
+            <a:pPr indent="0" marL="0">
+              <a:buNone/>
+            </a:pPr>
+            <a:r>
+              <a:rPr lang="en-US" sz="1300" b="1" dirty="0">
+                <a:solidFill>
+                  <a:srgbClr val="E8EEF8"/>
+                </a:solidFill>
+                <a:latin typeface="Calibri" pitchFamily="34" charset="0"/>
+                <a:ea typeface="Calibri" pitchFamily="34" charset="-122"/>
+                <a:cs typeface="Calibri" pitchFamily="34" charset="-120"/>
+              </a:rPr>
+              <a:t>63% on unfamiliar imagery</a:t>
+            </a:r>
+            <a:endParaRPr lang="en-US" sz="1300" dirty="0"/>
+          </a:p>
+        </p:txBody>
+      </p:sp>
+      <p:sp>
+        <p:nvSpPr>
+          <p:cNvPr id="15" name="Text 13"/>
+          <p:cNvSpPr txBox="1"/>
+          <p:nvPr/>
+        </p:nvSpPr>
+        <p:spPr>
+          <a:xfrm>
+            <a:off x="8293608" y="2807208"/>
+            <a:ext cx="3017520" cy="658368"/>
+          </a:xfrm>
+          <a:prstGeom prst="rect">
+            <a:avLst/>
+          </a:prstGeom>
+          <a:noFill/>
+          <a:ln/>
+        </p:spPr>
+        <p:txBody>
+          <a:bodyPr wrap="square" lIns="0" tIns="0" rIns="0" bIns="0" rtlCol="0" anchor="ctr"/>
+          <a:lstStyle/>
+          <a:p>
+            <a:pPr indent="0" marL="0">
+              <a:lnSpc>
+                <a:spcPct val="105000"/>
+              </a:lnSpc>
+              <a:buNone/>
+            </a:pPr>
+            <a:r>
+              <a:rPr lang="en-US" sz="1050" dirty="0">
+                <a:solidFill>
+                  <a:srgbClr val="9FB0CC"/>
+                </a:solidFill>
+                <a:latin typeface="Calibri" pitchFamily="34" charset="0"/>
+                <a:ea typeface="Calibri" pitchFamily="34" charset="-122"/>
+                <a:cs typeface="Calibri" pitchFamily="34" charset="-120"/>
+              </a:rPr>
+              <a:t>Versus 81% on imagery like its training data. Measured, not estimated.</a:t>
+            </a:r>
+            <a:endParaRPr lang="en-US" sz="1050" dirty="0"/>
+          </a:p>
+        </p:txBody>
+      </p:sp>
+      <p:sp>
+        <p:nvSpPr>
+          <p:cNvPr id="16" name="Shape 14"/>
           <p:cNvSpPr/>
           <p:nvPr/>
         </p:nvSpPr>
         <p:spPr>
           <a:xfrm>
-            <a:off x="960120" y="3895344"/>
-            <a:ext cx="128016" cy="128016"/>
-          </a:xfrm>
-          <a:prstGeom prst="ellipse">
-            <a:avLst/>
-          </a:prstGeom>
-          <a:solidFill>
-            <a:srgbClr val="A78BFA"/>
-          </a:solidFill>
-          <a:ln/>
-        </p:spPr>
-      </p:sp>
-      <p:sp>
-        <p:nvSpPr>
-          <p:cNvPr id="16" name="Text 14"/>
-          <p:cNvSpPr txBox="1"/>
-          <p:nvPr/>
-        </p:nvSpPr>
-        <p:spPr>
-          <a:xfrm>
-            <a:off x="1234440" y="3803904"/>
-            <a:ext cx="1463040" cy="310896"/>
-          </a:xfrm>
-          <a:prstGeom prst="rect">
-            <a:avLst/>
-          </a:prstGeom>
-          <a:noFill/>
-          <a:ln/>
-        </p:spPr>
-        <p:txBody>
-          <a:bodyPr wrap="square" lIns="0" tIns="0" rIns="0" bIns="0" rtlCol="0" anchor="ctr"/>
-          <a:lstStyle/>
-          <a:p>
-            <a:pPr indent="0" marL="0">
-              <a:buNone/>
-            </a:pPr>
-            <a:r>
-              <a:rPr lang="en-US" sz="1350" b="1" dirty="0">
-                <a:solidFill>
-                  <a:srgbClr val="E8EEF8"/>
-                </a:solidFill>
-                <a:latin typeface="Calibri" pitchFamily="34" charset="0"/>
-                <a:ea typeface="Calibri" pitchFamily="34" charset="-122"/>
-                <a:cs typeface="Calibri" pitchFamily="34" charset="-120"/>
-              </a:rPr>
-              <a:t>Model</a:t>
-            </a:r>
-            <a:endParaRPr lang="en-US" sz="1350" dirty="0"/>
-          </a:p>
-        </p:txBody>
-      </p:sp>
-      <p:sp>
-        <p:nvSpPr>
-          <p:cNvPr id="17" name="Text 15"/>
-          <p:cNvSpPr txBox="1"/>
-          <p:nvPr/>
-        </p:nvSpPr>
-        <p:spPr>
-          <a:xfrm>
-            <a:off x="2697480" y="3813048"/>
-            <a:ext cx="4297680" cy="310896"/>
-          </a:xfrm>
-          <a:prstGeom prst="rect">
-            <a:avLst/>
-          </a:prstGeom>
-          <a:noFill/>
-          <a:ln/>
-        </p:spPr>
-        <p:txBody>
-          <a:bodyPr wrap="square" lIns="0" tIns="0" rIns="0" bIns="0" rtlCol="0" anchor="ctr"/>
-          <a:lstStyle/>
-          <a:p>
-            <a:pPr indent="0" marL="0">
-              <a:buNone/>
-            </a:pPr>
-            <a:r>
-              <a:rPr lang="en-US" sz="1150" dirty="0">
-                <a:solidFill>
-                  <a:srgbClr val="9FB0CC"/>
-                </a:solidFill>
-                <a:latin typeface="Calibri" pitchFamily="34" charset="0"/>
-                <a:ea typeface="Calibri" pitchFamily="34" charset="-122"/>
-                <a:cs typeface="Calibri" pitchFamily="34" charset="-120"/>
-              </a:rPr>
-              <a:t>YOLOv11n fine-tuned · PyTorch 2.13 · CUDA 13</a:t>
-            </a:r>
-            <a:endParaRPr lang="en-US" sz="1150" dirty="0"/>
-          </a:p>
-        </p:txBody>
-      </p:sp>
-      <p:sp>
-        <p:nvSpPr>
-          <p:cNvPr id="18" name="Shape 16"/>
-          <p:cNvSpPr/>
-          <p:nvPr/>
-        </p:nvSpPr>
-        <p:spPr>
-          <a:xfrm>
-            <a:off x="685800" y="4379976"/>
-            <a:ext cx="6492240" cy="585216"/>
+            <a:off x="685800" y="3675888"/>
+            <a:ext cx="3429000" cy="1143000"/>
           </a:xfrm>
           <a:prstGeom prst="roundRect">
             <a:avLst>
-              <a:gd name="adj" fmla="val 18750"/>
+              <a:gd name="adj" fmla="val 9600"/>
             </a:avLst>
           </a:prstGeom>
           <a:solidFill>
@@ -10972,116 +11909,99 @@
       </p:sp>
       <p:sp>
         <p:nvSpPr>
+          <p:cNvPr id="17" name="Text 15"/>
+          <p:cNvSpPr txBox="1"/>
+          <p:nvPr/>
+        </p:nvSpPr>
+        <p:spPr>
+          <a:xfrm>
+            <a:off x="923544" y="3794760"/>
+            <a:ext cx="2971800" cy="274320"/>
+          </a:xfrm>
+          <a:prstGeom prst="rect">
+            <a:avLst/>
+          </a:prstGeom>
+          <a:noFill/>
+          <a:ln/>
+        </p:spPr>
+        <p:txBody>
+          <a:bodyPr wrap="square" lIns="0" tIns="0" rIns="0" bIns="0" rtlCol="0" anchor="ctr"/>
+          <a:lstStyle/>
+          <a:p>
+            <a:pPr indent="0" marL="0">
+              <a:buNone/>
+            </a:pPr>
+            <a:r>
+              <a:rPr lang="en-US" sz="1300" b="1" dirty="0">
+                <a:solidFill>
+                  <a:srgbClr val="E8EEF8"/>
+                </a:solidFill>
+                <a:latin typeface="Calibri" pitchFamily="34" charset="0"/>
+                <a:ea typeface="Calibri" pitchFamily="34" charset="-122"/>
+                <a:cs typeface="Calibri" pitchFamily="34" charset="-120"/>
+              </a:rPr>
+              <a:t>Severity is relative</a:t>
+            </a:r>
+            <a:endParaRPr lang="en-US" sz="1300" dirty="0"/>
+          </a:p>
+        </p:txBody>
+      </p:sp>
+      <p:sp>
+        <p:nvSpPr>
+          <p:cNvPr id="18" name="Text 16"/>
+          <p:cNvSpPr txBox="1"/>
+          <p:nvPr/>
+        </p:nvSpPr>
+        <p:spPr>
+          <a:xfrm>
+            <a:off x="923544" y="4087368"/>
+            <a:ext cx="3017520" cy="658368"/>
+          </a:xfrm>
+          <a:prstGeom prst="rect">
+            <a:avLst/>
+          </a:prstGeom>
+          <a:noFill/>
+          <a:ln/>
+        </p:spPr>
+        <p:txBody>
+          <a:bodyPr wrap="square" lIns="0" tIns="0" rIns="0" bIns="0" rtlCol="0" anchor="ctr"/>
+          <a:lstStyle/>
+          <a:p>
+            <a:pPr indent="0" marL="0">
+              <a:lnSpc>
+                <a:spcPct val="105000"/>
+              </a:lnSpc>
+              <a:buNone/>
+            </a:pPr>
+            <a:r>
+              <a:rPr lang="en-US" sz="1050" dirty="0">
+                <a:solidFill>
+                  <a:srgbClr val="9FB0CC"/>
+                </a:solidFill>
+                <a:latin typeface="Calibri" pitchFamily="34" charset="0"/>
+                <a:ea typeface="Calibri" pitchFamily="34" charset="-122"/>
+                <a:cs typeface="Calibri" pitchFamily="34" charset="-120"/>
+              </a:rPr>
+              <a:t>It ranks which crack to look at first. It does not measure width in millimetres.</a:t>
+            </a:r>
+            <a:endParaRPr lang="en-US" sz="1050" dirty="0"/>
+          </a:p>
+        </p:txBody>
+      </p:sp>
+      <p:sp>
+        <p:nvSpPr>
           <p:cNvPr id="19" name="Shape 17"/>
           <p:cNvSpPr/>
           <p:nvPr/>
         </p:nvSpPr>
         <p:spPr>
           <a:xfrm>
-            <a:off x="960120" y="4608576"/>
-            <a:ext cx="128016" cy="128016"/>
-          </a:xfrm>
-          <a:prstGeom prst="ellipse">
-            <a:avLst/>
-          </a:prstGeom>
-          <a:solidFill>
-            <a:srgbClr val="10B981"/>
-          </a:solidFill>
-          <a:ln/>
-        </p:spPr>
-      </p:sp>
-      <p:sp>
-        <p:nvSpPr>
-          <p:cNvPr id="20" name="Text 18"/>
-          <p:cNvSpPr txBox="1"/>
-          <p:nvPr/>
-        </p:nvSpPr>
-        <p:spPr>
-          <a:xfrm>
-            <a:off x="1234440" y="4517136"/>
-            <a:ext cx="1463040" cy="310896"/>
-          </a:xfrm>
-          <a:prstGeom prst="rect">
-            <a:avLst/>
-          </a:prstGeom>
-          <a:noFill/>
-          <a:ln/>
-        </p:spPr>
-        <p:txBody>
-          <a:bodyPr wrap="square" lIns="0" tIns="0" rIns="0" bIns="0" rtlCol="0" anchor="ctr"/>
-          <a:lstStyle/>
-          <a:p>
-            <a:pPr indent="0" marL="0">
-              <a:buNone/>
-            </a:pPr>
-            <a:r>
-              <a:rPr lang="en-US" sz="1350" b="1" dirty="0">
-                <a:solidFill>
-                  <a:srgbClr val="E8EEF8"/>
-                </a:solidFill>
-                <a:latin typeface="Calibri" pitchFamily="34" charset="0"/>
-                <a:ea typeface="Calibri" pitchFamily="34" charset="-122"/>
-                <a:cs typeface="Calibri" pitchFamily="34" charset="-120"/>
-              </a:rPr>
-              <a:t>Data</a:t>
-            </a:r>
-            <a:endParaRPr lang="en-US" sz="1350" dirty="0"/>
-          </a:p>
-        </p:txBody>
-      </p:sp>
-      <p:sp>
-        <p:nvSpPr>
-          <p:cNvPr id="21" name="Text 19"/>
-          <p:cNvSpPr txBox="1"/>
-          <p:nvPr/>
-        </p:nvSpPr>
-        <p:spPr>
-          <a:xfrm>
-            <a:off x="2697480" y="4526280"/>
-            <a:ext cx="4297680" cy="310896"/>
-          </a:xfrm>
-          <a:prstGeom prst="rect">
-            <a:avLst/>
-          </a:prstGeom>
-          <a:noFill/>
-          <a:ln/>
-        </p:spPr>
-        <p:txBody>
-          <a:bodyPr wrap="square" lIns="0" tIns="0" rIns="0" bIns="0" rtlCol="0" anchor="ctr"/>
-          <a:lstStyle/>
-          <a:p>
-            <a:pPr indent="0" marL="0">
-              <a:buNone/>
-            </a:pPr>
-            <a:r>
-              <a:rPr lang="en-US" sz="1150" dirty="0">
-                <a:solidFill>
-                  <a:srgbClr val="9FB0CC"/>
-                </a:solidFill>
-                <a:latin typeface="Calibri" pitchFamily="34" charset="0"/>
-                <a:ea typeface="Calibri" pitchFamily="34" charset="-122"/>
-                <a:cs typeface="Calibri" pitchFamily="34" charset="-120"/>
-              </a:rPr>
-              <a:t>PostgreSQL 16 · MinIO (S3-compatible)</a:t>
-            </a:r>
-            <a:endParaRPr lang="en-US" sz="1150" dirty="0"/>
-          </a:p>
-        </p:txBody>
-      </p:sp>
-      <p:sp>
-        <p:nvSpPr>
-          <p:cNvPr id="22" name="Shape 20"/>
-          <p:cNvSpPr/>
-          <p:nvPr/>
-        </p:nvSpPr>
-        <p:spPr>
-          <a:xfrm>
-            <a:off x="685800" y="5093208"/>
-            <a:ext cx="6492240" cy="585216"/>
+            <a:off x="4370832" y="3675888"/>
+            <a:ext cx="3429000" cy="1143000"/>
           </a:xfrm>
           <a:prstGeom prst="roundRect">
             <a:avLst>
-              <a:gd name="adj" fmla="val 18750"/>
+              <a:gd name="adj" fmla="val 9600"/>
             </a:avLst>
           </a:prstGeom>
           <a:solidFill>
@@ -11106,116 +12026,99 @@
       </p:sp>
       <p:sp>
         <p:nvSpPr>
-          <p:cNvPr id="23" name="Shape 21"/>
+          <p:cNvPr id="20" name="Text 18"/>
+          <p:cNvSpPr txBox="1"/>
+          <p:nvPr/>
+        </p:nvSpPr>
+        <p:spPr>
+          <a:xfrm>
+            <a:off x="4608576" y="3794760"/>
+            <a:ext cx="2971800" cy="274320"/>
+          </a:xfrm>
+          <a:prstGeom prst="rect">
+            <a:avLst/>
+          </a:prstGeom>
+          <a:noFill/>
+          <a:ln/>
+        </p:spPr>
+        <p:txBody>
+          <a:bodyPr wrap="square" lIns="0" tIns="0" rIns="0" bIns="0" rtlCol="0" anchor="ctr"/>
+          <a:lstStyle/>
+          <a:p>
+            <a:pPr indent="0" marL="0">
+              <a:buNone/>
+            </a:pPr>
+            <a:r>
+              <a:rPr lang="en-US" sz="1300" b="1" dirty="0">
+                <a:solidFill>
+                  <a:srgbClr val="E8EEF8"/>
+                </a:solidFill>
+                <a:latin typeface="Calibri" pitchFamily="34" charset="0"/>
+                <a:ea typeface="Calibri" pitchFamily="34" charset="-122"/>
+                <a:cs typeface="Calibri" pitchFamily="34" charset="-120"/>
+              </a:rPr>
+              <a:t>The 3D view is illustrative</a:t>
+            </a:r>
+            <a:endParaRPr lang="en-US" sz="1300" dirty="0"/>
+          </a:p>
+        </p:txBody>
+      </p:sp>
+      <p:sp>
+        <p:nvSpPr>
+          <p:cNvPr id="21" name="Text 19"/>
+          <p:cNvSpPr txBox="1"/>
+          <p:nvPr/>
+        </p:nvSpPr>
+        <p:spPr>
+          <a:xfrm>
+            <a:off x="4608576" y="4087368"/>
+            <a:ext cx="3017520" cy="658368"/>
+          </a:xfrm>
+          <a:prstGeom prst="rect">
+            <a:avLst/>
+          </a:prstGeom>
+          <a:noFill/>
+          <a:ln/>
+        </p:spPr>
+        <p:txBody>
+          <a:bodyPr wrap="square" lIns="0" tIns="0" rIns="0" bIns="0" rtlCol="0" anchor="ctr"/>
+          <a:lstStyle/>
+          <a:p>
+            <a:pPr indent="0" marL="0">
+              <a:lnSpc>
+                <a:spcPct val="105000"/>
+              </a:lnSpc>
+              <a:buNone/>
+            </a:pPr>
+            <a:r>
+              <a:rPr lang="en-US" sz="1050" dirty="0">
+                <a:solidFill>
+                  <a:srgbClr val="9FB0CC"/>
+                </a:solidFill>
+                <a:latin typeface="Calibri" pitchFamily="34" charset="0"/>
+                <a:ea typeface="Calibri" pitchFamily="34" charset="-122"/>
+                <a:cs typeface="Calibri" pitchFamily="34" charset="-120"/>
+              </a:rPr>
+              <a:t>Marker positions come from capture order, not surveyed coordinates.</a:t>
+            </a:r>
+            <a:endParaRPr lang="en-US" sz="1050" dirty="0"/>
+          </a:p>
+        </p:txBody>
+      </p:sp>
+      <p:sp>
+        <p:nvSpPr>
+          <p:cNvPr id="22" name="Shape 20"/>
           <p:cNvSpPr/>
           <p:nvPr/>
         </p:nvSpPr>
         <p:spPr>
           <a:xfrm>
-            <a:off x="960120" y="5321808"/>
-            <a:ext cx="128016" cy="128016"/>
-          </a:xfrm>
-          <a:prstGeom prst="ellipse">
-            <a:avLst/>
-          </a:prstGeom>
-          <a:solidFill>
-            <a:srgbClr val="F59E0B"/>
-          </a:solidFill>
-          <a:ln/>
-        </p:spPr>
-      </p:sp>
-      <p:sp>
-        <p:nvSpPr>
-          <p:cNvPr id="24" name="Text 22"/>
-          <p:cNvSpPr txBox="1"/>
-          <p:nvPr/>
-        </p:nvSpPr>
-        <p:spPr>
-          <a:xfrm>
-            <a:off x="1234440" y="5230368"/>
-            <a:ext cx="1463040" cy="310896"/>
-          </a:xfrm>
-          <a:prstGeom prst="rect">
-            <a:avLst/>
-          </a:prstGeom>
-          <a:noFill/>
-          <a:ln/>
-        </p:spPr>
-        <p:txBody>
-          <a:bodyPr wrap="square" lIns="0" tIns="0" rIns="0" bIns="0" rtlCol="0" anchor="ctr"/>
-          <a:lstStyle/>
-          <a:p>
-            <a:pPr indent="0" marL="0">
-              <a:buNone/>
-            </a:pPr>
-            <a:r>
-              <a:rPr lang="en-US" sz="1350" b="1" dirty="0">
-                <a:solidFill>
-                  <a:srgbClr val="E8EEF8"/>
-                </a:solidFill>
-                <a:latin typeface="Calibri" pitchFamily="34" charset="0"/>
-                <a:ea typeface="Calibri" pitchFamily="34" charset="-122"/>
-                <a:cs typeface="Calibri" pitchFamily="34" charset="-120"/>
-              </a:rPr>
-              <a:t>Ship</a:t>
-            </a:r>
-            <a:endParaRPr lang="en-US" sz="1350" dirty="0"/>
-          </a:p>
-        </p:txBody>
-      </p:sp>
-      <p:sp>
-        <p:nvSpPr>
-          <p:cNvPr id="25" name="Text 23"/>
-          <p:cNvSpPr txBox="1"/>
-          <p:nvPr/>
-        </p:nvSpPr>
-        <p:spPr>
-          <a:xfrm>
-            <a:off x="2697480" y="5239512"/>
-            <a:ext cx="4297680" cy="310896"/>
-          </a:xfrm>
-          <a:prstGeom prst="rect">
-            <a:avLst/>
-          </a:prstGeom>
-          <a:noFill/>
-          <a:ln/>
-        </p:spPr>
-        <p:txBody>
-          <a:bodyPr wrap="square" lIns="0" tIns="0" rIns="0" bIns="0" rtlCol="0" anchor="ctr"/>
-          <a:lstStyle/>
-          <a:p>
-            <a:pPr indent="0" marL="0">
-              <a:buNone/>
-            </a:pPr>
-            <a:r>
-              <a:rPr lang="en-US" sz="1150" dirty="0">
-                <a:solidFill>
-                  <a:srgbClr val="9FB0CC"/>
-                </a:solidFill>
-                <a:latin typeface="Calibri" pitchFamily="34" charset="0"/>
-                <a:ea typeface="Calibri" pitchFamily="34" charset="-122"/>
-                <a:cs typeface="Calibri" pitchFamily="34" charset="-120"/>
-              </a:rPr>
-              <a:t>Docker Compose · GitHub Actions CI · JWT + RBAC</a:t>
-            </a:r>
-            <a:endParaRPr lang="en-US" sz="1150" dirty="0"/>
-          </a:p>
-        </p:txBody>
-      </p:sp>
-      <p:sp>
-        <p:nvSpPr>
-          <p:cNvPr id="26" name="Shape 24"/>
-          <p:cNvSpPr/>
-          <p:nvPr/>
-        </p:nvSpPr>
-        <p:spPr>
-          <a:xfrm>
-            <a:off x="7589520" y="2240280"/>
-            <a:ext cx="3886200" cy="3630168"/>
+            <a:off x="8055864" y="3675888"/>
+            <a:ext cx="3429000" cy="1143000"/>
           </a:xfrm>
           <a:prstGeom prst="roundRect">
             <a:avLst>
-              <a:gd name="adj" fmla="val 3023"/>
+              <a:gd name="adj" fmla="val 9600"/>
             </a:avLst>
           </a:prstGeom>
           <a:solidFill>
@@ -11240,40 +12143,199 @@
       </p:sp>
       <p:sp>
         <p:nvSpPr>
+          <p:cNvPr id="23" name="Text 21"/>
+          <p:cNvSpPr txBox="1"/>
+          <p:nvPr/>
+        </p:nvSpPr>
+        <p:spPr>
+          <a:xfrm>
+            <a:off x="8293608" y="3794760"/>
+            <a:ext cx="2971800" cy="274320"/>
+          </a:xfrm>
+          <a:prstGeom prst="rect">
+            <a:avLst/>
+          </a:prstGeom>
+          <a:noFill/>
+          <a:ln/>
+        </p:spPr>
+        <p:txBody>
+          <a:bodyPr wrap="square" lIns="0" tIns="0" rIns="0" bIns="0" rtlCol="0" anchor="ctr"/>
+          <a:lstStyle/>
+          <a:p>
+            <a:pPr indent="0" marL="0">
+              <a:buNone/>
+            </a:pPr>
+            <a:r>
+              <a:rPr lang="en-US" sz="1300" b="1" dirty="0">
+                <a:solidFill>
+                  <a:srgbClr val="E8EEF8"/>
+                </a:solidFill>
+                <a:latin typeface="Calibri" pitchFamily="34" charset="0"/>
+                <a:ea typeface="Calibri" pitchFamily="34" charset="-122"/>
+                <a:cs typeface="Calibri" pitchFamily="34" charset="-120"/>
+              </a:rPr>
+              <a:t>Video counts are inflated</a:t>
+            </a:r>
+            <a:endParaRPr lang="en-US" sz="1300" dirty="0"/>
+          </a:p>
+        </p:txBody>
+      </p:sp>
+      <p:sp>
+        <p:nvSpPr>
+          <p:cNvPr id="24" name="Text 22"/>
+          <p:cNvSpPr txBox="1"/>
+          <p:nvPr/>
+        </p:nvSpPr>
+        <p:spPr>
+          <a:xfrm>
+            <a:off x="8293608" y="4087368"/>
+            <a:ext cx="3017520" cy="658368"/>
+          </a:xfrm>
+          <a:prstGeom prst="rect">
+            <a:avLst/>
+          </a:prstGeom>
+          <a:noFill/>
+          <a:ln/>
+        </p:spPr>
+        <p:txBody>
+          <a:bodyPr wrap="square" lIns="0" tIns="0" rIns="0" bIns="0" rtlCol="0" anchor="ctr"/>
+          <a:lstStyle/>
+          <a:p>
+            <a:pPr indent="0" marL="0">
+              <a:lnSpc>
+                <a:spcPct val="105000"/>
+              </a:lnSpc>
+              <a:buNone/>
+            </a:pPr>
+            <a:r>
+              <a:rPr lang="en-US" sz="1050" dirty="0">
+                <a:solidFill>
+                  <a:srgbClr val="9FB0CC"/>
+                </a:solidFill>
+                <a:latin typeface="Calibri" pitchFamily="34" charset="0"/>
+                <a:ea typeface="Calibri" pitchFamily="34" charset="-122"/>
+                <a:cs typeface="Calibri" pitchFamily="34" charset="-120"/>
+              </a:rPr>
+              <a:t>Frames are analysed independently, so one crack can be counted many times.</a:t>
+            </a:r>
+            <a:endParaRPr lang="en-US" sz="1050" dirty="0"/>
+          </a:p>
+        </p:txBody>
+      </p:sp>
+      <p:sp>
+        <p:nvSpPr>
+          <p:cNvPr id="25" name="Shape 23"/>
+          <p:cNvSpPr/>
+          <p:nvPr/>
+        </p:nvSpPr>
+        <p:spPr>
+          <a:xfrm>
+            <a:off x="685800" y="4956048"/>
+            <a:ext cx="3429000" cy="1143000"/>
+          </a:xfrm>
+          <a:prstGeom prst="roundRect">
+            <a:avLst>
+              <a:gd name="adj" fmla="val 9600"/>
+            </a:avLst>
+          </a:prstGeom>
+          <a:solidFill>
+            <a:srgbClr val="111A2E">
+              <a:alpha val="82000"/>
+            </a:srgbClr>
+          </a:solidFill>
+          <a:ln w="12700">
+            <a:solidFill>
+              <a:srgbClr val="1E2B44"/>
+            </a:solidFill>
+            <a:prstDash val="solid"/>
+          </a:ln>
+          <a:effectLst>
+            <a:outerShdw sx="100000" sy="100000" kx="0" ky="0" algn="bl" rotWithShape="0" blurRad="177800" dist="38100" dir="5400000">
+              <a:srgbClr val="000000">
+                <a:alpha val="35000"/>
+              </a:srgbClr>
+            </a:outerShdw>
+          </a:effectLst>
+        </p:spPr>
+      </p:sp>
+      <p:sp>
+        <p:nvSpPr>
+          <p:cNvPr id="26" name="Text 24"/>
+          <p:cNvSpPr txBox="1"/>
+          <p:nvPr/>
+        </p:nvSpPr>
+        <p:spPr>
+          <a:xfrm>
+            <a:off x="923544" y="5074920"/>
+            <a:ext cx="2971800" cy="274320"/>
+          </a:xfrm>
+          <a:prstGeom prst="rect">
+            <a:avLst/>
+          </a:prstGeom>
+          <a:noFill/>
+          <a:ln/>
+        </p:spPr>
+        <p:txBody>
+          <a:bodyPr wrap="square" lIns="0" tIns="0" rIns="0" bIns="0" rtlCol="0" anchor="ctr"/>
+          <a:lstStyle/>
+          <a:p>
+            <a:pPr indent="0" marL="0">
+              <a:buNone/>
+            </a:pPr>
+            <a:r>
+              <a:rPr lang="en-US" sz="1300" b="1" dirty="0">
+                <a:solidFill>
+                  <a:srgbClr val="E8EEF8"/>
+                </a:solidFill>
+                <a:latin typeface="Calibri" pitchFamily="34" charset="0"/>
+                <a:ea typeface="Calibri" pitchFamily="34" charset="-122"/>
+                <a:cs typeface="Calibri" pitchFamily="34" charset="-120"/>
+              </a:rPr>
+              <a:t>Not an engineering assessment</a:t>
+            </a:r>
+            <a:endParaRPr lang="en-US" sz="1300" dirty="0"/>
+          </a:p>
+        </p:txBody>
+      </p:sp>
+      <p:sp>
+        <p:nvSpPr>
           <p:cNvPr id="27" name="Text 25"/>
           <p:cNvSpPr txBox="1"/>
           <p:nvPr/>
         </p:nvSpPr>
         <p:spPr>
           <a:xfrm>
-            <a:off x="7909560" y="2450592"/>
-            <a:ext cx="3291840" cy="292608"/>
-          </a:xfrm>
-          <a:prstGeom prst="rect">
-            <a:avLst/>
-          </a:prstGeom>
-          <a:noFill/>
-          <a:ln/>
-        </p:spPr>
-        <p:txBody>
-          <a:bodyPr wrap="square" lIns="0" tIns="0" rIns="0" bIns="0" rtlCol="0" anchor="ctr"/>
-          <a:lstStyle/>
-          <a:p>
-            <a:pPr indent="0" marL="0">
-              <a:buNone/>
-            </a:pPr>
-            <a:r>
-              <a:rPr lang="en-US" sz="1450" b="1" dirty="0">
-                <a:solidFill>
-                  <a:srgbClr val="E8EEF8"/>
-                </a:solidFill>
-                <a:latin typeface="Calibri" pitchFamily="34" charset="0"/>
-                <a:ea typeface="Calibri" pitchFamily="34" charset="-122"/>
-                <a:cs typeface="Calibri" pitchFamily="34" charset="-120"/>
-              </a:rPr>
-              <a:t>Decisions on record</a:t>
-            </a:r>
-            <a:endParaRPr lang="en-US" sz="1450" dirty="0"/>
+            <a:off x="923544" y="5367528"/>
+            <a:ext cx="3017520" cy="658368"/>
+          </a:xfrm>
+          <a:prstGeom prst="rect">
+            <a:avLst/>
+          </a:prstGeom>
+          <a:noFill/>
+          <a:ln/>
+        </p:spPr>
+        <p:txBody>
+          <a:bodyPr wrap="square" lIns="0" tIns="0" rIns="0" bIns="0" rtlCol="0" anchor="ctr"/>
+          <a:lstStyle/>
+          <a:p>
+            <a:pPr indent="0" marL="0">
+              <a:lnSpc>
+                <a:spcPct val="105000"/>
+              </a:lnSpc>
+              <a:buNone/>
+            </a:pPr>
+            <a:r>
+              <a:rPr lang="en-US" sz="1050" dirty="0">
+                <a:solidFill>
+                  <a:srgbClr val="9FB0CC"/>
+                </a:solidFill>
+                <a:latin typeface="Calibri" pitchFamily="34" charset="0"/>
+                <a:ea typeface="Calibri" pitchFamily="34" charset="-122"/>
+                <a:cs typeface="Calibri" pitchFamily="34" charset="-120"/>
+              </a:rPr>
+              <a:t>It is a screening pass. A qualified engineer still signs off.</a:t>
+            </a:r>
+            <a:endParaRPr lang="en-US" sz="1050" dirty="0"/>
           </a:p>
         </p:txBody>
       </p:sp>
@@ -11285,95 +12347,34 @@
         </p:nvSpPr>
         <p:spPr>
           <a:xfrm>
-            <a:off x="7909560" y="2834640"/>
-            <a:ext cx="3291840" cy="2834640"/>
-          </a:xfrm>
-          <a:prstGeom prst="rect">
-            <a:avLst/>
-          </a:prstGeom>
-          <a:noFill/>
-          <a:ln/>
-        </p:spPr>
-        <p:txBody>
-          <a:bodyPr wrap="square" lIns="0" tIns="0" rIns="0" bIns="0" rtlCol="0" anchor="ctr"/>
-          <a:lstStyle/>
-          <a:p>
-            <a:pPr indent="0" marL="0">
-              <a:lnSpc>
-                <a:spcPct val="112000"/>
-              </a:lnSpc>
-              <a:buNone/>
-            </a:pPr>
-            <a:r>
-              <a:rPr lang="en-US" sz="1200" dirty="0">
-                <a:solidFill>
-                  <a:srgbClr val="9FB0CC"/>
-                </a:solidFill>
-                <a:latin typeface="Calibri" pitchFamily="34" charset="0"/>
-                <a:ea typeface="Calibri" pitchFamily="34" charset="-122"/>
-                <a:cs typeface="Calibri" pitchFamily="34" charset="-120"/>
-              </a:rPr>
-              <a:t>18 architectural decisions are written down with their reasoning — including the ones we got wrong and had to reverse.</a:t>
-            </a:r>
-            <a:endParaRPr lang="en-US" sz="1200" dirty="0"/>
-          </a:p>
-          <a:p>
-            <a:pPr indent="0" marL="0">
-              <a:lnSpc>
-                <a:spcPct val="112000"/>
-              </a:lnSpc>
-              <a:buNone/>
-            </a:pPr>
-            <a:endParaRPr lang="en-US" sz="1200" dirty="0"/>
-          </a:p>
-          <a:p>
-            <a:pPr indent="0" marL="0">
-              <a:lnSpc>
-                <a:spcPct val="112000"/>
-              </a:lnSpc>
-              <a:buNone/>
-            </a:pPr>
-            <a:r>
-              <a:rPr lang="en-US" sz="1200" dirty="0">
-                <a:solidFill>
-                  <a:srgbClr val="9FB0CC"/>
-                </a:solidFill>
-                <a:latin typeface="Calibri" pitchFamily="34" charset="0"/>
-                <a:ea typeface="Calibri" pitchFamily="34" charset="-122"/>
-                <a:cs typeface="Calibri" pitchFamily="34" charset="-120"/>
-              </a:rPr>
-              <a:t>A dataset that looked ideal and turned out unusable. A merge that made the model worse. A metric that hid a failure for an hour.</a:t>
-            </a:r>
-            <a:endParaRPr lang="en-US" sz="1200" dirty="0"/>
-          </a:p>
-          <a:p>
-            <a:pPr indent="0" marL="0">
-              <a:lnSpc>
-                <a:spcPct val="112000"/>
-              </a:lnSpc>
-              <a:buNone/>
-            </a:pPr>
-            <a:endParaRPr lang="en-US" sz="1200" dirty="0"/>
-          </a:p>
-          <a:p>
-            <a:pPr indent="0" marL="0">
-              <a:lnSpc>
-                <a:spcPct val="112000"/>
-              </a:lnSpc>
-              <a:buNone/>
-            </a:pPr>
-            <a:r>
-              <a:rPr lang="en-US" sz="1200" dirty="0">
-                <a:solidFill>
-                  <a:srgbClr val="9FB0CC"/>
-                </a:solidFill>
-                <a:latin typeface="Calibri" pitchFamily="34" charset="0"/>
-                <a:ea typeface="Calibri" pitchFamily="34" charset="-122"/>
-                <a:cs typeface="Calibri" pitchFamily="34" charset="-120"/>
-              </a:rPr>
-              <a:t>All of it is in the repository.</a:t>
-            </a:r>
-            <a:endParaRPr lang="en-US" sz="1200" dirty="0"/>
+            <a:off x="685800" y="6263640"/>
+            <a:ext cx="10789920" cy="320040"/>
+          </a:xfrm>
+          <a:prstGeom prst="rect">
+            <a:avLst/>
+          </a:prstGeom>
+          <a:noFill/>
+          <a:ln/>
+        </p:spPr>
+        <p:txBody>
+          <a:bodyPr wrap="square" lIns="0" tIns="0" rIns="0" bIns="0" rtlCol="0" anchor="ctr"/>
+          <a:lstStyle/>
+          <a:p>
+            <a:pPr algn="ctr" indent="0" marL="0">
+              <a:buNone/>
+            </a:pPr>
+            <a:r>
+              <a:rPr lang="en-US" sz="1400" i="1" dirty="0">
+                <a:solidFill>
+                  <a:srgbClr val="22D3EE"/>
+                </a:solidFill>
+                <a:latin typeface="Calibri" pitchFamily="34" charset="0"/>
+                <a:ea typeface="Calibri" pitchFamily="34" charset="-122"/>
+                <a:cs typeface="Calibri" pitchFamily="34" charset="-120"/>
+              </a:rPr>
+              <a:t>Naming a weakness costs far less than being caught by it.</a:t>
+            </a:r>
+            <a:endParaRPr lang="en-US" sz="1400" dirty="0"/>
           </a:p>
         </p:txBody>
       </p:sp>

--- a/deliverables/TwinVerse_Inspect_AI_Pitch.pptx
+++ b/deliverables/TwinVerse_Inspect_AI_Pitch.pptx
@@ -486,26 +486,26 @@
               <c:strCache>
                 <c:ptCount val="1"/>
                 <c:pt idx="0">
-                  <c:v>Our own test split</c:v>
+                  <c:v>Cracks found</c:v>
                 </c:pt>
               </c:strCache>
             </c:strRef>
           </c:tx>
           <c:spPr>
             <a:solidFill>
-              <a:srgbClr val="64748B"/>
+              <a:srgbClr val="22D3EE"/>
             </a:solidFill>
             <a:effectLst/>
           </c:spPr>
           <c:invertIfNegative val="0"/>
           <c:dLbls>
-            <c:numFmt formatCode="0.000" sourceLinked="0"/>
+            <c:numFmt formatCode="0%" sourceLinked="0"/>
             <c:txPr>
               <a:bodyPr/>
               <a:lstStyle/>
               <a:p>
                 <a:pPr>
-                  <a:defRPr b="0" i="0" strike="noStrike" sz="1000" u="none">
+                  <a:defRPr b="0" i="0" strike="noStrike" sz="1100" u="none">
                     <a:solidFill>
                       <a:srgbClr val="E8EEF8"/>
                     </a:solidFill>
@@ -522,17 +522,68 @@
             <c:showBubbleSize val="0"/>
             <c:showLeaderLines val="0"/>
           </c:dLbls>
+          <c:dPt>
+            <c:idx val="0"/>
+            <c:invertIfNegative val="0"/>
+            <c:bubble3D val="0"/>
+            <c:spPr>
+              <a:solidFill>
+                <a:srgbClr val="22D3EE"/>
+              </a:solidFill>
+              <a:effectLst/>
+            </c:spPr>
+          </c:dPt>
+          <c:dPt>
+            <c:idx val="1"/>
+            <c:invertIfNegative val="0"/>
+            <c:bubble3D val="0"/>
+            <c:spPr>
+              <a:solidFill>
+                <a:srgbClr val="64748B"/>
+              </a:solidFill>
+              <a:effectLst/>
+            </c:spPr>
+          </c:dPt>
+          <c:dPt>
+            <c:idx val="2"/>
+            <c:invertIfNegative val="0"/>
+            <c:bubble3D val="0"/>
+            <c:spPr>
+              <a:solidFill>
+                <a:srgbClr val="64748B"/>
+              </a:solidFill>
+              <a:effectLst/>
+            </c:spPr>
+          </c:dPt>
+          <c:dPt>
+            <c:idx val="3"/>
+            <c:invertIfNegative val="0"/>
+            <c:bubble3D val="0"/>
+            <c:spPr>
+              <a:solidFill>
+                <a:srgbClr val="64748B"/>
+              </a:solidFill>
+              <a:effectLst/>
+            </c:spPr>
+          </c:dPt>
           <c:cat>
             <c:multiLvlStrRef>
-              <c:f>Sheet1!$A$2:$A$3</c:f>
+              <c:f>Sheet1!$A$2:$A$5</c:f>
               <c:multiLvlStrCache>
-                <c:ptCount val="2"/>
+                <c:ptCount val="4"/>
                 <c:lvl>
                   <c:pt idx="0">
-                    <c:v>Cracks found</c:v>
+                    <c:v>nitw-crack
+(ours)</c:v>
                   </c:pt>
                   <c:pt idx="1">
-                    <c:v>Separation</c:v>
+                    <c:v>crack-bphdr</c:v>
+                  </c:pt>
+                  <c:pt idx="2">
+                    <c:v>bridge-defect</c:v>
+                  </c:pt>
+                  <c:pt idx="3">
+                    <c:v>crack-b</c:v>
                   </c:pt>
                 </c:lvl>
               </c:multiLvlStrCache>
@@ -540,105 +591,34 @@
           </c:cat>
           <c:val>
             <c:numRef>
-              <c:f>Sheet1!$B$2:$B$3</c:f>
+              <c:f>Sheet1!$B$2:$B$5</c:f>
               <c:numCache>
                 <c:formatCode>General</c:formatCode>
-                <c:ptCount val="2"/>
+                <c:ptCount val="4"/>
                 <c:pt idx="0">
-                  <c:v>0.81</c:v>
+                  <c:v>0.813</c:v>
                 </c:pt>
                 <c:pt idx="1">
-                  <c:v>0.611</c:v>
-                </c:pt>
-              </c:numCache>
-            </c:numRef>
-          </c:val>
-        </c:ser>
-        <c:ser>
-          <c:idx val="1"/>
-          <c:order val="1"/>
-          <c:tx>
-            <c:strRef>
-              <c:f>Sheet1!$C$1</c:f>
-              <c:strCache>
-                <c:ptCount val="1"/>
-                <c:pt idx="0">
-                  <c:v>Unseen dataset</c:v>
-                </c:pt>
-              </c:strCache>
-            </c:strRef>
-          </c:tx>
-          <c:spPr>
-            <a:solidFill>
-              <a:srgbClr val="22D3EE"/>
-            </a:solidFill>
-            <a:effectLst/>
-          </c:spPr>
-          <c:invertIfNegative val="0"/>
-          <c:dLbls>
-            <c:numFmt formatCode="0.000" sourceLinked="0"/>
-            <c:txPr>
-              <a:bodyPr/>
-              <a:lstStyle/>
-              <a:p>
-                <a:pPr>
-                  <a:defRPr b="0" i="0" strike="noStrike" sz="1000" u="none">
-                    <a:solidFill>
-                      <a:srgbClr val="E8EEF8"/>
-                    </a:solidFill>
-                    <a:latin typeface="Arial"/>
-                  </a:defRPr>
-                </a:pPr>
-              </a:p>
-            </c:txPr>
-            <c:showLegendKey val="0"/>
-            <c:showVal val="1"/>
-            <c:showCatName val="0"/>
-            <c:showSerName val="0"/>
-            <c:showPercent val="0"/>
-            <c:showBubbleSize val="0"/>
-            <c:showLeaderLines val="0"/>
-          </c:dLbls>
-          <c:cat>
-            <c:multiLvlStrRef>
-              <c:f>Sheet1!$A$2:$A$3</c:f>
-              <c:multiLvlStrCache>
-                <c:ptCount val="2"/>
-                <c:lvl>
-                  <c:pt idx="0">
-                    <c:v>Cracks found</c:v>
-                  </c:pt>
-                  <c:pt idx="1">
-                    <c:v>Separation</c:v>
-                  </c:pt>
-                </c:lvl>
-              </c:multiLvlStrCache>
-            </c:multiLvlStrRef>
-          </c:cat>
-          <c:val>
-            <c:numRef>
-              <c:f>Sheet1!$C$2:$C$3</c:f>
-              <c:numCache>
-                <c:formatCode>General</c:formatCode>
-                <c:ptCount val="2"/>
-                <c:pt idx="0">
                   <c:v>0.634</c:v>
                 </c:pt>
-                <c:pt idx="1">
-                  <c:v>0.432</c:v>
+                <c:pt idx="2">
+                  <c:v>0.126</c:v>
+                </c:pt>
+                <c:pt idx="3">
+                  <c:v>0.077</c:v>
                 </c:pt>
               </c:numCache>
             </c:numRef>
           </c:val>
         </c:ser>
         <c:dLbls>
-          <c:numFmt formatCode="0.000" sourceLinked="0"/>
+          <c:numFmt formatCode="0%" sourceLinked="0"/>
           <c:txPr>
             <a:bodyPr/>
             <a:lstStyle/>
             <a:p>
               <a:pPr>
-                <a:defRPr b="0" i="0" strike="noStrike" sz="1000" u="none">
+                <a:defRPr b="0" i="0" strike="noStrike" sz="1100" u="none">
                   <a:solidFill>
                     <a:srgbClr val="E8EEF8"/>
                   </a:solidFill>
@@ -655,7 +635,7 @@
           <c:showBubbleSize val="0"/>
           <c:showLeaderLines val="0"/>
         </c:dLbls>
-        <c:gapWidth val="60"/>
+        <c:gapWidth val="55"/>
         <c:overlap val="0"/>
         <c:axId val="2094734554"/>
         <c:axId val="2094734552"/>
@@ -686,7 +666,7 @@
           <a:lstStyle/>
           <a:p>
             <a:pPr>
-              <a:defRPr sz="1100" b="0" i="0" u="none" strike="noStrike">
+              <a:defRPr sz="1000" b="0" i="0" u="none" strike="noStrike">
                 <a:solidFill>
                   <a:srgbClr val="9FB0CC"/>
                 </a:solidFill>
@@ -763,24 +743,6 @@
         <a:effectLst/>
       </c:spPr>
     </c:plotArea>
-    <c:legend>
-      <c:legendPos val="t"/>
-      <c:overlay val="0"/>
-      <c:txPr>
-        <a:bodyPr/>
-        <a:lstStyle/>
-        <a:p>
-          <a:pPr>
-            <a:defRPr sz="1000">
-              <a:solidFill>
-                <a:srgbClr val="9FB0CC"/>
-              </a:solidFill>
-            </a:defRPr>
-          </a:pPr>
-          <a:endParaRPr lang="en-US"/>
-        </a:p>
-      </c:txPr>
-    </c:legend>
     <c:plotVisOnly val="1"/>
     <c:dispBlanksAs val="span"/>
   </c:chart>
@@ -4091,7 +4053,7 @@
                 <a:ea typeface="Calibri" pitchFamily="34" charset="-122"/>
                 <a:cs typeface="Calibri" pitchFamily="34" charset="-120"/>
               </a:rPr>
-              <a:t>18 architectural decisions are written down with their reasoning — including the ones we got wrong and had to reverse.</a:t>
+              <a:t>20 architectural decisions are written down with their reasoning — including the ones we got wrong, and one we had to publicly reverse after re-checking it.</a:t>
             </a:r>
             <a:endParaRPr lang="en-US" sz="1200" dirty="0"/>
           </a:p>
@@ -10246,7 +10208,7 @@
                 <a:ea typeface="Calibri" pitchFamily="34" charset="-122"/>
                 <a:cs typeface="Calibri" pitchFamily="34" charset="-120"/>
               </a:rPr>
-              <a:t>Then we tested it on a dataset</a:t>
+              <a:t>Then we tested it on three datasets</a:t>
             </a:r>
             <a:endParaRPr lang="en-US" sz="3200" dirty="0"/>
           </a:p>
@@ -10305,7 +10267,7 @@
                 <a:ea typeface="Calibri" pitchFamily="34" charset="-122"/>
                 <a:cs typeface="Calibri" pitchFamily="34" charset="-120"/>
               </a:rPr>
-              <a:t>Every accuracy figure above came from our own dataset's held-out split — different photographs, but the same cameras and the same walls. So we ran it against crack-bphdr, a public benchmark from an unrelated source that contributed nothing to training.</a:t>
+              <a:t>Every accuracy figure above came from our own dataset's held-out split — different photographs, but the same cameras and the same walls. So we ran it against three public datasets from unrelated sources, none of which contributed anything to training.</a:t>
             </a:r>
             <a:endParaRPr lang="en-US" sz="1350" dirty="0"/>
           </a:p>
@@ -10438,7 +10400,7 @@
                 <a:ea typeface="Calibri" pitchFamily="34" charset="-122"/>
                 <a:cs typeface="Calibri" pitchFamily="34" charset="-120"/>
               </a:rPr>
-              <a:t>On unfamiliar imagery it finds roughly 3 cracks in 5, not 4 in 5. The false-alarm rate does not move — only recall does.</a:t>
+              <a:t>Four in five cracks on imagery like our training set. On three we had never seen, between 63% and 8%.</a:t>
             </a:r>
             <a:endParaRPr lang="en-US" sz="1150" dirty="0"/>
           </a:p>
@@ -10467,7 +10429,7 @@
                 <a:ea typeface="Calibri" pitchFamily="34" charset="-122"/>
                 <a:cs typeface="Calibri" pitchFamily="34" charset="-120"/>
               </a:rPr>
-              <a:t>No threshold recovers it. The fix is more varied training data, and we know that because we swept the thresholds and looked.</a:t>
+              <a:t>We could have shown you only the 63%. We are showing you all four, because the honest claim is that this is tuned to one kind of concrete photography.</a:t>
             </a:r>
             <a:endParaRPr lang="en-US" sz="1150" dirty="0"/>
           </a:p>
@@ -11823,7 +11785,7 @@
                 <a:ea typeface="Calibri" pitchFamily="34" charset="-122"/>
                 <a:cs typeface="Calibri" pitchFamily="34" charset="-120"/>
               </a:rPr>
-              <a:t>63% on unfamiliar imagery</a:t>
+              <a:t>8-63% on unfamiliar imagery</a:t>
             </a:r>
             <a:endParaRPr lang="en-US" sz="1300" dirty="0"/>
           </a:p>
@@ -11865,7 +11827,7 @@
                 <a:ea typeface="Calibri" pitchFamily="34" charset="-122"/>
                 <a:cs typeface="Calibri" pitchFamily="34" charset="-120"/>
               </a:rPr>
-              <a:t>Versus 81% on imagery like its training data. Measured, not estimated.</a:t>
+              <a:t>Versus 81% on imagery like its training data. Three unseen datasets, all published.</a:t>
             </a:r>
             <a:endParaRPr lang="en-US" sz="1050" dirty="0"/>
           </a:p>

--- a/deliverables/TwinVerse_Inspect_AI_Pitch.pptx
+++ b/deliverables/TwinVerse_Inspect_AI_Pitch.pptx
@@ -493,7 +493,7 @@
           </c:tx>
           <c:spPr>
             <a:solidFill>
-              <a:srgbClr val="22D3EE"/>
+              <a:srgbClr val="64748B"/>
             </a:solidFill>
             <a:effectLst/>
           </c:spPr>
@@ -528,7 +528,7 @@
             <c:bubble3D val="0"/>
             <c:spPr>
               <a:solidFill>
-                <a:srgbClr val="22D3EE"/>
+                <a:srgbClr val="64748B"/>
               </a:solidFill>
               <a:effectLst/>
             </c:spPr>
@@ -561,7 +561,7 @@
             <c:bubble3D val="0"/>
             <c:spPr>
               <a:solidFill>
-                <a:srgbClr val="64748B"/>
+                <a:srgbClr val="22D3EE"/>
               </a:solidFill>
               <a:effectLst/>
             </c:spPr>
@@ -573,17 +573,17 @@
                 <c:ptCount val="4"/>
                 <c:lvl>
                   <c:pt idx="0">
-                    <c:v>nitw-crack
-(ours)</c:v>
+                    <c:v>crack-b</c:v>
                   </c:pt>
                   <c:pt idx="1">
                     <c:v>crack-bphdr</c:v>
                   </c:pt>
                   <c:pt idx="2">
-                    <c:v>bridge-defect</c:v>
+                    <c:v>nitw-crack</c:v>
                   </c:pt>
                   <c:pt idx="3">
-                    <c:v>crack-b</c:v>
+                    <c:v>bridge-defect
+(unseen)</c:v>
                   </c:pt>
                 </c:lvl>
               </c:multiLvlStrCache>
@@ -596,16 +596,16 @@
                 <c:formatCode>General</c:formatCode>
                 <c:ptCount val="4"/>
                 <c:pt idx="0">
-                  <c:v>0.813</c:v>
+                  <c:v>1</c:v>
                 </c:pt>
                 <c:pt idx="1">
-                  <c:v>0.634</c:v>
+                  <c:v>0.982</c:v>
                 </c:pt>
                 <c:pt idx="2">
-                  <c:v>0.126</c:v>
+                  <c:v>0.838</c:v>
                 </c:pt>
                 <c:pt idx="3">
-                  <c:v>0.077</c:v>
+                  <c:v>0.558</c:v>
                 </c:pt>
               </c:numCache>
             </c:numRef>
@@ -10169,7 +10169,7 @@
                 <a:ea typeface="Calibri" pitchFamily="34" charset="-122"/>
                 <a:cs typeface="Calibri" pitchFamily="34" charset="-120"/>
               </a:rPr>
-              <a:t>THE NUMBER MOST TEAMS NEVER CHECK</a:t>
+              <a:t>THE TRADE-OFF MOST TEAMS NEVER PRICE</a:t>
             </a:r>
             <a:endParaRPr lang="en-US" sz="1100" dirty="0"/>
           </a:p>
@@ -10200,7 +10200,7 @@
               <a:buNone/>
             </a:pPr>
             <a:r>
-              <a:rPr lang="en-US" sz="3200" b="1" dirty="0">
+              <a:rPr lang="en-US" sz="3000" b="1" dirty="0">
                 <a:solidFill>
                   <a:srgbClr val="E8EEF8"/>
                 </a:solidFill>
@@ -10208,16 +10208,16 @@
                 <a:ea typeface="Calibri" pitchFamily="34" charset="-122"/>
                 <a:cs typeface="Calibri" pitchFamily="34" charset="-120"/>
               </a:rPr>
-              <a:t>Then we tested it on three datasets</a:t>
-            </a:r>
-            <a:endParaRPr lang="en-US" sz="3200" dirty="0"/>
-          </a:p>
-          <a:p>
-            <a:pPr indent="0" marL="0">
-              <a:buNone/>
-            </a:pPr>
-            <a:r>
-              <a:rPr lang="en-US" sz="3200" b="1" dirty="0">
+              <a:t>We picked the threshold by simulating</a:t>
+            </a:r>
+            <a:endParaRPr lang="en-US" sz="3000" dirty="0"/>
+          </a:p>
+          <a:p>
+            <a:pPr indent="0" marL="0">
+              <a:buNone/>
+            </a:pPr>
+            <a:r>
+              <a:rPr lang="en-US" sz="3000" b="1" dirty="0">
                 <a:solidFill>
                   <a:srgbClr val="E8EEF8"/>
                 </a:solidFill>
@@ -10225,9 +10225,9 @@
                 <a:ea typeface="Calibri" pitchFamily="34" charset="-122"/>
                 <a:cs typeface="Calibri" pitchFamily="34" charset="-120"/>
               </a:rPr>
-              <a:t>it had never seen.</a:t>
-            </a:r>
-            <a:endParaRPr lang="en-US" sz="3200" dirty="0"/>
+              <a:t>an inspection, not by tuning a metric.</a:t>
+            </a:r>
+            <a:endParaRPr lang="en-US" sz="3000" dirty="0"/>
           </a:p>
         </p:txBody>
       </p:sp>
@@ -10267,7 +10267,7 @@
                 <a:ea typeface="Calibri" pitchFamily="34" charset="-122"/>
                 <a:cs typeface="Calibri" pitchFamily="34" charset="-120"/>
               </a:rPr>
-              <a:t>Every accuracy figure above came from our own dataset's held-out split — different photographs, but the same cameras and the same walls. So we ran it against three public datasets from unrelated sources, none of which contributed anything to training.</a:t>
+              <a:t>A missed crack is found at the next survey, or when something fails. A false alarm costs an engineer thirty seconds. So we stopped optimising a metric that treats them as equal, simulated 500-photograph surveys, and chose the threshold from a recall target.</a:t>
             </a:r>
             <a:endParaRPr lang="en-US" sz="1350" dirty="0"/>
           </a:p>
@@ -10400,7 +10400,7 @@
                 <a:ea typeface="Calibri" pitchFamily="34" charset="-122"/>
                 <a:cs typeface="Calibri" pitchFamily="34" charset="-120"/>
               </a:rPr>
-              <a:t>Four in five cracks on imagery like our training set. On three we had never seen, between 63% and 8%.</a:t>
+              <a:t>Worst case across four datasets: 84% of cracks found. The previous model could not reach 80% on crack-b at any threshold — its best was 35%.</a:t>
             </a:r>
             <a:endParaRPr lang="en-US" sz="1150" dirty="0"/>
           </a:p>
@@ -10429,7 +10429,7 @@
                 <a:ea typeface="Calibri" pitchFamily="34" charset="-122"/>
                 <a:cs typeface="Calibri" pitchFamily="34" charset="-120"/>
               </a:rPr>
-              <a:t>We could have shown you only the 63%. We are showing you all four, because the honest claim is that this is tuned to one kind of concrete photography.</a:t>
+              <a:t>The cost is that we flag 60% of photographs for review. A manual survey means looking at all of them, after climbing the structure.</a:t>
             </a:r>
             <a:endParaRPr lang="en-US" sz="1150" dirty="0"/>
           </a:p>
@@ -10468,7 +10468,7 @@
                 <a:ea typeface="Calibri" pitchFamily="34" charset="-122"/>
                 <a:cs typeface="Calibri" pitchFamily="34" charset="-120"/>
               </a:rPr>
-              <a:t>We would rather tell you this than have you find it.</a:t>
+              <a:t>Recall is a safety decision. Review time is a budget. We priced both.</a:t>
             </a:r>
             <a:endParaRPr lang="en-US" sz="1400" dirty="0"/>
           </a:p>
@@ -11668,7 +11668,7 @@
                 <a:ea typeface="Calibri" pitchFamily="34" charset="-122"/>
                 <a:cs typeface="Calibri" pitchFamily="34" charset="-120"/>
               </a:rPr>
-              <a:t>1 in 5 clean surfaces flagged</a:t>
+              <a:t>We flag 60% of photographs</a:t>
             </a:r>
             <a:endParaRPr lang="en-US" sz="1300" dirty="0"/>
           </a:p>
@@ -11710,7 +11710,7 @@
                 <a:ea typeface="Calibri" pitchFamily="34" charset="-122"/>
                 <a:cs typeface="Calibri" pitchFamily="34" charset="-120"/>
               </a:rPr>
-              <a:t>Measured against 94 defect-free photographs. It errs toward flagging.</a:t>
+              <a:t>Deliberate. Recall is the safety metric; review time is the cost. The threshold is a slider.</a:t>
             </a:r>
             <a:endParaRPr lang="en-US" sz="1050" dirty="0"/>
           </a:p>
@@ -11785,7 +11785,7 @@
                 <a:ea typeface="Calibri" pitchFamily="34" charset="-122"/>
                 <a:cs typeface="Calibri" pitchFamily="34" charset="-120"/>
               </a:rPr>
-              <a:t>8-63% on unfamiliar imagery</a:t>
+              <a:t>56% on the one unseen source</a:t>
             </a:r>
             <a:endParaRPr lang="en-US" sz="1300" dirty="0"/>
           </a:p>
@@ -11827,7 +11827,7 @@
                 <a:ea typeface="Calibri" pitchFamily="34" charset="-122"/>
                 <a:cs typeface="Calibri" pitchFamily="34" charset="-120"/>
               </a:rPr>
-              <a:t>Versus 81% on imagery like its training data. Three unseen datasets, all published.</a:t>
+              <a:t>Versus 84-100% on the three in training. Only bridge-defect is wholly unseen, and we say so.</a:t>
             </a:r>
             <a:endParaRPr lang="en-US" sz="1050" dirty="0"/>
           </a:p>

--- a/deliverables/TwinVerse_Inspect_AI_Pitch.pptx
+++ b/deliverables/TwinVerse_Inspect_AI_Pitch.pptx
@@ -3112,7 +3112,7 @@
                 <a:ea typeface="Calibri" pitchFamily="34" charset="-122"/>
                 <a:cs typeface="Calibri" pitchFamily="34" charset="-120"/>
               </a:rPr>
-              <a:t>[ Event / Track ]   ·   [ Date ]   ·   Bano Qabil · Alkhidmat Foundation Pakistan</a:t>
+              <a:t>Alibaba Cloud AI Hackathon Pakistan 2026   ·   Bano Qabil · Alkhidmat Foundation Pakistan</a:t>
             </a:r>
             <a:endParaRPr lang="en-US" sz="1100" dirty="0"/>
           </a:p>
@@ -4694,17 +4694,6 @@
             <a:pPr algn="ctr" indent="0" marL="0">
               <a:buNone/>
             </a:pPr>
-            <a:r>
-              <a:rPr lang="en-US" sz="1150" dirty="0">
-                <a:solidFill>
-                  <a:srgbClr val="9FB0CC"/>
-                </a:solidFill>
-                <a:latin typeface="Calibri" pitchFamily="34" charset="0"/>
-                <a:ea typeface="Calibri" pitchFamily="34" charset="-122"/>
-                <a:cs typeface="Calibri" pitchFamily="34" charset="-120"/>
-              </a:rPr>
-              <a:t>[ Add focus area ]</a:t>
-            </a:r>
             <a:endParaRPr lang="en-US" sz="1150" dirty="0"/>
           </a:p>
         </p:txBody>
@@ -4913,17 +4902,6 @@
             <a:pPr algn="ctr" indent="0" marL="0">
               <a:buNone/>
             </a:pPr>
-            <a:r>
-              <a:rPr lang="en-US" sz="1150" dirty="0">
-                <a:solidFill>
-                  <a:srgbClr val="9FB0CC"/>
-                </a:solidFill>
-                <a:latin typeface="Calibri" pitchFamily="34" charset="0"/>
-                <a:ea typeface="Calibri" pitchFamily="34" charset="-122"/>
-                <a:cs typeface="Calibri" pitchFamily="34" charset="-120"/>
-              </a:rPr>
-              <a:t>[ Add focus area ]</a:t>
-            </a:r>
             <a:endParaRPr lang="en-US" sz="1150" dirty="0"/>
           </a:p>
         </p:txBody>
@@ -11250,45 +11228,30 @@
           </a:p>
         </p:txBody>
       </p:sp>
-      <p:sp>
-        <p:nvSpPr>
-          <p:cNvPr id="26" name="Text 24"/>
-          <p:cNvSpPr txBox="1"/>
-          <p:nvPr/>
-        </p:nvSpPr>
-        <p:spPr>
-          <a:xfrm>
-            <a:off x="685800" y="5715000"/>
-            <a:ext cx="10789920" cy="320040"/>
-          </a:xfrm>
-          <a:prstGeom prst="rect">
-            <a:avLst/>
-          </a:prstGeom>
-          <a:noFill/>
-          <a:ln/>
-        </p:spPr>
-        <p:txBody>
-          <a:bodyPr wrap="square" lIns="0" tIns="0" rIns="0" bIns="0" rtlCol="0" anchor="ctr"/>
-          <a:lstStyle/>
-          <a:p>
-            <a:pPr algn="ctr" indent="0" marL="0">
-              <a:buNone/>
-            </a:pPr>
-            <a:r>
-              <a:rPr lang="en-US" sz="1150" i="1" dirty="0">
-                <a:solidFill>
-                  <a:srgbClr val="64748B"/>
-                </a:solidFill>
-                <a:latin typeface="Calibri" pitchFamily="34" charset="0"/>
-                <a:ea typeface="Calibri" pitchFamily="34" charset="-122"/>
-                <a:cs typeface="Calibri" pitchFamily="34" charset="-120"/>
-              </a:rPr>
-              <a:t>[ Replace this line with a screenshot of the dashboard and the 3D viewer ]</a:t>
-            </a:r>
-            <a:endParaRPr lang="en-US" sz="1150" dirty="0"/>
-          </a:p>
-        </p:txBody>
-      </p:sp>
+      <p:pic>
+        <p:nvPicPr>
+          <p:cNvPr id="26" name="Image 0" descr="deck_dashboard.jpg">    </p:cNvPr>
+          <p:cNvPicPr>
+            <a:picLocks noChangeAspect="1"/>
+          </p:cNvPicPr>
+          <p:nvPr/>
+        </p:nvPicPr>
+        <p:blipFill>
+          <a:blip r:embed="rId1"/>
+          <a:stretch>
+            <a:fillRect/>
+          </a:stretch>
+        </p:blipFill>
+        <p:spPr>
+          <a:xfrm>
+            <a:off x="685800" y="5532120"/>
+            <a:ext cx="10789920" cy="1143000"/>
+          </a:xfrm>
+          <a:prstGeom prst="rect">
+            <a:avLst/>
+          </a:prstGeom>
+        </p:spPr>
+      </p:pic>
     </p:spTree>
   </p:cSld>
   <p:clrMapOvr>
